--- a/QuantLib_AAD_JIT.pptx
+++ b/QuantLib_AAD_JIT.pptx
@@ -4,6 +4,9 @@
   <p:sldMasterIdLst>
     <p:sldMasterId id="2147483648" r:id="rId1"/>
   </p:sldMasterIdLst>
+  <p:notesMasterIdLst>
+    <p:notesMasterId r:id="rId15"/>
+  </p:notesMasterIdLst>
   <p:sldIdLst>
     <p:sldId id="256" r:id="rId2"/>
     <p:sldId id="257" r:id="rId3"/>
@@ -19,10 +22,7 @@
     <p:sldId id="267" r:id="rId13"/>
     <p:sldId id="268" r:id="rId14"/>
   </p:sldIdLst>
-  <p:notesMasterIdLst>
-    <p:notesMasterId r:id="rId15"/>
-  </p:notesMasterIdLst>
-  <p:sldSz cx="9144000" cy="5143500"/>
+  <p:sldSz cx="9144000" cy="5143500" type="screen16x9"/>
   <p:notesSz cx="5143500" cy="9144000"/>
   <p:defaultTextStyle>
     <a:lvl1pPr marL="0" algn="l" defTabSz="914400" rtl="0" eaLnBrk="1" latinLnBrk="0" hangingPunct="1">
@@ -116,13 +116,20 @@
       </a:defRPr>
     </a:lvl9pPr>
   </p:defaultTextStyle>
+  <p:extLst>
+    <p:ext uri="{EFAFB233-063F-42B5-8137-9DF3F51BA10A}">
+      <p15:sldGuideLst xmlns:p15="http://schemas.microsoft.com/office/powerpoint/2012/main"/>
+    </p:ext>
+  </p:extLst>
 </p:presentation>
 </file>
 
 <file path=ppt/charts/chart1.xml><?xml version="1.0" encoding="utf-8"?>
-<c:chartSpace xmlns:c="http://schemas.openxmlformats.org/drawingml/2006/chart" xmlns:a="http://schemas.openxmlformats.org/drawingml/2006/main" xmlns:r="http://schemas.openxmlformats.org/officeDocument/2006/relationships">
+<c:chartSpace xmlns:c="http://schemas.openxmlformats.org/drawingml/2006/chart" xmlns:a="http://schemas.openxmlformats.org/drawingml/2006/main" xmlns:r="http://schemas.openxmlformats.org/officeDocument/2006/relationships" xmlns:c16r2="http://schemas.microsoft.com/office/drawing/2015/06/chart">
   <c:date1904 val="0"/>
+  <c:lang val="en-US"/>
   <c:roundedCorners val="0"/>
+  <c:style val="2"/>
   <c:chart>
     <c:title>
       <c:tx>
@@ -150,7 +157,6 @@
           </a:p>
         </c:rich>
       </c:tx>
-      <c:layout/>
       <c:overlay val="0"/>
     </c:title>
     <c:autoTitleDeleted val="0"/>
@@ -183,18 +189,26 @@
           <c:invertIfNegative val="0"/>
           <c:dLbls>
             <c:numFmt formatCode="#,##0" sourceLinked="0"/>
+            <c:spPr>
+              <a:noFill/>
+              <a:ln>
+                <a:noFill/>
+              </a:ln>
+              <a:effectLst/>
+            </c:spPr>
             <c:txPr>
               <a:bodyPr/>
               <a:lstStyle/>
               <a:p>
                 <a:pPr>
-                  <a:defRPr b="0" i="0" strike="noStrike" sz="900" u="none">
+                  <a:defRPr sz="900" b="0" i="0" u="none" strike="noStrike">
                     <a:solidFill>
                       <a:srgbClr val="1E293B"/>
                     </a:solidFill>
                     <a:latin typeface="Arial"/>
                   </a:defRPr>
                 </a:pPr>
+                <a:endParaRPr lang="en-US"/>
               </a:p>
             </c:txPr>
             <c:showLegendKey val="0"/>
@@ -204,52 +218,55 @@
             <c:showPercent val="0"/>
             <c:showBubbleSize val="0"/>
             <c:showLeaderLines val="0"/>
+            <c:extLst>
+              <c:ext xmlns:c15="http://schemas.microsoft.com/office/drawing/2012/chart" uri="{CE6537A1-D6FC-4f65-9D91-7224C49458BB}">
+                <c15:showLeaderLines val="0"/>
+              </c:ext>
+            </c:extLst>
           </c:dLbls>
           <c:cat>
-            <c:multiLvlStrRef>
+            <c:strRef>
               <c:f>Sheet1!$A$2:$A$10</c:f>
-              <c:multiLvlStrCache>
+              <c:strCache>
                 <c:ptCount val="9"/>
-                <c:lvl>
-                  <c:pt idx="0">
-                    <c:v>N=3
+                <c:pt idx="0">
+                  <c:v>N=3
 Swaption</c:v>
-                  </c:pt>
-                  <c:pt idx="1">
-                    <c:v>N=4
+                </c:pt>
+                <c:pt idx="1">
+                  <c:v>N=4
 Eur Call</c:v>
-                  </c:pt>
-                  <c:pt idx="2">
-                    <c:v>N=5
+                </c:pt>
+                <c:pt idx="2">
+                  <c:v>N=5
 Basket MC</c:v>
-                  </c:pt>
-                  <c:pt idx="3">
-                    <c:v>N=6
+                </c:pt>
+                <c:pt idx="3">
+                  <c:v>N=6
 CDS MidPt</c:v>
-                  </c:pt>
-                  <c:pt idx="4">
-                    <c:v>N=9
+                </c:pt>
+                <c:pt idx="4">
+                  <c:v>N=9
 SOFR OIS</c:v>
-                  </c:pt>
-                  <c:pt idx="5">
-                    <c:v>N=14
+                </c:pt>
+                <c:pt idx="5">
+                  <c:v>N=14
 Risky Bond</c:v>
-                  </c:pt>
-                  <c:pt idx="6">
-                    <c:v>N=17
+                </c:pt>
+                <c:pt idx="6">
+                  <c:v>N=17
 IRS</c:v>
-                  </c:pt>
-                  <c:pt idx="7">
-                    <c:v>N=18
+                </c:pt>
+                <c:pt idx="7">
+                  <c:v>N=18
 IR Cap</c:v>
-                  </c:pt>
-                  <c:pt idx="8">
-                    <c:v>N=20
+                </c:pt>
+                <c:pt idx="8">
+                  <c:v>N=20
 ISDA CDS</c:v>
-                  </c:pt>
-                </c:lvl>
-              </c:multiLvlStrCache>
-            </c:multiLvlStrRef>
+                </c:pt>
+              </c:strCache>
+            </c:strRef>
           </c:cat>
           <c:val>
             <c:numRef>
@@ -287,36 +304,23 @@
               </c:numCache>
             </c:numRef>
           </c:val>
+          <c:extLst>
+            <c:ext xmlns:c16="http://schemas.microsoft.com/office/drawing/2014/chart" uri="{C3380CC4-5D6E-409C-BE32-E72D297353CC}">
+              <c16:uniqueId val="{00000000-4D80-436E-A8DC-A8E8C05107E4}"/>
+            </c:ext>
+          </c:extLst>
         </c:ser>
         <c:dLbls>
-          <c:numFmt formatCode="#,##0" sourceLinked="0"/>
-          <c:txPr>
-            <a:bodyPr/>
-            <a:lstStyle/>
-            <a:p>
-              <a:pPr>
-                <a:defRPr b="0" i="0" strike="noStrike" sz="900" u="none">
-                  <a:solidFill>
-                    <a:srgbClr val="1E293B"/>
-                  </a:solidFill>
-                  <a:latin typeface="Arial"/>
-                </a:defRPr>
-              </a:pPr>
-            </a:p>
-          </c:txPr>
           <c:showLegendKey val="0"/>
           <c:showVal val="1"/>
           <c:showCatName val="0"/>
           <c:showSerName val="0"/>
           <c:showPercent val="0"/>
           <c:showBubbleSize val="0"/>
-          <c:showLeaderLines val="0"/>
         </c:dLbls>
         <c:gapWidth val="150"/>
-        <c:overlap val="0"/>
         <c:axId val="2094734554"/>
         <c:axId val="2094734552"/>
-        <c:axId val="2094734556"/>
       </c:barChart>
       <c:catAx>
         <c:axId val="2094734554"/>
@@ -357,6 +361,7 @@
         <c:crosses val="autoZero"/>
         <c:auto val="1"/>
         <c:lblAlgn val="ctr"/>
+        <c:lblOffset val="100"/>
         <c:noMultiLvlLbl val="1"/>
       </c:catAx>
       <c:valAx>
@@ -420,6 +425,7 @@
     </c:plotArea>
     <c:plotVisOnly val="1"/>
     <c:dispBlanksAs val="span"/>
+    <c:showDLblsOverMax val="1"/>
   </c:chart>
   <c:spPr>
     <a:solidFill>
@@ -458,234 +464,10 @@
           <a:chExt cx="0" cy="0"/>
         </a:xfrm>
       </p:grpSpPr>
-      <p:sp>
-        <p:nvSpPr>
-          <p:cNvPr id="2" name="Header Placeholder 1"/>
-          <p:cNvSpPr>
-            <a:spLocks noGrp="1"/>
-          </p:cNvSpPr>
-          <p:nvPr>
-            <p:ph type="hdr" sz="quarter"/>
-          </p:nvPr>
-        </p:nvSpPr>
-        <p:spPr>
-          <a:xfrm>
-            <a:off x="0" y="0"/>
-            <a:ext cx="2971800" cy="458788"/>
-          </a:xfrm>
-          <a:prstGeom prst="rect">
-            <a:avLst/>
-          </a:prstGeom>
-        </p:spPr>
-        <p:txBody>
-          <a:bodyPr vert="horz" lIns="91440" tIns="45720" rIns="91440" bIns="45720" rtlCol="0"/>
-          <a:lstStyle>
-            <a:lvl1pPr algn="l">
-              <a:defRPr sz="1200"/>
-            </a:lvl1pPr>
-          </a:lstStyle>
-          <a:p>
-            <a:endParaRPr lang="en-US"/>
-          </a:p>
-        </p:txBody>
-      </p:sp>
-      <p:sp>
-        <p:nvSpPr>
-          <p:cNvPr id="3" name="Date Placeholder 2"/>
-          <p:cNvSpPr>
-            <a:spLocks noGrp="1"/>
-          </p:cNvSpPr>
-          <p:nvPr>
-            <p:ph type="dt" idx="1"/>
-          </p:nvPr>
-        </p:nvSpPr>
-        <p:spPr>
-          <a:xfrm>
-            <a:off x="3884613" y="0"/>
-            <a:ext cx="2971800" cy="458788"/>
-          </a:xfrm>
-          <a:prstGeom prst="rect">
-            <a:avLst/>
-          </a:prstGeom>
-        </p:spPr>
-        <p:txBody>
-          <a:bodyPr vert="horz" lIns="91440" tIns="45720" rIns="91440" bIns="45720" rtlCol="0"/>
-          <a:lstStyle>
-            <a:lvl1pPr algn="r">
-              <a:defRPr sz="1200"/>
-            </a:lvl1pPr>
-          </a:lstStyle>
-          <a:p>
-            <a:fld id="{5282F153-3F37-0F45-9E97-73ACFA13230C}" type="datetimeFigureOut">
-              <a:rPr lang="en-US"/>
-              <a:t>7/23/19</a:t>
-            </a:fld>
-            <a:endParaRPr lang="en-US"/>
-          </a:p>
-        </p:txBody>
-      </p:sp>
-      <p:sp>
-        <p:nvSpPr>
-          <p:cNvPr id="4" name="Slide Image Placeholder 3"/>
-          <p:cNvSpPr>
-            <a:spLocks noGrp="1" noRot="1" noChangeAspect="1"/>
-          </p:cNvSpPr>
-          <p:nvPr>
-            <p:ph type="sldImg" idx="2"/>
-          </p:nvPr>
-        </p:nvSpPr>
-        <p:spPr>
-          <a:xfrm>
-            <a:off x="685800" y="1143000"/>
-            <a:ext cx="5486400" cy="3086100"/>
-          </a:xfrm>
-          <a:prstGeom prst="rect">
-            <a:avLst/>
-          </a:prstGeom>
-          <a:noFill/>
-          <a:ln w="12700">
-            <a:solidFill>
-              <a:prstClr val="black"/>
-            </a:solidFill>
-          </a:ln>
-        </p:spPr>
-        <p:txBody>
-          <a:bodyPr vert="horz" lIns="91440" tIns="45720" rIns="91440" bIns="45720" rtlCol="0" anchor="ctr"/>
-          <a:lstStyle/>
-          <a:p>
-            <a:endParaRPr lang="en-US"/>
-          </a:p>
-        </p:txBody>
-      </p:sp>
-      <p:sp>
-        <p:nvSpPr>
-          <p:cNvPr id="5" name="Notes Placeholder 4"/>
-          <p:cNvSpPr>
-            <a:spLocks noGrp="1"/>
-          </p:cNvSpPr>
-          <p:nvPr>
-            <p:ph type="body" sz="quarter" idx="3"/>
-          </p:nvPr>
-        </p:nvSpPr>
-        <p:spPr>
-          <a:xfrm>
-            <a:off x="685800" y="4400550"/>
-            <a:ext cx="5486400" cy="3600450"/>
-          </a:xfrm>
-          <a:prstGeom prst="rect">
-            <a:avLst/>
-          </a:prstGeom>
-        </p:spPr>
-        <p:txBody>
-          <a:bodyPr vert="horz" lIns="91440" tIns="45720" rIns="91440" bIns="45720" rtlCol="0"/>
-          <a:lstStyle/>
-          <a:p>
-            <a:pPr lvl="0"/>
-            <a:r>
-              <a:rPr lang="en-US"/>
-              <a:t>Click to edit Master text styles</a:t>
-            </a:r>
-          </a:p>
-          <a:p>
-            <a:pPr lvl="1"/>
-            <a:r>
-              <a:rPr lang="en-US"/>
-              <a:t>Second level</a:t>
-            </a:r>
-          </a:p>
-          <a:p>
-            <a:pPr lvl="2"/>
-            <a:r>
-              <a:rPr lang="en-US"/>
-              <a:t>Third level</a:t>
-            </a:r>
-          </a:p>
-          <a:p>
-            <a:pPr lvl="3"/>
-            <a:r>
-              <a:rPr lang="en-US"/>
-              <a:t>Fourth level</a:t>
-            </a:r>
-          </a:p>
-          <a:p>
-            <a:pPr lvl="4"/>
-            <a:r>
-              <a:rPr lang="en-US"/>
-              <a:t>Fifth level</a:t>
-            </a:r>
-          </a:p>
-        </p:txBody>
-      </p:sp>
-      <p:sp>
-        <p:nvSpPr>
-          <p:cNvPr id="6" name="Footer Placeholder 5"/>
-          <p:cNvSpPr>
-            <a:spLocks noGrp="1"/>
-          </p:cNvSpPr>
-          <p:nvPr>
-            <p:ph type="ftr" sz="quarter" idx="4"/>
-          </p:nvPr>
-        </p:nvSpPr>
-        <p:spPr>
-          <a:xfrm>
-            <a:off x="0" y="8685213"/>
-            <a:ext cx="2971800" cy="458787"/>
-          </a:xfrm>
-          <a:prstGeom prst="rect">
-            <a:avLst/>
-          </a:prstGeom>
-        </p:spPr>
-        <p:txBody>
-          <a:bodyPr vert="horz" lIns="91440" tIns="45720" rIns="91440" bIns="45720" rtlCol="0" anchor="b"/>
-          <a:lstStyle>
-            <a:lvl1pPr algn="l">
-              <a:defRPr sz="1200"/>
-            </a:lvl1pPr>
-          </a:lstStyle>
-          <a:p>
-            <a:endParaRPr lang="en-US"/>
-          </a:p>
-        </p:txBody>
-      </p:sp>
-      <p:sp>
-        <p:nvSpPr>
-          <p:cNvPr id="7" name="Slide Number Placeholder 6"/>
-          <p:cNvSpPr>
-            <a:spLocks noGrp="1"/>
-          </p:cNvSpPr>
-          <p:nvPr>
-            <p:ph type="sldNum" sz="quarter" idx="5"/>
-          </p:nvPr>
-        </p:nvSpPr>
-        <p:spPr>
-          <a:xfrm>
-            <a:off x="3884613" y="8685213"/>
-            <a:ext cx="2971800" cy="458787"/>
-          </a:xfrm>
-          <a:prstGeom prst="rect">
-            <a:avLst/>
-          </a:prstGeom>
-        </p:spPr>
-        <p:txBody>
-          <a:bodyPr vert="horz" lIns="91440" tIns="45720" rIns="91440" bIns="45720" rtlCol="0" anchor="b"/>
-          <a:lstStyle>
-            <a:lvl1pPr algn="r">
-              <a:defRPr sz="1200"/>
-            </a:lvl1pPr>
-          </a:lstStyle>
-          <a:p>
-            <a:fld id="{CE5E9CC1-C706-0F49-92D6-E571CC5EEA8F}" type="slidenum">
-              <a:rPr lang="en-US"/>
-              <a:t>‹#›</a:t>
-            </a:fld>
-            <a:endParaRPr lang="en-US"/>
-          </a:p>
-        </p:txBody>
-      </p:sp>
     </p:spTree>
     <p:extLst>
       <p:ext uri="{BB962C8B-B14F-4D97-AF65-F5344CB8AC3E}">
-        <p14:creationId xmlns:p14="http://schemas.microsoft.com/office/powerpoint/2010/main" val="1024086991"/>
+        <p14:creationId xmlns:p14="http://schemas.microsoft.com/office/powerpoint/2010/main" val="3144790725"/>
       </p:ext>
     </p:extLst>
   </p:cSld>
@@ -829,10 +611,6 @@
           <a:bodyPr/>
           <a:lstStyle/>
           <a:p>
-            <a:r>
-              <a:rPr lang="en-US" dirty="0"/>
-              <a:t/>
-            </a:r>
             <a:endParaRPr lang="en-US" dirty="0"/>
           </a:p>
         </p:txBody>
@@ -917,10 +695,6 @@
           <a:bodyPr/>
           <a:lstStyle/>
           <a:p>
-            <a:r>
-              <a:rPr lang="en-US" dirty="0"/>
-              <a:t/>
-            </a:r>
             <a:endParaRPr lang="en-US" dirty="0"/>
           </a:p>
         </p:txBody>
@@ -1005,10 +779,6 @@
           <a:bodyPr/>
           <a:lstStyle/>
           <a:p>
-            <a:r>
-              <a:rPr lang="en-US" dirty="0"/>
-              <a:t/>
-            </a:r>
             <a:endParaRPr lang="en-US" dirty="0"/>
           </a:p>
         </p:txBody>
@@ -1093,10 +863,6 @@
           <a:bodyPr/>
           <a:lstStyle/>
           <a:p>
-            <a:r>
-              <a:rPr lang="en-US" dirty="0"/>
-              <a:t/>
-            </a:r>
             <a:endParaRPr lang="en-US" dirty="0"/>
           </a:p>
         </p:txBody>
@@ -1181,10 +947,6 @@
           <a:bodyPr/>
           <a:lstStyle/>
           <a:p>
-            <a:r>
-              <a:rPr lang="en-US" dirty="0"/>
-              <a:t/>
-            </a:r>
             <a:endParaRPr lang="en-US" dirty="0"/>
           </a:p>
         </p:txBody>
@@ -1269,10 +1031,6 @@
           <a:bodyPr/>
           <a:lstStyle/>
           <a:p>
-            <a:r>
-              <a:rPr lang="en-US" dirty="0"/>
-              <a:t/>
-            </a:r>
             <a:endParaRPr lang="en-US" dirty="0"/>
           </a:p>
         </p:txBody>
@@ -1357,10 +1115,6 @@
           <a:bodyPr/>
           <a:lstStyle/>
           <a:p>
-            <a:r>
-              <a:rPr lang="en-US" dirty="0"/>
-              <a:t/>
-            </a:r>
             <a:endParaRPr lang="en-US" dirty="0"/>
           </a:p>
         </p:txBody>
@@ -1445,10 +1199,6 @@
           <a:bodyPr/>
           <a:lstStyle/>
           <a:p>
-            <a:r>
-              <a:rPr lang="en-US" dirty="0"/>
-              <a:t/>
-            </a:r>
             <a:endParaRPr lang="en-US" dirty="0"/>
           </a:p>
         </p:txBody>
@@ -1533,10 +1283,6 @@
           <a:bodyPr/>
           <a:lstStyle/>
           <a:p>
-            <a:r>
-              <a:rPr lang="en-US" dirty="0"/>
-              <a:t/>
-            </a:r>
             <a:endParaRPr lang="en-US" dirty="0"/>
           </a:p>
         </p:txBody>
@@ -1621,10 +1367,6 @@
           <a:bodyPr/>
           <a:lstStyle/>
           <a:p>
-            <a:r>
-              <a:rPr lang="en-US" dirty="0"/>
-              <a:t/>
-            </a:r>
             <a:endParaRPr lang="en-US" dirty="0"/>
           </a:p>
         </p:txBody>
@@ -1709,10 +1451,6 @@
           <a:bodyPr/>
           <a:lstStyle/>
           <a:p>
-            <a:r>
-              <a:rPr lang="en-US" dirty="0"/>
-              <a:t/>
-            </a:r>
             <a:endParaRPr lang="en-US" dirty="0"/>
           </a:p>
         </p:txBody>
@@ -1797,10 +1535,6 @@
           <a:bodyPr/>
           <a:lstStyle/>
           <a:p>
-            <a:r>
-              <a:rPr lang="en-US" dirty="0"/>
-              <a:t/>
-            </a:r>
             <a:endParaRPr lang="en-US" dirty="0"/>
           </a:p>
         </p:txBody>
@@ -1885,10 +1619,6 @@
           <a:bodyPr/>
           <a:lstStyle/>
           <a:p>
-            <a:r>
-              <a:rPr lang="en-US" dirty="0"/>
-              <a:t/>
-            </a:r>
             <a:endParaRPr lang="en-US" dirty="0"/>
           </a:p>
         </p:txBody>
@@ -1962,6 +1692,11 @@
 <file path=ppt/slideMasters/slideMaster1.xml><?xml version="1.0" encoding="utf-8"?>
 <p:sldMaster xmlns:a="http://schemas.openxmlformats.org/drawingml/2006/main" xmlns:r="http://schemas.openxmlformats.org/officeDocument/2006/relationships" xmlns:p="http://schemas.openxmlformats.org/presentationml/2006/main">
   <p:cSld>
+    <p:bg>
+      <p:bgRef idx="1001">
+        <a:schemeClr val="bg1"/>
+      </p:bgRef>
+    </p:bg>
     <p:spTree>
       <p:nvGrpSpPr>
         <p:cNvPr id="1" name=""/>
@@ -2244,6 +1979,7 @@
         <a:solidFill>
           <a:srgbClr val="0A1628"/>
         </a:solidFill>
+        <a:effectLst/>
       </p:bgPr>
     </p:bg>
     <p:spTree>
@@ -2356,7 +2092,7 @@
           <a:bodyPr wrap="square" lIns="0" tIns="0" rIns="0" bIns="0" rtlCol="0" anchor="ctr"/>
           <a:lstStyle/>
           <a:p>
-            <a:pPr indent="0" marL="0">
+            <a:pPr marL="0" indent="0">
               <a:buNone/>
             </a:pPr>
             <a:r>
@@ -2395,7 +2131,7 @@
           <a:bodyPr wrap="square" lIns="0" tIns="0" rIns="0" bIns="0" rtlCol="0" anchor="ctr"/>
           <a:lstStyle/>
           <a:p>
-            <a:pPr indent="0" marL="0">
+            <a:pPr marL="0" indent="0">
               <a:buNone/>
             </a:pPr>
             <a:r>
@@ -2434,7 +2170,7 @@
           <a:bodyPr wrap="square" lIns="0" tIns="0" rIns="0" bIns="0" rtlCol="0" anchor="ctr"/>
           <a:lstStyle/>
           <a:p>
-            <a:pPr indent="0" marL="0">
+            <a:pPr marL="0" indent="0">
               <a:buNone/>
             </a:pPr>
             <a:r>
@@ -2451,7 +2187,7 @@
             <a:endParaRPr lang="en-US" sz="1400" dirty="0"/>
           </a:p>
           <a:p>
-            <a:pPr indent="0" marL="0">
+            <a:pPr marL="0" indent="0">
               <a:buNone/>
             </a:pPr>
             <a:r>
@@ -2515,7 +2251,7 @@
           <a:bodyPr wrap="square" lIns="0" tIns="0" rIns="0" bIns="0" rtlCol="0" anchor="ctr"/>
           <a:lstStyle/>
           <a:p>
-            <a:pPr algn="ctr" indent="0" marL="0">
+            <a:pPr marL="0" indent="0" algn="ctr">
               <a:buNone/>
             </a:pPr>
             <a:r>
@@ -2579,7 +2315,7 @@
           <a:bodyPr wrap="square" lIns="0" tIns="0" rIns="0" bIns="0" rtlCol="0" anchor="ctr"/>
           <a:lstStyle/>
           <a:p>
-            <a:pPr algn="ctr" indent="0" marL="0">
+            <a:pPr marL="0" indent="0" algn="ctr">
               <a:buNone/>
             </a:pPr>
             <a:r>
@@ -2643,7 +2379,7 @@
           <a:bodyPr wrap="square" lIns="0" tIns="0" rIns="0" bIns="0" rtlCol="0" anchor="ctr"/>
           <a:lstStyle/>
           <a:p>
-            <a:pPr algn="ctr" indent="0" marL="0">
+            <a:pPr marL="0" indent="0" algn="ctr">
               <a:buNone/>
             </a:pPr>
             <a:r>
@@ -2707,7 +2443,7 @@
           <a:bodyPr wrap="square" lIns="0" tIns="0" rIns="0" bIns="0" rtlCol="0" anchor="ctr"/>
           <a:lstStyle/>
           <a:p>
-            <a:pPr algn="ctr" indent="0" marL="0">
+            <a:pPr marL="0" indent="0" algn="ctr">
               <a:buNone/>
             </a:pPr>
             <a:r>
@@ -2746,7 +2482,7 @@
           <a:bodyPr wrap="square" lIns="0" tIns="0" rIns="0" bIns="0" rtlCol="0" anchor="ctr"/>
           <a:lstStyle/>
           <a:p>
-            <a:pPr indent="0" marL="0">
+            <a:pPr marL="0" indent="0">
               <a:buNone/>
             </a:pPr>
             <a:r>
@@ -2785,7 +2521,7 @@
           <a:bodyPr wrap="square" lIns="0" tIns="0" rIns="0" bIns="0" rtlCol="0" anchor="ctr"/>
           <a:lstStyle/>
           <a:p>
-            <a:pPr indent="0" marL="0">
+            <a:pPr marL="0" indent="0">
               <a:buNone/>
             </a:pPr>
             <a:r>
@@ -2802,7 +2538,7 @@
             <a:endParaRPr lang="en-US" sz="1200" dirty="0"/>
           </a:p>
           <a:p>
-            <a:pPr indent="0" marL="0">
+            <a:pPr marL="0" indent="0">
               <a:buNone/>
             </a:pPr>
             <a:r>
@@ -2841,7 +2577,7 @@
           <a:bodyPr wrap="square" lIns="0" tIns="0" rIns="0" bIns="0" rtlCol="0" anchor="ctr"/>
           <a:lstStyle/>
           <a:p>
-            <a:pPr indent="0" marL="0">
+            <a:pPr marL="0" indent="0">
               <a:buNone/>
             </a:pPr>
             <a:r>
@@ -2880,7 +2616,7 @@
           <a:bodyPr wrap="square" lIns="0" tIns="0" rIns="0" bIns="0" rtlCol="0" anchor="ctr"/>
           <a:lstStyle/>
           <a:p>
-            <a:pPr indent="0" marL="0">
+            <a:pPr marL="0" indent="0">
               <a:buNone/>
             </a:pPr>
             <a:r>
@@ -2897,7 +2633,7 @@
             <a:endParaRPr lang="en-US" sz="1200" dirty="0"/>
           </a:p>
           <a:p>
-            <a:pPr indent="0" marL="0">
+            <a:pPr marL="0" indent="0">
               <a:buNone/>
             </a:pPr>
             <a:r>
@@ -2936,7 +2672,7 @@
           <a:bodyPr wrap="square" lIns="0" tIns="0" rIns="0" bIns="0" rtlCol="0" anchor="ctr"/>
           <a:lstStyle/>
           <a:p>
-            <a:pPr indent="0" marL="0">
+            <a:pPr marL="0" indent="0">
               <a:buNone/>
             </a:pPr>
             <a:r>
@@ -2975,7 +2711,7 @@
           <a:bodyPr wrap="square" lIns="0" tIns="0" rIns="0" bIns="0" rtlCol="0" anchor="ctr"/>
           <a:lstStyle/>
           <a:p>
-            <a:pPr indent="0" marL="0">
+            <a:pPr marL="0" indent="0">
               <a:buNone/>
             </a:pPr>
             <a:r>
@@ -3014,7 +2750,7 @@
           <a:bodyPr wrap="square" lIns="0" tIns="0" rIns="0" bIns="0" rtlCol="0" anchor="ctr"/>
           <a:lstStyle/>
           <a:p>
-            <a:pPr indent="0" marL="0">
+            <a:pPr marL="0" indent="0">
               <a:buNone/>
             </a:pPr>
             <a:r>
@@ -3053,7 +2789,7 @@
           <a:bodyPr wrap="square" lIns="0" tIns="0" rIns="0" bIns="0" rtlCol="0" anchor="ctr"/>
           <a:lstStyle/>
           <a:p>
-            <a:pPr indent="0" marL="0">
+            <a:pPr marL="0" indent="0">
               <a:buNone/>
             </a:pPr>
             <a:r>
@@ -3092,7 +2828,7 @@
           <a:bodyPr wrap="square" lIns="0" tIns="0" rIns="0" bIns="0" rtlCol="0" anchor="ctr"/>
           <a:lstStyle/>
           <a:p>
-            <a:pPr indent="0" marL="0">
+            <a:pPr marL="0" indent="0">
               <a:buNone/>
             </a:pPr>
             <a:r>
@@ -3126,6 +2862,7 @@
         <a:solidFill>
           <a:srgbClr val="F0F6FA"/>
         </a:solidFill>
+        <a:effectLst/>
       </p:bgPr>
     </p:bg>
     <p:spTree>
@@ -3213,7 +2950,7 @@
           <a:bodyPr wrap="square" lIns="0" tIns="0" rIns="0" bIns="0" rtlCol="0" anchor="ctr"/>
           <a:lstStyle/>
           <a:p>
-            <a:pPr indent="0" marL="0">
+            <a:pPr marL="0" indent="0">
               <a:buNone/>
             </a:pPr>
             <a:r>
@@ -3252,7 +2989,7 @@
           <a:bodyPr wrap="square" lIns="0" tIns="0" rIns="0" bIns="0" rtlCol="0" anchor="ctr"/>
           <a:lstStyle/>
           <a:p>
-            <a:pPr indent="0" marL="0">
+            <a:pPr marL="0" indent="0">
               <a:buNone/>
             </a:pPr>
             <a:r>
@@ -3291,7 +3028,7 @@
           <a:bodyPr wrap="square" lIns="0" tIns="0" rIns="0" bIns="0" rtlCol="0" anchor="ctr"/>
           <a:lstStyle/>
           <a:p>
-            <a:pPr indent="0" marL="0">
+            <a:pPr marL="0" indent="0">
               <a:buNone/>
             </a:pPr>
             <a:r>
@@ -3355,7 +3092,7 @@
           <a:bodyPr wrap="square" lIns="0" tIns="0" rIns="0" bIns="0" rtlCol="0" anchor="ctr"/>
           <a:lstStyle/>
           <a:p>
-            <a:pPr indent="0" marL="0">
+            <a:pPr marL="0" indent="0">
               <a:buNone/>
             </a:pPr>
             <a:r>
@@ -3419,7 +3156,7 @@
           <a:bodyPr wrap="square" lIns="0" tIns="0" rIns="0" bIns="0" rtlCol="0" anchor="ctr"/>
           <a:lstStyle/>
           <a:p>
-            <a:pPr indent="0" marL="0">
+            <a:pPr marL="0" indent="0">
               <a:buNone/>
             </a:pPr>
             <a:r>
@@ -3483,7 +3220,7 @@
           <a:bodyPr wrap="square" lIns="0" tIns="0" rIns="0" bIns="0" rtlCol="0" anchor="ctr"/>
           <a:lstStyle/>
           <a:p>
-            <a:pPr indent="0" marL="0">
+            <a:pPr marL="0" indent="0">
               <a:buNone/>
             </a:pPr>
             <a:r>
@@ -3547,7 +3284,7 @@
           <a:bodyPr wrap="square" lIns="0" tIns="0" rIns="0" bIns="0" rtlCol="0" anchor="ctr"/>
           <a:lstStyle/>
           <a:p>
-            <a:pPr indent="0" marL="0">
+            <a:pPr marL="0" indent="0">
               <a:buNone/>
             </a:pPr>
             <a:r>
@@ -3611,7 +3348,7 @@
           <a:bodyPr wrap="square" lIns="0" tIns="0" rIns="0" bIns="0" rtlCol="0" anchor="ctr"/>
           <a:lstStyle/>
           <a:p>
-            <a:pPr indent="0" marL="0">
+            <a:pPr marL="0" indent="0">
               <a:buNone/>
             </a:pPr>
             <a:r>
@@ -3675,7 +3412,7 @@
           <a:bodyPr wrap="square" lIns="0" tIns="0" rIns="0" bIns="0" rtlCol="0" anchor="ctr"/>
           <a:lstStyle/>
           <a:p>
-            <a:pPr indent="0" marL="0">
+            <a:pPr marL="0" indent="0">
               <a:buNone/>
             </a:pPr>
             <a:r>
@@ -3739,7 +3476,7 @@
           <a:bodyPr wrap="square" lIns="0" tIns="0" rIns="0" bIns="0" rtlCol="0" anchor="ctr"/>
           <a:lstStyle/>
           <a:p>
-            <a:pPr indent="0" marL="0">
+            <a:pPr marL="0" indent="0">
               <a:buNone/>
             </a:pPr>
             <a:r>
@@ -3803,7 +3540,7 @@
           <a:bodyPr wrap="square" lIns="0" tIns="0" rIns="0" bIns="0" rtlCol="0" anchor="ctr"/>
           <a:lstStyle/>
           <a:p>
-            <a:pPr indent="0" marL="0">
+            <a:pPr marL="0" indent="0">
               <a:buNone/>
             </a:pPr>
             <a:r>
@@ -3867,7 +3604,7 @@
           <a:bodyPr wrap="square" lIns="0" tIns="0" rIns="0" bIns="0" rtlCol="0" anchor="ctr"/>
           <a:lstStyle/>
           <a:p>
-            <a:pPr indent="0" marL="0">
+            <a:pPr marL="0" indent="0">
               <a:buNone/>
             </a:pPr>
             <a:r>
@@ -3931,7 +3668,7 @@
           <a:bodyPr wrap="square" lIns="0" tIns="0" rIns="0" bIns="0" rtlCol="0" anchor="ctr"/>
           <a:lstStyle/>
           <a:p>
-            <a:pPr indent="0" marL="0">
+            <a:pPr marL="0" indent="0">
               <a:buNone/>
             </a:pPr>
             <a:r>
@@ -3995,7 +3732,7 @@
           <a:bodyPr wrap="square" lIns="0" tIns="0" rIns="0" bIns="0" rtlCol="0" anchor="ctr"/>
           <a:lstStyle/>
           <a:p>
-            <a:pPr indent="0" marL="0">
+            <a:pPr marL="0" indent="0">
               <a:buNone/>
             </a:pPr>
             <a:r>
@@ -4059,7 +3796,7 @@
           <a:bodyPr wrap="square" lIns="0" tIns="0" rIns="0" bIns="0" rtlCol="0" anchor="ctr"/>
           <a:lstStyle/>
           <a:p>
-            <a:pPr indent="0" marL="0">
+            <a:pPr marL="0" indent="0">
               <a:buNone/>
             </a:pPr>
             <a:r>
@@ -4123,7 +3860,7 @@
           <a:bodyPr wrap="square" lIns="0" tIns="0" rIns="0" bIns="0" rtlCol="0" anchor="ctr"/>
           <a:lstStyle/>
           <a:p>
-            <a:pPr indent="0" marL="0">
+            <a:pPr marL="0" indent="0">
               <a:buNone/>
             </a:pPr>
             <a:r>
@@ -4187,7 +3924,7 @@
           <a:bodyPr wrap="square" lIns="0" tIns="0" rIns="0" bIns="0" rtlCol="0" anchor="ctr"/>
           <a:lstStyle/>
           <a:p>
-            <a:pPr indent="0" marL="0">
+            <a:pPr marL="0" indent="0">
               <a:buNone/>
             </a:pPr>
             <a:r>
@@ -4251,7 +3988,7 @@
           <a:bodyPr wrap="square" lIns="0" tIns="0" rIns="0" bIns="0" rtlCol="0" anchor="ctr"/>
           <a:lstStyle/>
           <a:p>
-            <a:pPr indent="0" marL="0">
+            <a:pPr marL="0" indent="0">
               <a:buNone/>
             </a:pPr>
             <a:r>
@@ -4315,7 +4052,7 @@
           <a:bodyPr wrap="square" lIns="0" tIns="0" rIns="0" bIns="0" rtlCol="0" anchor="ctr"/>
           <a:lstStyle/>
           <a:p>
-            <a:pPr indent="0" marL="0">
+            <a:pPr marL="0" indent="0">
               <a:buNone/>
             </a:pPr>
             <a:r>
@@ -4379,7 +4116,7 @@
           <a:bodyPr wrap="square" lIns="0" tIns="0" rIns="0" bIns="0" rtlCol="0" anchor="ctr"/>
           <a:lstStyle/>
           <a:p>
-            <a:pPr indent="0" marL="0">
+            <a:pPr marL="0" indent="0">
               <a:buNone/>
             </a:pPr>
             <a:r>
@@ -4443,7 +4180,7 @@
           <a:bodyPr wrap="square" lIns="0" tIns="0" rIns="0" bIns="0" rtlCol="0" anchor="ctr"/>
           <a:lstStyle/>
           <a:p>
-            <a:pPr indent="0" marL="0">
+            <a:pPr marL="0" indent="0">
               <a:buNone/>
             </a:pPr>
             <a:r>
@@ -4507,7 +4244,7 @@
           <a:bodyPr wrap="square" lIns="0" tIns="0" rIns="0" bIns="0" rtlCol="0" anchor="ctr"/>
           <a:lstStyle/>
           <a:p>
-            <a:pPr indent="0" marL="0">
+            <a:pPr marL="0" indent="0">
               <a:buNone/>
             </a:pPr>
             <a:r>
@@ -4571,7 +4308,7 @@
           <a:bodyPr wrap="square" lIns="0" tIns="0" rIns="0" bIns="0" rtlCol="0" anchor="ctr"/>
           <a:lstStyle/>
           <a:p>
-            <a:pPr indent="0" marL="0">
+            <a:pPr marL="0" indent="0">
               <a:buNone/>
             </a:pPr>
             <a:r>
@@ -4635,7 +4372,7 @@
           <a:bodyPr wrap="square" lIns="0" tIns="0" rIns="0" bIns="0" rtlCol="0" anchor="ctr"/>
           <a:lstStyle/>
           <a:p>
-            <a:pPr indent="0" marL="0">
+            <a:pPr marL="0" indent="0">
               <a:buNone/>
             </a:pPr>
             <a:r>
@@ -4699,7 +4436,7 @@
           <a:bodyPr wrap="square" lIns="0" tIns="0" rIns="0" bIns="0" rtlCol="0" anchor="ctr"/>
           <a:lstStyle/>
           <a:p>
-            <a:pPr indent="0" marL="0">
+            <a:pPr marL="0" indent="0">
               <a:buNone/>
             </a:pPr>
             <a:r>
@@ -4763,7 +4500,7 @@
           <a:bodyPr wrap="square" lIns="0" tIns="0" rIns="0" bIns="0" rtlCol="0" anchor="ctr"/>
           <a:lstStyle/>
           <a:p>
-            <a:pPr indent="0" marL="0">
+            <a:pPr marL="0" indent="0">
               <a:buNone/>
             </a:pPr>
             <a:r>
@@ -4827,7 +4564,7 @@
           <a:bodyPr wrap="square" lIns="0" tIns="0" rIns="0" bIns="0" rtlCol="0" anchor="ctr"/>
           <a:lstStyle/>
           <a:p>
-            <a:pPr indent="0" marL="0">
+            <a:pPr marL="0" indent="0">
               <a:buNone/>
             </a:pPr>
             <a:r>
@@ -4891,7 +4628,7 @@
           <a:bodyPr wrap="square" lIns="0" tIns="0" rIns="0" bIns="0" rtlCol="0" anchor="ctr"/>
           <a:lstStyle/>
           <a:p>
-            <a:pPr indent="0" marL="0">
+            <a:pPr marL="0" indent="0">
               <a:buNone/>
             </a:pPr>
             <a:r>
@@ -4930,7 +4667,7 @@
           <a:bodyPr wrap="square" lIns="0" tIns="0" rIns="0" bIns="0" rtlCol="0" anchor="ctr"/>
           <a:lstStyle/>
           <a:p>
-            <a:pPr indent="0" marL="0">
+            <a:pPr marL="0" indent="0">
               <a:buNone/>
             </a:pPr>
             <a:r>
@@ -4994,7 +4731,7 @@
           <a:bodyPr wrap="square" lIns="0" tIns="0" rIns="0" bIns="0" rtlCol="0" anchor="ctr"/>
           <a:lstStyle/>
           <a:p>
-            <a:pPr indent="0" marL="0">
+            <a:pPr marL="0" indent="0">
               <a:buNone/>
             </a:pPr>
             <a:r>
@@ -5058,7 +4795,7 @@
           <a:bodyPr wrap="square" lIns="0" tIns="0" rIns="0" bIns="0" rtlCol="0" anchor="ctr"/>
           <a:lstStyle/>
           <a:p>
-            <a:pPr indent="0" marL="0">
+            <a:pPr marL="0" indent="0">
               <a:buNone/>
             </a:pPr>
             <a:r>
@@ -5122,7 +4859,7 @@
           <a:bodyPr wrap="square" lIns="0" tIns="0" rIns="0" bIns="0" rtlCol="0" anchor="ctr"/>
           <a:lstStyle/>
           <a:p>
-            <a:pPr indent="0" marL="0">
+            <a:pPr marL="0" indent="0">
               <a:buNone/>
             </a:pPr>
             <a:r>
@@ -5186,7 +4923,7 @@
           <a:bodyPr wrap="square" lIns="0" tIns="0" rIns="0" bIns="0" rtlCol="0" anchor="ctr"/>
           <a:lstStyle/>
           <a:p>
-            <a:pPr indent="0" marL="0">
+            <a:pPr marL="0" indent="0">
               <a:buNone/>
             </a:pPr>
             <a:r>
@@ -5250,7 +4987,7 @@
           <a:bodyPr wrap="square" lIns="0" tIns="0" rIns="0" bIns="0" rtlCol="0" anchor="ctr"/>
           <a:lstStyle/>
           <a:p>
-            <a:pPr indent="0" marL="0">
+            <a:pPr marL="0" indent="0">
               <a:buNone/>
             </a:pPr>
             <a:r>
@@ -5314,7 +5051,7 @@
           <a:bodyPr wrap="square" lIns="0" tIns="0" rIns="0" bIns="0" rtlCol="0" anchor="ctr"/>
           <a:lstStyle/>
           <a:p>
-            <a:pPr indent="0" marL="0">
+            <a:pPr marL="0" indent="0">
               <a:buNone/>
             </a:pPr>
             <a:r>
@@ -5378,7 +5115,7 @@
           <a:bodyPr wrap="square" lIns="0" tIns="0" rIns="0" bIns="0" rtlCol="0" anchor="ctr"/>
           <a:lstStyle/>
           <a:p>
-            <a:pPr indent="0" marL="0">
+            <a:pPr marL="0" indent="0">
               <a:buNone/>
             </a:pPr>
             <a:r>
@@ -5442,7 +5179,7 @@
           <a:bodyPr wrap="square" lIns="0" tIns="0" rIns="0" bIns="0" rtlCol="0" anchor="ctr"/>
           <a:lstStyle/>
           <a:p>
-            <a:pPr indent="0" marL="0">
+            <a:pPr marL="0" indent="0">
               <a:buNone/>
             </a:pPr>
             <a:r>
@@ -5506,7 +5243,7 @@
           <a:bodyPr wrap="square" lIns="0" tIns="0" rIns="0" bIns="0" rtlCol="0" anchor="ctr"/>
           <a:lstStyle/>
           <a:p>
-            <a:pPr indent="0" marL="0">
+            <a:pPr marL="0" indent="0">
               <a:buNone/>
             </a:pPr>
             <a:r>
@@ -5570,7 +5307,7 @@
           <a:bodyPr wrap="square" lIns="0" tIns="0" rIns="0" bIns="0" rtlCol="0" anchor="ctr"/>
           <a:lstStyle/>
           <a:p>
-            <a:pPr indent="0" marL="0">
+            <a:pPr marL="0" indent="0">
               <a:buNone/>
             </a:pPr>
             <a:r>
@@ -5634,7 +5371,7 @@
           <a:bodyPr wrap="square" lIns="0" tIns="0" rIns="0" bIns="0" rtlCol="0" anchor="ctr"/>
           <a:lstStyle/>
           <a:p>
-            <a:pPr indent="0" marL="0">
+            <a:pPr marL="0" indent="0">
               <a:buNone/>
             </a:pPr>
             <a:r>
@@ -5698,7 +5435,7 @@
           <a:bodyPr wrap="square" lIns="0" tIns="0" rIns="0" bIns="0" rtlCol="0" anchor="ctr"/>
           <a:lstStyle/>
           <a:p>
-            <a:pPr indent="0" marL="0">
+            <a:pPr marL="0" indent="0">
               <a:buNone/>
             </a:pPr>
             <a:r>
@@ -5762,7 +5499,7 @@
           <a:bodyPr wrap="square" lIns="0" tIns="0" rIns="0" bIns="0" rtlCol="0" anchor="ctr"/>
           <a:lstStyle/>
           <a:p>
-            <a:pPr indent="0" marL="0">
+            <a:pPr marL="0" indent="0">
               <a:buNone/>
             </a:pPr>
             <a:r>
@@ -5826,7 +5563,7 @@
           <a:bodyPr wrap="square" lIns="0" tIns="0" rIns="0" bIns="0" rtlCol="0" anchor="ctr"/>
           <a:lstStyle/>
           <a:p>
-            <a:pPr indent="0" marL="0">
+            <a:pPr marL="0" indent="0">
               <a:buNone/>
             </a:pPr>
             <a:r>
@@ -5890,7 +5627,7 @@
           <a:bodyPr wrap="square" lIns="0" tIns="0" rIns="0" bIns="0" rtlCol="0" anchor="ctr"/>
           <a:lstStyle/>
           <a:p>
-            <a:pPr indent="0" marL="0">
+            <a:pPr marL="0" indent="0">
               <a:buNone/>
             </a:pPr>
             <a:r>
@@ -5954,7 +5691,7 @@
           <a:bodyPr wrap="square" lIns="0" tIns="0" rIns="0" bIns="0" rtlCol="0" anchor="ctr"/>
           <a:lstStyle/>
           <a:p>
-            <a:pPr indent="0" marL="0">
+            <a:pPr marL="0" indent="0">
               <a:buNone/>
             </a:pPr>
             <a:r>
@@ -6018,7 +5755,7 @@
           <a:bodyPr wrap="square" lIns="0" tIns="0" rIns="0" bIns="0" rtlCol="0" anchor="ctr"/>
           <a:lstStyle/>
           <a:p>
-            <a:pPr indent="0" marL="0">
+            <a:pPr marL="0" indent="0">
               <a:buNone/>
             </a:pPr>
             <a:r>
@@ -6082,7 +5819,7 @@
           <a:bodyPr wrap="square" lIns="0" tIns="0" rIns="0" bIns="0" rtlCol="0" anchor="ctr"/>
           <a:lstStyle/>
           <a:p>
-            <a:pPr indent="0" marL="0">
+            <a:pPr marL="0" indent="0">
               <a:buNone/>
             </a:pPr>
             <a:r>
@@ -6146,7 +5883,7 @@
           <a:bodyPr wrap="square" lIns="0" tIns="0" rIns="0" bIns="0" rtlCol="0" anchor="ctr"/>
           <a:lstStyle/>
           <a:p>
-            <a:pPr indent="0" marL="0">
+            <a:pPr marL="0" indent="0">
               <a:buNone/>
             </a:pPr>
             <a:r>
@@ -6210,7 +5947,7 @@
           <a:bodyPr wrap="square" lIns="0" tIns="0" rIns="0" bIns="0" rtlCol="0" anchor="ctr"/>
           <a:lstStyle/>
           <a:p>
-            <a:pPr indent="0" marL="0">
+            <a:pPr marL="0" indent="0">
               <a:buNone/>
             </a:pPr>
             <a:r>
@@ -6274,7 +6011,7 @@
           <a:bodyPr wrap="square" lIns="0" tIns="0" rIns="0" bIns="0" rtlCol="0" anchor="ctr"/>
           <a:lstStyle/>
           <a:p>
-            <a:pPr indent="0" marL="0">
+            <a:pPr marL="0" indent="0">
               <a:buNone/>
             </a:pPr>
             <a:r>
@@ -6338,7 +6075,7 @@
           <a:bodyPr wrap="square" lIns="0" tIns="0" rIns="0" bIns="0" rtlCol="0" anchor="ctr"/>
           <a:lstStyle/>
           <a:p>
-            <a:pPr indent="0" marL="0">
+            <a:pPr marL="0" indent="0">
               <a:buNone/>
             </a:pPr>
             <a:r>
@@ -6402,7 +6139,7 @@
           <a:bodyPr wrap="square" lIns="0" tIns="0" rIns="0" bIns="0" rtlCol="0" anchor="ctr"/>
           <a:lstStyle/>
           <a:p>
-            <a:pPr indent="0" marL="0">
+            <a:pPr marL="0" indent="0">
               <a:buNone/>
             </a:pPr>
             <a:r>
@@ -6466,7 +6203,7 @@
           <a:bodyPr wrap="square" lIns="0" tIns="0" rIns="0" bIns="0" rtlCol="0" anchor="ctr"/>
           <a:lstStyle/>
           <a:p>
-            <a:pPr indent="0" marL="0">
+            <a:pPr marL="0" indent="0">
               <a:buNone/>
             </a:pPr>
             <a:r>
@@ -6530,7 +6267,7 @@
           <a:bodyPr wrap="square" lIns="0" tIns="0" rIns="0" bIns="0" rtlCol="0" anchor="ctr"/>
           <a:lstStyle/>
           <a:p>
-            <a:pPr indent="0" marL="0">
+            <a:pPr marL="0" indent="0">
               <a:buNone/>
             </a:pPr>
             <a:r>
@@ -6572,7 +6309,7 @@
             <a:prstDash val="solid"/>
           </a:ln>
           <a:effectLst>
-            <a:outerShdw sx="100000" sy="100000" kx="0" ky="0" algn="bl" rotWithShape="0" blurRad="63500" dist="25400" dir="8100000">
+            <a:outerShdw blurRad="63500" dist="25400" dir="8100000" algn="bl" rotWithShape="0">
               <a:srgbClr val="000000">
                 <a:alpha val="12000"/>
               </a:srgbClr>
@@ -6626,7 +6363,7 @@
           <a:bodyPr wrap="square" lIns="0" tIns="0" rIns="0" bIns="0" rtlCol="0" anchor="ctr"/>
           <a:lstStyle/>
           <a:p>
-            <a:pPr indent="0" marL="0">
+            <a:pPr marL="0" indent="0">
               <a:buNone/>
             </a:pPr>
             <a:r>
@@ -6665,7 +6402,7 @@
           <a:bodyPr wrap="square" lIns="0" tIns="0" rIns="0" bIns="0" rtlCol="0" anchor="ctr"/>
           <a:lstStyle/>
           <a:p>
-            <a:pPr indent="0" marL="0">
+            <a:pPr marL="0" indent="0">
               <a:buNone/>
             </a:pPr>
             <a:r>
@@ -6682,7 +6419,7 @@
             <a:endParaRPr lang="en-US" sz="1050" dirty="0"/>
           </a:p>
           <a:p>
-            <a:pPr indent="0" marL="0">
+            <a:pPr marL="0" indent="0">
               <a:buNone/>
             </a:pPr>
             <a:r>
@@ -6699,7 +6436,7 @@
             <a:endParaRPr lang="en-US" sz="1050" dirty="0"/>
           </a:p>
           <a:p>
-            <a:pPr indent="0" marL="0">
+            <a:pPr marL="0" indent="0">
               <a:buNone/>
             </a:pPr>
             <a:r>
@@ -6738,7 +6475,7 @@
           <a:bodyPr wrap="square" lIns="0" tIns="0" rIns="0" bIns="0" rtlCol="0" anchor="ctr"/>
           <a:lstStyle/>
           <a:p>
-            <a:pPr indent="0" marL="0">
+            <a:pPr marL="0" indent="0">
               <a:buNone/>
             </a:pPr>
             <a:r>
@@ -6755,7 +6492,7 @@
             <a:endParaRPr lang="en-US" sz="1050" dirty="0"/>
           </a:p>
           <a:p>
-            <a:pPr indent="0" marL="0">
+            <a:pPr marL="0" indent="0">
               <a:buNone/>
             </a:pPr>
             <a:r>
@@ -6794,7 +6531,7 @@
           <a:bodyPr wrap="square" lIns="0" tIns="0" rIns="0" bIns="0" rtlCol="0" anchor="ctr"/>
           <a:lstStyle/>
           <a:p>
-            <a:pPr indent="0" marL="0">
+            <a:pPr marL="0" indent="0">
               <a:buNone/>
             </a:pPr>
             <a:r>
@@ -6811,7 +6548,7 @@
             <a:endParaRPr lang="en-US" sz="1050" dirty="0"/>
           </a:p>
           <a:p>
-            <a:pPr indent="0" marL="0">
+            <a:pPr marL="0" indent="0">
               <a:buNone/>
             </a:pPr>
             <a:r>
@@ -6828,7 +6565,7 @@
             <a:endParaRPr lang="en-US" sz="1050" dirty="0"/>
           </a:p>
           <a:p>
-            <a:pPr indent="0" marL="0">
+            <a:pPr marL="0" indent="0">
               <a:buNone/>
             </a:pPr>
             <a:r>
@@ -6892,7 +6629,7 @@
           <a:bodyPr wrap="square" lIns="76200" tIns="76200" rIns="76200" bIns="76200" rtlCol="0" anchor="ctr"/>
           <a:lstStyle/>
           <a:p>
-            <a:pPr indent="0" marL="0">
+            <a:pPr marL="0" indent="0">
               <a:buNone/>
             </a:pPr>
             <a:r>
@@ -6909,7 +6646,7 @@
             <a:endParaRPr lang="en-US" sz="1050" dirty="0"/>
           </a:p>
           <a:p>
-            <a:pPr indent="0" marL="0">
+            <a:pPr marL="0" indent="0">
               <a:buNone/>
             </a:pPr>
             <a:r>
@@ -6951,7 +6688,7 @@
             <a:prstDash val="solid"/>
           </a:ln>
           <a:effectLst>
-            <a:outerShdw sx="100000" sy="100000" kx="0" ky="0" algn="bl" rotWithShape="0" blurRad="63500" dist="25400" dir="8100000">
+            <a:outerShdw blurRad="63500" dist="25400" dir="8100000" algn="bl" rotWithShape="0">
               <a:srgbClr val="000000">
                 <a:alpha val="12000"/>
               </a:srgbClr>
@@ -7005,7 +6742,7 @@
           <a:bodyPr wrap="square" lIns="0" tIns="0" rIns="0" bIns="0" rtlCol="0" anchor="ctr"/>
           <a:lstStyle/>
           <a:p>
-            <a:pPr indent="0" marL="0">
+            <a:pPr marL="0" indent="0">
               <a:buNone/>
             </a:pPr>
             <a:r>
@@ -7022,7 +6759,7 @@
             <a:endParaRPr lang="en-US" sz="1100" dirty="0"/>
           </a:p>
           <a:p>
-            <a:pPr indent="0" marL="0">
+            <a:pPr marL="0" indent="0">
               <a:buNone/>
             </a:pPr>
             <a:r>
@@ -7061,7 +6798,7 @@
           <a:bodyPr wrap="square" lIns="0" tIns="0" rIns="0" bIns="0" rtlCol="0" anchor="ctr"/>
           <a:lstStyle/>
           <a:p>
-            <a:pPr indent="0" marL="0">
+            <a:pPr marL="0" indent="0">
               <a:buNone/>
             </a:pPr>
             <a:r>
@@ -7078,7 +6815,7 @@
             <a:endParaRPr lang="en-US" sz="1000" dirty="0"/>
           </a:p>
           <a:p>
-            <a:pPr indent="0" marL="0">
+            <a:pPr marL="0" indent="0">
               <a:buNone/>
             </a:pPr>
             <a:r>
@@ -7095,7 +6832,7 @@
             <a:endParaRPr lang="en-US" sz="1000" dirty="0"/>
           </a:p>
           <a:p>
-            <a:pPr indent="0" marL="0">
+            <a:pPr marL="0" indent="0">
               <a:buNone/>
             </a:pPr>
             <a:r>
@@ -7129,6 +6866,7 @@
         <a:solidFill>
           <a:srgbClr val="0A1628"/>
         </a:solidFill>
+        <a:effectLst/>
       </p:bgPr>
     </p:bg>
     <p:spTree>
@@ -7216,7 +6954,7 @@
           <a:bodyPr wrap="square" lIns="0" tIns="0" rIns="0" bIns="0" rtlCol="0" anchor="ctr"/>
           <a:lstStyle/>
           <a:p>
-            <a:pPr indent="0" marL="0">
+            <a:pPr marL="0" indent="0">
               <a:buNone/>
             </a:pPr>
             <a:r>
@@ -7255,7 +6993,7 @@
           <a:bodyPr wrap="square" lIns="0" tIns="0" rIns="0" bIns="0" rtlCol="0" anchor="ctr"/>
           <a:lstStyle/>
           <a:p>
-            <a:pPr indent="0" marL="0">
+            <a:pPr marL="0" indent="0">
               <a:buNone/>
             </a:pPr>
             <a:r>
@@ -7319,7 +7057,7 @@
           <a:bodyPr wrap="square" lIns="0" tIns="0" rIns="0" bIns="0" rtlCol="0" anchor="ctr"/>
           <a:lstStyle/>
           <a:p>
-            <a:pPr indent="0" marL="0">
+            <a:pPr marL="0" indent="0">
               <a:buNone/>
             </a:pPr>
             <a:r>
@@ -7383,7 +7121,7 @@
           <a:bodyPr wrap="square" lIns="0" tIns="0" rIns="0" bIns="0" rtlCol="0" anchor="ctr"/>
           <a:lstStyle/>
           <a:p>
-            <a:pPr indent="0" marL="0">
+            <a:pPr marL="0" indent="0">
               <a:buNone/>
             </a:pPr>
             <a:r>
@@ -7447,7 +7185,7 @@
           <a:bodyPr wrap="square" lIns="0" tIns="0" rIns="0" bIns="0" rtlCol="0" anchor="ctr"/>
           <a:lstStyle/>
           <a:p>
-            <a:pPr indent="0" marL="0">
+            <a:pPr marL="0" indent="0">
               <a:buNone/>
             </a:pPr>
             <a:r>
@@ -7511,7 +7249,7 @@
           <a:bodyPr wrap="square" lIns="0" tIns="0" rIns="0" bIns="0" rtlCol="0" anchor="ctr"/>
           <a:lstStyle/>
           <a:p>
-            <a:pPr indent="0" marL="0">
+            <a:pPr marL="0" indent="0">
               <a:buNone/>
             </a:pPr>
             <a:r>
@@ -7575,7 +7313,7 @@
           <a:bodyPr wrap="square" lIns="0" tIns="0" rIns="0" bIns="0" rtlCol="0" anchor="ctr"/>
           <a:lstStyle/>
           <a:p>
-            <a:pPr indent="0" marL="0">
+            <a:pPr marL="0" indent="0">
               <a:buNone/>
             </a:pPr>
             <a:r>
@@ -7639,7 +7377,7 @@
           <a:bodyPr wrap="square" lIns="0" tIns="0" rIns="0" bIns="0" rtlCol="0" anchor="ctr"/>
           <a:lstStyle/>
           <a:p>
-            <a:pPr indent="0" marL="0">
+            <a:pPr marL="0" indent="0">
               <a:buNone/>
             </a:pPr>
             <a:r>
@@ -7703,7 +7441,7 @@
           <a:bodyPr wrap="square" lIns="0" tIns="0" rIns="0" bIns="0" rtlCol="0" anchor="ctr"/>
           <a:lstStyle/>
           <a:p>
-            <a:pPr indent="0" marL="0">
+            <a:pPr marL="0" indent="0">
               <a:buNone/>
             </a:pPr>
             <a:r>
@@ -7767,7 +7505,7 @@
           <a:bodyPr wrap="square" lIns="0" tIns="0" rIns="0" bIns="0" rtlCol="0" anchor="ctr"/>
           <a:lstStyle/>
           <a:p>
-            <a:pPr indent="0" marL="0">
+            <a:pPr marL="0" indent="0">
               <a:buNone/>
             </a:pPr>
             <a:r>
@@ -7831,7 +7569,7 @@
           <a:bodyPr wrap="square" lIns="0" tIns="0" rIns="0" bIns="0" rtlCol="0" anchor="ctr"/>
           <a:lstStyle/>
           <a:p>
-            <a:pPr indent="0" marL="0">
+            <a:pPr marL="0" indent="0">
               <a:buNone/>
             </a:pPr>
             <a:r>
@@ -7895,7 +7633,7 @@
           <a:bodyPr wrap="square" lIns="0" tIns="0" rIns="0" bIns="0" rtlCol="0" anchor="ctr"/>
           <a:lstStyle/>
           <a:p>
-            <a:pPr indent="0" marL="0">
+            <a:pPr marL="0" indent="0">
               <a:buNone/>
             </a:pPr>
             <a:r>
@@ -7959,7 +7697,7 @@
           <a:bodyPr wrap="square" lIns="0" tIns="0" rIns="0" bIns="0" rtlCol="0" anchor="ctr"/>
           <a:lstStyle/>
           <a:p>
-            <a:pPr indent="0" marL="0">
+            <a:pPr marL="0" indent="0">
               <a:buNone/>
             </a:pPr>
             <a:r>
@@ -8023,7 +7761,7 @@
           <a:bodyPr wrap="square" lIns="0" tIns="0" rIns="0" bIns="0" rtlCol="0" anchor="ctr"/>
           <a:lstStyle/>
           <a:p>
-            <a:pPr indent="0" marL="0">
+            <a:pPr marL="0" indent="0">
               <a:buNone/>
             </a:pPr>
             <a:r>
@@ -8087,7 +7825,7 @@
           <a:bodyPr wrap="square" lIns="0" tIns="0" rIns="0" bIns="0" rtlCol="0" anchor="ctr"/>
           <a:lstStyle/>
           <a:p>
-            <a:pPr indent="0" marL="0">
+            <a:pPr marL="0" indent="0">
               <a:buNone/>
             </a:pPr>
             <a:r>
@@ -8151,7 +7889,7 @@
           <a:bodyPr wrap="square" lIns="0" tIns="0" rIns="0" bIns="0" rtlCol="0" anchor="ctr"/>
           <a:lstStyle/>
           <a:p>
-            <a:pPr indent="0" marL="0">
+            <a:pPr marL="0" indent="0">
               <a:buNone/>
             </a:pPr>
             <a:r>
@@ -8215,7 +7953,7 @@
           <a:bodyPr wrap="square" lIns="0" tIns="0" rIns="0" bIns="0" rtlCol="0" anchor="ctr"/>
           <a:lstStyle/>
           <a:p>
-            <a:pPr indent="0" marL="0">
+            <a:pPr marL="0" indent="0">
               <a:buNone/>
             </a:pPr>
             <a:r>
@@ -8279,7 +8017,7 @@
           <a:bodyPr wrap="square" lIns="0" tIns="0" rIns="0" bIns="0" rtlCol="0" anchor="ctr"/>
           <a:lstStyle/>
           <a:p>
-            <a:pPr indent="0" marL="0">
+            <a:pPr marL="0" indent="0">
               <a:buNone/>
             </a:pPr>
             <a:r>
@@ -8343,7 +8081,7 @@
           <a:bodyPr wrap="square" lIns="0" tIns="0" rIns="0" bIns="0" rtlCol="0" anchor="ctr"/>
           <a:lstStyle/>
           <a:p>
-            <a:pPr indent="0" marL="0">
+            <a:pPr marL="0" indent="0">
               <a:buNone/>
             </a:pPr>
             <a:r>
@@ -8407,7 +8145,7 @@
           <a:bodyPr wrap="square" lIns="0" tIns="0" rIns="0" bIns="0" rtlCol="0" anchor="ctr"/>
           <a:lstStyle/>
           <a:p>
-            <a:pPr indent="0" marL="0">
+            <a:pPr marL="0" indent="0">
               <a:buNone/>
             </a:pPr>
             <a:r>
@@ -8471,7 +8209,7 @@
           <a:bodyPr wrap="square" lIns="0" tIns="0" rIns="0" bIns="0" rtlCol="0" anchor="ctr"/>
           <a:lstStyle/>
           <a:p>
-            <a:pPr indent="0" marL="0">
+            <a:pPr marL="0" indent="0">
               <a:buNone/>
             </a:pPr>
             <a:r>
@@ -8535,7 +8273,7 @@
           <a:bodyPr wrap="square" lIns="0" tIns="0" rIns="0" bIns="0" rtlCol="0" anchor="ctr"/>
           <a:lstStyle/>
           <a:p>
-            <a:pPr indent="0" marL="0">
+            <a:pPr marL="0" indent="0">
               <a:buNone/>
             </a:pPr>
             <a:r>
@@ -8599,7 +8337,7 @@
           <a:bodyPr wrap="square" lIns="0" tIns="0" rIns="0" bIns="0" rtlCol="0" anchor="ctr"/>
           <a:lstStyle/>
           <a:p>
-            <a:pPr indent="0" marL="0">
+            <a:pPr marL="0" indent="0">
               <a:buNone/>
             </a:pPr>
             <a:r>
@@ -8663,7 +8401,7 @@
           <a:bodyPr wrap="square" lIns="0" tIns="0" rIns="0" bIns="0" rtlCol="0" anchor="ctr"/>
           <a:lstStyle/>
           <a:p>
-            <a:pPr indent="0" marL="0">
+            <a:pPr marL="0" indent="0">
               <a:buNone/>
             </a:pPr>
             <a:r>
@@ -8727,7 +8465,7 @@
           <a:bodyPr wrap="square" lIns="0" tIns="0" rIns="0" bIns="0" rtlCol="0" anchor="ctr"/>
           <a:lstStyle/>
           <a:p>
-            <a:pPr indent="0" marL="0">
+            <a:pPr marL="0" indent="0">
               <a:buNone/>
             </a:pPr>
             <a:r>
@@ -8791,7 +8529,7 @@
           <a:bodyPr wrap="square" lIns="0" tIns="0" rIns="0" bIns="0" rtlCol="0" anchor="ctr"/>
           <a:lstStyle/>
           <a:p>
-            <a:pPr indent="0" marL="0">
+            <a:pPr marL="0" indent="0">
               <a:buNone/>
             </a:pPr>
             <a:r>
@@ -8855,7 +8593,7 @@
           <a:bodyPr wrap="square" lIns="0" tIns="0" rIns="0" bIns="0" rtlCol="0" anchor="ctr"/>
           <a:lstStyle/>
           <a:p>
-            <a:pPr indent="0" marL="0">
+            <a:pPr marL="0" indent="0">
               <a:buNone/>
             </a:pPr>
             <a:r>
@@ -8919,7 +8657,7 @@
           <a:bodyPr wrap="square" lIns="0" tIns="0" rIns="0" bIns="0" rtlCol="0" anchor="ctr"/>
           <a:lstStyle/>
           <a:p>
-            <a:pPr indent="0" marL="0">
+            <a:pPr marL="0" indent="0">
               <a:buNone/>
             </a:pPr>
             <a:r>
@@ -8983,7 +8721,7 @@
           <a:bodyPr wrap="square" lIns="0" tIns="0" rIns="0" bIns="0" rtlCol="0" anchor="ctr"/>
           <a:lstStyle/>
           <a:p>
-            <a:pPr indent="0" marL="0">
+            <a:pPr marL="0" indent="0">
               <a:buNone/>
             </a:pPr>
             <a:r>
@@ -9047,7 +8785,7 @@
           <a:bodyPr wrap="square" lIns="0" tIns="0" rIns="0" bIns="0" rtlCol="0" anchor="ctr"/>
           <a:lstStyle/>
           <a:p>
-            <a:pPr indent="0" marL="0">
+            <a:pPr marL="0" indent="0">
               <a:buNone/>
             </a:pPr>
             <a:r>
@@ -9111,7 +8849,7 @@
           <a:bodyPr wrap="square" lIns="0" tIns="0" rIns="0" bIns="0" rtlCol="0" anchor="ctr"/>
           <a:lstStyle/>
           <a:p>
-            <a:pPr indent="0" marL="0">
+            <a:pPr marL="0" indent="0">
               <a:buNone/>
             </a:pPr>
             <a:r>
@@ -9175,7 +8913,7 @@
           <a:bodyPr wrap="square" lIns="0" tIns="0" rIns="0" bIns="0" rtlCol="0" anchor="ctr"/>
           <a:lstStyle/>
           <a:p>
-            <a:pPr indent="0" marL="0">
+            <a:pPr marL="0" indent="0">
               <a:buNone/>
             </a:pPr>
             <a:r>
@@ -9239,7 +8977,7 @@
           <a:bodyPr wrap="square" lIns="0" tIns="0" rIns="0" bIns="0" rtlCol="0" anchor="ctr"/>
           <a:lstStyle/>
           <a:p>
-            <a:pPr indent="0" marL="0">
+            <a:pPr marL="0" indent="0">
               <a:buNone/>
             </a:pPr>
             <a:r>
@@ -9303,7 +9041,7 @@
           <a:bodyPr wrap="square" lIns="0" tIns="0" rIns="0" bIns="0" rtlCol="0" anchor="ctr"/>
           <a:lstStyle/>
           <a:p>
-            <a:pPr indent="0" marL="0">
+            <a:pPr marL="0" indent="0">
               <a:buNone/>
             </a:pPr>
             <a:r>
@@ -9367,7 +9105,7 @@
           <a:bodyPr wrap="square" lIns="0" tIns="0" rIns="0" bIns="0" rtlCol="0" anchor="ctr"/>
           <a:lstStyle/>
           <a:p>
-            <a:pPr indent="0" marL="0">
+            <a:pPr marL="0" indent="0">
               <a:buNone/>
             </a:pPr>
             <a:r>
@@ -9431,7 +9169,7 @@
           <a:bodyPr wrap="square" lIns="0" tIns="0" rIns="0" bIns="0" rtlCol="0" anchor="ctr"/>
           <a:lstStyle/>
           <a:p>
-            <a:pPr indent="0" marL="0">
+            <a:pPr marL="0" indent="0">
               <a:buNone/>
             </a:pPr>
             <a:r>
@@ -9495,7 +9233,7 @@
           <a:bodyPr wrap="square" lIns="0" tIns="0" rIns="0" bIns="0" rtlCol="0" anchor="ctr"/>
           <a:lstStyle/>
           <a:p>
-            <a:pPr indent="0" marL="0">
+            <a:pPr marL="0" indent="0">
               <a:buNone/>
             </a:pPr>
             <a:r>
@@ -9559,7 +9297,7 @@
           <a:bodyPr wrap="square" lIns="0" tIns="0" rIns="0" bIns="0" rtlCol="0" anchor="ctr"/>
           <a:lstStyle/>
           <a:p>
-            <a:pPr indent="0" marL="0">
+            <a:pPr marL="0" indent="0">
               <a:buNone/>
             </a:pPr>
             <a:r>
@@ -9598,7 +9336,7 @@
           <a:bodyPr wrap="square" lIns="0" tIns="0" rIns="0" bIns="0" rtlCol="0" anchor="ctr"/>
           <a:lstStyle/>
           <a:p>
-            <a:pPr indent="0" marL="0">
+            <a:pPr marL="0" indent="0">
               <a:buNone/>
             </a:pPr>
             <a:r>
@@ -9662,7 +9400,7 @@
           <a:bodyPr wrap="square" lIns="0" tIns="0" rIns="0" bIns="0" rtlCol="0" anchor="ctr"/>
           <a:lstStyle/>
           <a:p>
-            <a:pPr indent="0" marL="0">
+            <a:pPr marL="0" indent="0">
               <a:buNone/>
             </a:pPr>
             <a:r>
@@ -9701,7 +9439,7 @@
           <a:bodyPr wrap="square" lIns="0" tIns="0" rIns="0" bIns="0" rtlCol="0" anchor="ctr"/>
           <a:lstStyle/>
           <a:p>
-            <a:pPr indent="0" marL="0">
+            <a:pPr marL="0" indent="0">
               <a:buNone/>
             </a:pPr>
             <a:r>
@@ -9765,7 +9503,7 @@
           <a:bodyPr wrap="square" lIns="0" tIns="0" rIns="0" bIns="0" rtlCol="0" anchor="ctr"/>
           <a:lstStyle/>
           <a:p>
-            <a:pPr indent="0" marL="0">
+            <a:pPr marL="0" indent="0">
               <a:buNone/>
             </a:pPr>
             <a:r>
@@ -9799,6 +9537,7 @@
         <a:solidFill>
           <a:srgbClr val="F0F6FA"/>
         </a:solidFill>
+        <a:effectLst/>
       </p:bgPr>
     </p:bg>
     <p:spTree>
@@ -9886,7 +9625,7 @@
           <a:bodyPr wrap="square" lIns="0" tIns="0" rIns="0" bIns="0" rtlCol="0" anchor="ctr"/>
           <a:lstStyle/>
           <a:p>
-            <a:pPr indent="0" marL="0">
+            <a:pPr marL="0" indent="0">
               <a:buNone/>
             </a:pPr>
             <a:r>
@@ -9950,7 +9689,7 @@
           <a:bodyPr wrap="square" lIns="0" tIns="0" rIns="0" bIns="0" rtlCol="0" anchor="ctr"/>
           <a:lstStyle/>
           <a:p>
-            <a:pPr indent="0" marL="0">
+            <a:pPr marL="0" indent="0">
               <a:buNone/>
             </a:pPr>
             <a:r>
@@ -10014,7 +9753,7 @@
           <a:bodyPr wrap="square" lIns="0" tIns="0" rIns="0" bIns="0" rtlCol="0" anchor="ctr"/>
           <a:lstStyle/>
           <a:p>
-            <a:pPr indent="0" marL="0">
+            <a:pPr marL="0" indent="0">
               <a:buNone/>
             </a:pPr>
             <a:r>
@@ -10078,7 +9817,7 @@
           <a:bodyPr wrap="square" lIns="0" tIns="0" rIns="0" bIns="0" rtlCol="0" anchor="ctr"/>
           <a:lstStyle/>
           <a:p>
-            <a:pPr indent="0" marL="0">
+            <a:pPr marL="0" indent="0">
               <a:buNone/>
             </a:pPr>
             <a:r>
@@ -10142,7 +9881,7 @@
           <a:bodyPr wrap="square" lIns="0" tIns="0" rIns="0" bIns="0" rtlCol="0" anchor="ctr"/>
           <a:lstStyle/>
           <a:p>
-            <a:pPr indent="0" marL="0">
+            <a:pPr marL="0" indent="0">
               <a:buNone/>
             </a:pPr>
             <a:r>
@@ -10231,7 +9970,7 @@
           <a:bodyPr wrap="square" lIns="0" tIns="0" rIns="0" bIns="0" rtlCol="0" anchor="ctr"/>
           <a:lstStyle/>
           <a:p>
-            <a:pPr indent="0" marL="0">
+            <a:pPr marL="0" indent="0">
               <a:buNone/>
             </a:pPr>
             <a:r>
@@ -10295,7 +10034,7 @@
           <a:bodyPr wrap="square" lIns="0" tIns="0" rIns="0" bIns="0" rtlCol="0" anchor="ctr"/>
           <a:lstStyle/>
           <a:p>
-            <a:pPr indent="0" marL="0">
+            <a:pPr marL="0" indent="0">
               <a:buNone/>
             </a:pPr>
             <a:r>
@@ -10359,7 +10098,7 @@
           <a:bodyPr wrap="square" lIns="0" tIns="0" rIns="0" bIns="0" rtlCol="0" anchor="ctr"/>
           <a:lstStyle/>
           <a:p>
-            <a:pPr indent="0" marL="0">
+            <a:pPr marL="0" indent="0">
               <a:buNone/>
             </a:pPr>
             <a:r>
@@ -10423,7 +10162,7 @@
           <a:bodyPr wrap="square" lIns="0" tIns="0" rIns="0" bIns="0" rtlCol="0" anchor="ctr"/>
           <a:lstStyle/>
           <a:p>
-            <a:pPr indent="0" marL="0">
+            <a:pPr marL="0" indent="0">
               <a:buNone/>
             </a:pPr>
             <a:r>
@@ -10512,7 +10251,7 @@
           <a:bodyPr wrap="square" lIns="0" tIns="0" rIns="0" bIns="0" rtlCol="0" anchor="ctr"/>
           <a:lstStyle/>
           <a:p>
-            <a:pPr indent="0" marL="0">
+            <a:pPr marL="0" indent="0">
               <a:buNone/>
             </a:pPr>
             <a:r>
@@ -10576,7 +10315,7 @@
           <a:bodyPr wrap="square" lIns="0" tIns="0" rIns="0" bIns="0" rtlCol="0" anchor="ctr"/>
           <a:lstStyle/>
           <a:p>
-            <a:pPr indent="0" marL="0">
+            <a:pPr marL="0" indent="0">
               <a:buNone/>
             </a:pPr>
             <a:r>
@@ -10640,7 +10379,7 @@
           <a:bodyPr wrap="square" lIns="0" tIns="0" rIns="0" bIns="0" rtlCol="0" anchor="ctr"/>
           <a:lstStyle/>
           <a:p>
-            <a:pPr indent="0" marL="0">
+            <a:pPr marL="0" indent="0">
               <a:buNone/>
             </a:pPr>
             <a:r>
@@ -10704,7 +10443,7 @@
           <a:bodyPr wrap="square" lIns="0" tIns="0" rIns="0" bIns="0" rtlCol="0" anchor="ctr"/>
           <a:lstStyle/>
           <a:p>
-            <a:pPr indent="0" marL="0">
+            <a:pPr marL="0" indent="0">
               <a:buNone/>
             </a:pPr>
             <a:r>
@@ -10793,7 +10532,7 @@
           <a:bodyPr wrap="square" lIns="0" tIns="0" rIns="0" bIns="0" rtlCol="0" anchor="ctr"/>
           <a:lstStyle/>
           <a:p>
-            <a:pPr indent="0" marL="0">
+            <a:pPr marL="0" indent="0">
               <a:buNone/>
             </a:pPr>
             <a:r>
@@ -10857,7 +10596,7 @@
           <a:bodyPr wrap="square" lIns="0" tIns="0" rIns="0" bIns="0" rtlCol="0" anchor="ctr"/>
           <a:lstStyle/>
           <a:p>
-            <a:pPr indent="0" marL="0">
+            <a:pPr marL="0" indent="0">
               <a:buNone/>
             </a:pPr>
             <a:r>
@@ -10921,7 +10660,7 @@
           <a:bodyPr wrap="square" lIns="0" tIns="0" rIns="0" bIns="0" rtlCol="0" anchor="ctr"/>
           <a:lstStyle/>
           <a:p>
-            <a:pPr indent="0" marL="0">
+            <a:pPr marL="0" indent="0">
               <a:buNone/>
             </a:pPr>
             <a:r>
@@ -10985,7 +10724,7 @@
           <a:bodyPr wrap="square" lIns="0" tIns="0" rIns="0" bIns="0" rtlCol="0" anchor="ctr"/>
           <a:lstStyle/>
           <a:p>
-            <a:pPr indent="0" marL="0">
+            <a:pPr marL="0" indent="0">
               <a:buNone/>
             </a:pPr>
             <a:r>
@@ -11074,7 +10813,7 @@
           <a:bodyPr wrap="square" lIns="0" tIns="0" rIns="0" bIns="0" rtlCol="0" anchor="ctr"/>
           <a:lstStyle/>
           <a:p>
-            <a:pPr indent="0" marL="0">
+            <a:pPr marL="0" indent="0">
               <a:buNone/>
             </a:pPr>
             <a:r>
@@ -11138,7 +10877,7 @@
           <a:bodyPr wrap="square" lIns="0" tIns="0" rIns="0" bIns="0" rtlCol="0" anchor="ctr"/>
           <a:lstStyle/>
           <a:p>
-            <a:pPr indent="0" marL="0">
+            <a:pPr marL="0" indent="0">
               <a:buNone/>
             </a:pPr>
             <a:r>
@@ -11202,7 +10941,7 @@
           <a:bodyPr wrap="square" lIns="0" tIns="0" rIns="0" bIns="0" rtlCol="0" anchor="ctr"/>
           <a:lstStyle/>
           <a:p>
-            <a:pPr indent="0" marL="0">
+            <a:pPr marL="0" indent="0">
               <a:buNone/>
             </a:pPr>
             <a:r>
@@ -11266,7 +11005,7 @@
           <a:bodyPr wrap="square" lIns="0" tIns="0" rIns="0" bIns="0" rtlCol="0" anchor="ctr"/>
           <a:lstStyle/>
           <a:p>
-            <a:pPr indent="0" marL="0">
+            <a:pPr marL="0" indent="0">
               <a:buNone/>
             </a:pPr>
             <a:r>
@@ -11355,7 +11094,7 @@
           <a:bodyPr wrap="square" lIns="0" tIns="0" rIns="0" bIns="0" rtlCol="0" anchor="ctr"/>
           <a:lstStyle/>
           <a:p>
-            <a:pPr indent="0" marL="0">
+            <a:pPr marL="0" indent="0">
               <a:buNone/>
             </a:pPr>
             <a:r>
@@ -11419,7 +11158,7 @@
           <a:bodyPr wrap="square" lIns="0" tIns="0" rIns="0" bIns="0" rtlCol="0" anchor="ctr"/>
           <a:lstStyle/>
           <a:p>
-            <a:pPr indent="0" marL="0">
+            <a:pPr marL="0" indent="0">
               <a:buNone/>
             </a:pPr>
             <a:r>
@@ -11483,7 +11222,7 @@
           <a:bodyPr wrap="square" lIns="0" tIns="0" rIns="0" bIns="0" rtlCol="0" anchor="ctr"/>
           <a:lstStyle/>
           <a:p>
-            <a:pPr indent="0" marL="0">
+            <a:pPr marL="0" indent="0">
               <a:buNone/>
             </a:pPr>
             <a:r>
@@ -11547,7 +11286,7 @@
           <a:bodyPr wrap="square" lIns="0" tIns="0" rIns="0" bIns="0" rtlCol="0" anchor="ctr"/>
           <a:lstStyle/>
           <a:p>
-            <a:pPr indent="0" marL="0">
+            <a:pPr marL="0" indent="0">
               <a:buNone/>
             </a:pPr>
             <a:r>
@@ -11636,7 +11375,7 @@
           <a:bodyPr wrap="square" lIns="0" tIns="0" rIns="0" bIns="0" rtlCol="0" anchor="ctr"/>
           <a:lstStyle/>
           <a:p>
-            <a:pPr indent="0" marL="0">
+            <a:pPr marL="0" indent="0">
               <a:buNone/>
             </a:pPr>
             <a:r>
@@ -11700,7 +11439,7 @@
           <a:bodyPr wrap="square" lIns="0" tIns="0" rIns="0" bIns="0" rtlCol="0" anchor="ctr"/>
           <a:lstStyle/>
           <a:p>
-            <a:pPr indent="0" marL="0">
+            <a:pPr marL="0" indent="0">
               <a:buNone/>
             </a:pPr>
             <a:r>
@@ -11764,7 +11503,7 @@
           <a:bodyPr wrap="square" lIns="0" tIns="0" rIns="0" bIns="0" rtlCol="0" anchor="ctr"/>
           <a:lstStyle/>
           <a:p>
-            <a:pPr indent="0" marL="0">
+            <a:pPr marL="0" indent="0">
               <a:buNone/>
             </a:pPr>
             <a:r>
@@ -11828,7 +11567,7 @@
           <a:bodyPr wrap="square" lIns="0" tIns="0" rIns="0" bIns="0" rtlCol="0" anchor="ctr"/>
           <a:lstStyle/>
           <a:p>
-            <a:pPr indent="0" marL="0">
+            <a:pPr marL="0" indent="0">
               <a:buNone/>
             </a:pPr>
             <a:r>
@@ -11917,7 +11656,7 @@
           <a:bodyPr wrap="square" lIns="0" tIns="0" rIns="0" bIns="0" rtlCol="0" anchor="ctr"/>
           <a:lstStyle/>
           <a:p>
-            <a:pPr indent="0" marL="0">
+            <a:pPr marL="0" indent="0">
               <a:buNone/>
             </a:pPr>
             <a:r>
@@ -11981,7 +11720,7 @@
           <a:bodyPr wrap="square" lIns="0" tIns="0" rIns="0" bIns="0" rtlCol="0" anchor="ctr"/>
           <a:lstStyle/>
           <a:p>
-            <a:pPr indent="0" marL="0">
+            <a:pPr marL="0" indent="0">
               <a:buNone/>
             </a:pPr>
             <a:r>
@@ -12045,7 +11784,7 @@
           <a:bodyPr wrap="square" lIns="0" tIns="0" rIns="0" bIns="0" rtlCol="0" anchor="ctr"/>
           <a:lstStyle/>
           <a:p>
-            <a:pPr indent="0" marL="0">
+            <a:pPr marL="0" indent="0">
               <a:buNone/>
             </a:pPr>
             <a:r>
@@ -12109,7 +11848,7 @@
           <a:bodyPr wrap="square" lIns="0" tIns="0" rIns="0" bIns="0" rtlCol="0" anchor="ctr"/>
           <a:lstStyle/>
           <a:p>
-            <a:pPr indent="0" marL="0">
+            <a:pPr marL="0" indent="0">
               <a:buNone/>
             </a:pPr>
             <a:r>
@@ -12198,7 +11937,7 @@
           <a:bodyPr wrap="square" lIns="0" tIns="0" rIns="0" bIns="0" rtlCol="0" anchor="ctr"/>
           <a:lstStyle/>
           <a:p>
-            <a:pPr indent="0" marL="0">
+            <a:pPr marL="0" indent="0">
               <a:buNone/>
             </a:pPr>
             <a:r>
@@ -12262,7 +12001,7 @@
           <a:bodyPr wrap="square" lIns="0" tIns="0" rIns="0" bIns="0" rtlCol="0" anchor="ctr"/>
           <a:lstStyle/>
           <a:p>
-            <a:pPr indent="0" marL="0">
+            <a:pPr marL="0" indent="0">
               <a:buNone/>
             </a:pPr>
             <a:r>
@@ -12326,7 +12065,7 @@
           <a:bodyPr wrap="square" lIns="0" tIns="0" rIns="0" bIns="0" rtlCol="0" anchor="ctr"/>
           <a:lstStyle/>
           <a:p>
-            <a:pPr indent="0" marL="0">
+            <a:pPr marL="0" indent="0">
               <a:buNone/>
             </a:pPr>
             <a:r>
@@ -12390,7 +12129,7 @@
           <a:bodyPr wrap="square" lIns="0" tIns="0" rIns="0" bIns="0" rtlCol="0" anchor="ctr"/>
           <a:lstStyle/>
           <a:p>
-            <a:pPr indent="0" marL="0">
+            <a:pPr marL="0" indent="0">
               <a:buNone/>
             </a:pPr>
             <a:r>
@@ -12449,6 +12188,7 @@
         <a:solidFill>
           <a:srgbClr val="0A1628"/>
         </a:solidFill>
+        <a:effectLst/>
       </p:bgPr>
     </p:bg>
     <p:spTree>
@@ -12536,7 +12276,7 @@
           <a:bodyPr wrap="square" lIns="0" tIns="0" rIns="0" bIns="0" rtlCol="0" anchor="ctr"/>
           <a:lstStyle/>
           <a:p>
-            <a:pPr algn="ctr" indent="0" marL="0">
+            <a:pPr marL="0" indent="0" algn="ctr">
               <a:buNone/>
             </a:pPr>
             <a:r>
@@ -12625,7 +12365,7 @@
           <a:bodyPr wrap="square" lIns="0" tIns="0" rIns="0" bIns="0" rtlCol="0" anchor="ctr"/>
           <a:lstStyle/>
           <a:p>
-            <a:pPr algn="ctr" indent="0" marL="0">
+            <a:pPr marL="0" indent="0" algn="ctr">
               <a:buNone/>
             </a:pPr>
             <a:r>
@@ -12664,7 +12404,7 @@
           <a:bodyPr wrap="square" lIns="0" tIns="0" rIns="0" bIns="0" rtlCol="0" anchor="ctr"/>
           <a:lstStyle/>
           <a:p>
-            <a:pPr indent="0" marL="0">
+            <a:pPr marL="0" indent="0">
               <a:buNone/>
             </a:pPr>
             <a:r>
@@ -12703,7 +12443,7 @@
           <a:bodyPr wrap="square" lIns="0" tIns="0" rIns="0" bIns="0" rtlCol="0" anchor="ctr"/>
           <a:lstStyle/>
           <a:p>
-            <a:pPr indent="0" marL="0">
+            <a:pPr marL="0" indent="0">
               <a:buNone/>
             </a:pPr>
             <a:r>
@@ -12792,7 +12532,7 @@
           <a:bodyPr wrap="square" lIns="0" tIns="0" rIns="0" bIns="0" rtlCol="0" anchor="ctr"/>
           <a:lstStyle/>
           <a:p>
-            <a:pPr algn="ctr" indent="0" marL="0">
+            <a:pPr marL="0" indent="0" algn="ctr">
               <a:buNone/>
             </a:pPr>
             <a:r>
@@ -12831,7 +12571,7 @@
           <a:bodyPr wrap="square" lIns="0" tIns="0" rIns="0" bIns="0" rtlCol="0" anchor="ctr"/>
           <a:lstStyle/>
           <a:p>
-            <a:pPr indent="0" marL="0">
+            <a:pPr marL="0" indent="0">
               <a:buNone/>
             </a:pPr>
             <a:r>
@@ -12870,7 +12610,7 @@
           <a:bodyPr wrap="square" lIns="0" tIns="0" rIns="0" bIns="0" rtlCol="0" anchor="ctr"/>
           <a:lstStyle/>
           <a:p>
-            <a:pPr indent="0" marL="0">
+            <a:pPr marL="0" indent="0">
               <a:buNone/>
             </a:pPr>
             <a:r>
@@ -12959,7 +12699,7 @@
           <a:bodyPr wrap="square" lIns="0" tIns="0" rIns="0" bIns="0" rtlCol="0" anchor="ctr"/>
           <a:lstStyle/>
           <a:p>
-            <a:pPr algn="ctr" indent="0" marL="0">
+            <a:pPr marL="0" indent="0" algn="ctr">
               <a:buNone/>
             </a:pPr>
             <a:r>
@@ -12998,7 +12738,7 @@
           <a:bodyPr wrap="square" lIns="0" tIns="0" rIns="0" bIns="0" rtlCol="0" anchor="ctr"/>
           <a:lstStyle/>
           <a:p>
-            <a:pPr indent="0" marL="0">
+            <a:pPr marL="0" indent="0">
               <a:buNone/>
             </a:pPr>
             <a:r>
@@ -13037,7 +12777,7 @@
           <a:bodyPr wrap="square" lIns="0" tIns="0" rIns="0" bIns="0" rtlCol="0" anchor="ctr"/>
           <a:lstStyle/>
           <a:p>
-            <a:pPr indent="0" marL="0">
+            <a:pPr marL="0" indent="0">
               <a:buNone/>
             </a:pPr>
             <a:r>
@@ -13126,7 +12866,7 @@
           <a:bodyPr wrap="square" lIns="0" tIns="0" rIns="0" bIns="0" rtlCol="0" anchor="ctr"/>
           <a:lstStyle/>
           <a:p>
-            <a:pPr algn="ctr" indent="0" marL="0">
+            <a:pPr marL="0" indent="0" algn="ctr">
               <a:buNone/>
             </a:pPr>
             <a:r>
@@ -13165,7 +12905,7 @@
           <a:bodyPr wrap="square" lIns="0" tIns="0" rIns="0" bIns="0" rtlCol="0" anchor="ctr"/>
           <a:lstStyle/>
           <a:p>
-            <a:pPr indent="0" marL="0">
+            <a:pPr marL="0" indent="0">
               <a:buNone/>
             </a:pPr>
             <a:r>
@@ -13204,7 +12944,7 @@
           <a:bodyPr wrap="square" lIns="0" tIns="0" rIns="0" bIns="0" rtlCol="0" anchor="ctr"/>
           <a:lstStyle/>
           <a:p>
-            <a:pPr indent="0" marL="0">
+            <a:pPr marL="0" indent="0">
               <a:buNone/>
             </a:pPr>
             <a:r>
@@ -13293,7 +13033,7 @@
           <a:bodyPr wrap="square" lIns="0" tIns="0" rIns="0" bIns="0" rtlCol="0" anchor="ctr"/>
           <a:lstStyle/>
           <a:p>
-            <a:pPr algn="ctr" indent="0" marL="0">
+            <a:pPr marL="0" indent="0" algn="ctr">
               <a:buNone/>
             </a:pPr>
             <a:r>
@@ -13332,7 +13072,7 @@
           <a:bodyPr wrap="square" lIns="0" tIns="0" rIns="0" bIns="0" rtlCol="0" anchor="ctr"/>
           <a:lstStyle/>
           <a:p>
-            <a:pPr indent="0" marL="0">
+            <a:pPr marL="0" indent="0">
               <a:buNone/>
             </a:pPr>
             <a:r>
@@ -13371,7 +13111,7 @@
           <a:bodyPr wrap="square" lIns="0" tIns="0" rIns="0" bIns="0" rtlCol="0" anchor="ctr"/>
           <a:lstStyle/>
           <a:p>
-            <a:pPr indent="0" marL="0">
+            <a:pPr marL="0" indent="0">
               <a:buNone/>
             </a:pPr>
             <a:r>
@@ -13460,7 +13200,7 @@
           <a:bodyPr wrap="square" lIns="0" tIns="0" rIns="0" bIns="0" rtlCol="0" anchor="ctr"/>
           <a:lstStyle/>
           <a:p>
-            <a:pPr algn="ctr" indent="0" marL="0">
+            <a:pPr marL="0" indent="0" algn="ctr">
               <a:buNone/>
             </a:pPr>
             <a:r>
@@ -13499,7 +13239,7 @@
           <a:bodyPr wrap="square" lIns="0" tIns="0" rIns="0" bIns="0" rtlCol="0" anchor="ctr"/>
           <a:lstStyle/>
           <a:p>
-            <a:pPr indent="0" marL="0">
+            <a:pPr marL="0" indent="0">
               <a:buNone/>
             </a:pPr>
             <a:r>
@@ -13538,7 +13278,7 @@
           <a:bodyPr wrap="square" lIns="0" tIns="0" rIns="0" bIns="0" rtlCol="0" anchor="ctr"/>
           <a:lstStyle/>
           <a:p>
-            <a:pPr indent="0" marL="0">
+            <a:pPr marL="0" indent="0">
               <a:buNone/>
             </a:pPr>
             <a:r>
@@ -13572,6 +13312,7 @@
         <a:solidFill>
           <a:srgbClr val="F0F6FA"/>
         </a:solidFill>
+        <a:effectLst/>
       </p:bgPr>
     </p:bg>
     <p:spTree>
@@ -13659,7 +13400,7 @@
           <a:bodyPr wrap="square" lIns="0" tIns="0" rIns="0" bIns="0" rtlCol="0" anchor="ctr"/>
           <a:lstStyle/>
           <a:p>
-            <a:pPr indent="0" marL="0">
+            <a:pPr marL="0" indent="0">
               <a:buNone/>
             </a:pPr>
             <a:r>
@@ -13698,7 +13439,7 @@
           <a:bodyPr wrap="square" lIns="0" tIns="0" rIns="0" bIns="0" rtlCol="0" anchor="ctr"/>
           <a:lstStyle/>
           <a:p>
-            <a:pPr indent="0" marL="0">
+            <a:pPr marL="0" indent="0">
               <a:buNone/>
             </a:pPr>
             <a:r>
@@ -13740,7 +13481,7 @@
             <a:prstDash val="solid"/>
           </a:ln>
           <a:effectLst>
-            <a:outerShdw sx="100000" sy="100000" kx="0" ky="0" algn="bl" rotWithShape="0" blurRad="63500" dist="25400" dir="8100000">
+            <a:outerShdw blurRad="63500" dist="25400" dir="8100000" algn="bl" rotWithShape="0">
               <a:srgbClr val="000000">
                 <a:alpha val="12000"/>
               </a:srgbClr>
@@ -13819,7 +13560,7 @@
           <a:bodyPr wrap="square" lIns="0" tIns="0" rIns="0" bIns="0" rtlCol="0" anchor="ctr"/>
           <a:lstStyle/>
           <a:p>
-            <a:pPr indent="0" marL="0">
+            <a:pPr marL="0" indent="0">
               <a:buNone/>
             </a:pPr>
             <a:r>
@@ -13858,7 +13599,7 @@
           <a:bodyPr wrap="square" lIns="0" tIns="0" rIns="0" bIns="0" rtlCol="0" anchor="ctr"/>
           <a:lstStyle/>
           <a:p>
-            <a:pPr indent="0" marL="0">
+            <a:pPr marL="0" indent="0">
               <a:buNone/>
             </a:pPr>
             <a:r>
@@ -13922,7 +13663,7 @@
           <a:bodyPr wrap="square" lIns="0" tIns="0" rIns="0" bIns="0" rtlCol="0" anchor="ctr"/>
           <a:lstStyle/>
           <a:p>
-            <a:pPr algn="ctr" indent="0" marL="0">
+            <a:pPr marL="0" indent="0" algn="ctr">
               <a:buNone/>
             </a:pPr>
             <a:r>
@@ -13961,7 +13702,7 @@
           <a:bodyPr wrap="square" lIns="0" tIns="0" rIns="0" bIns="0" rtlCol="0" anchor="ctr"/>
           <a:lstStyle/>
           <a:p>
-            <a:pPr indent="0" marL="0">
+            <a:pPr marL="0" indent="0">
               <a:buNone/>
             </a:pPr>
             <a:r>
@@ -14025,7 +13766,7 @@
           <a:bodyPr wrap="square" lIns="0" tIns="0" rIns="0" bIns="0" rtlCol="0" anchor="ctr"/>
           <a:lstStyle/>
           <a:p>
-            <a:pPr algn="ctr" indent="0" marL="0">
+            <a:pPr marL="0" indent="0" algn="ctr">
               <a:buNone/>
             </a:pPr>
             <a:r>
@@ -14064,7 +13805,7 @@
           <a:bodyPr wrap="square" lIns="0" tIns="0" rIns="0" bIns="0" rtlCol="0" anchor="ctr"/>
           <a:lstStyle/>
           <a:p>
-            <a:pPr indent="0" marL="0">
+            <a:pPr marL="0" indent="0">
               <a:buNone/>
             </a:pPr>
             <a:r>
@@ -14128,7 +13869,7 @@
           <a:bodyPr wrap="square" lIns="0" tIns="0" rIns="0" bIns="0" rtlCol="0" anchor="ctr"/>
           <a:lstStyle/>
           <a:p>
-            <a:pPr algn="ctr" indent="0" marL="0">
+            <a:pPr marL="0" indent="0" algn="ctr">
               <a:buNone/>
             </a:pPr>
             <a:r>
@@ -14167,7 +13908,7 @@
           <a:bodyPr wrap="square" lIns="0" tIns="0" rIns="0" bIns="0" rtlCol="0" anchor="ctr"/>
           <a:lstStyle/>
           <a:p>
-            <a:pPr indent="0" marL="0">
+            <a:pPr marL="0" indent="0">
               <a:buNone/>
             </a:pPr>
             <a:r>
@@ -14231,7 +13972,7 @@
           <a:bodyPr wrap="square" lIns="0" tIns="0" rIns="0" bIns="0" rtlCol="0" anchor="ctr"/>
           <a:lstStyle/>
           <a:p>
-            <a:pPr algn="ctr" indent="0" marL="0">
+            <a:pPr marL="0" indent="0" algn="ctr">
               <a:buNone/>
             </a:pPr>
             <a:r>
@@ -14270,7 +14011,7 @@
           <a:bodyPr wrap="square" lIns="0" tIns="0" rIns="0" bIns="0" rtlCol="0" anchor="ctr"/>
           <a:lstStyle/>
           <a:p>
-            <a:pPr indent="0" marL="0">
+            <a:pPr marL="0" indent="0">
               <a:buNone/>
             </a:pPr>
             <a:r>
@@ -14334,7 +14075,7 @@
           <a:bodyPr wrap="square" lIns="0" tIns="0" rIns="0" bIns="0" rtlCol="0" anchor="ctr"/>
           <a:lstStyle/>
           <a:p>
-            <a:pPr algn="ctr" indent="0" marL="0">
+            <a:pPr marL="0" indent="0" algn="ctr">
               <a:buNone/>
             </a:pPr>
             <a:r>
@@ -14373,7 +14114,7 @@
           <a:bodyPr wrap="square" lIns="0" tIns="0" rIns="0" bIns="0" rtlCol="0" anchor="ctr"/>
           <a:lstStyle/>
           <a:p>
-            <a:pPr indent="0" marL="0">
+            <a:pPr marL="0" indent="0">
               <a:buNone/>
             </a:pPr>
             <a:r>
@@ -14390,7 +14131,7 @@
             <a:endParaRPr lang="en-US" sz="1100" dirty="0"/>
           </a:p>
           <a:p>
-            <a:pPr indent="0" marL="0">
+            <a:pPr marL="0" indent="0">
               <a:buNone/>
             </a:pPr>
             <a:r>
@@ -14432,7 +14173,7 @@
             <a:prstDash val="solid"/>
           </a:ln>
           <a:effectLst>
-            <a:outerShdw sx="100000" sy="100000" kx="0" ky="0" algn="bl" rotWithShape="0" blurRad="63500" dist="25400" dir="8100000">
+            <a:outerShdw blurRad="63500" dist="25400" dir="8100000" algn="bl" rotWithShape="0">
               <a:srgbClr val="000000">
                 <a:alpha val="12000"/>
               </a:srgbClr>
@@ -14511,7 +14252,7 @@
           <a:bodyPr wrap="square" lIns="0" tIns="0" rIns="0" bIns="0" rtlCol="0" anchor="ctr"/>
           <a:lstStyle/>
           <a:p>
-            <a:pPr indent="0" marL="0">
+            <a:pPr marL="0" indent="0">
               <a:buNone/>
             </a:pPr>
             <a:r>
@@ -14550,7 +14291,7 @@
           <a:bodyPr wrap="square" lIns="0" tIns="0" rIns="0" bIns="0" rtlCol="0" anchor="ctr"/>
           <a:lstStyle/>
           <a:p>
-            <a:pPr indent="0" marL="0">
+            <a:pPr marL="0" indent="0">
               <a:buNone/>
             </a:pPr>
             <a:r>
@@ -14614,7 +14355,7 @@
           <a:bodyPr wrap="square" lIns="0" tIns="0" rIns="0" bIns="0" rtlCol="0" anchor="ctr"/>
           <a:lstStyle/>
           <a:p>
-            <a:pPr algn="ctr" indent="0" marL="0">
+            <a:pPr marL="0" indent="0" algn="ctr">
               <a:buNone/>
             </a:pPr>
             <a:r>
@@ -14653,7 +14394,7 @@
           <a:bodyPr wrap="square" lIns="0" tIns="0" rIns="0" bIns="0" rtlCol="0" anchor="ctr"/>
           <a:lstStyle/>
           <a:p>
-            <a:pPr indent="0" marL="0">
+            <a:pPr marL="0" indent="0">
               <a:buNone/>
             </a:pPr>
             <a:r>
@@ -14717,7 +14458,7 @@
           <a:bodyPr wrap="square" lIns="0" tIns="0" rIns="0" bIns="0" rtlCol="0" anchor="ctr"/>
           <a:lstStyle/>
           <a:p>
-            <a:pPr algn="ctr" indent="0" marL="0">
+            <a:pPr marL="0" indent="0" algn="ctr">
               <a:buNone/>
             </a:pPr>
             <a:r>
@@ -14756,7 +14497,7 @@
           <a:bodyPr wrap="square" lIns="0" tIns="0" rIns="0" bIns="0" rtlCol="0" anchor="ctr"/>
           <a:lstStyle/>
           <a:p>
-            <a:pPr indent="0" marL="0">
+            <a:pPr marL="0" indent="0">
               <a:buNone/>
             </a:pPr>
             <a:r>
@@ -14820,7 +14561,7 @@
           <a:bodyPr wrap="square" lIns="0" tIns="0" rIns="0" bIns="0" rtlCol="0" anchor="ctr"/>
           <a:lstStyle/>
           <a:p>
-            <a:pPr algn="ctr" indent="0" marL="0">
+            <a:pPr marL="0" indent="0" algn="ctr">
               <a:buNone/>
             </a:pPr>
             <a:r>
@@ -14859,7 +14600,7 @@
           <a:bodyPr wrap="square" lIns="0" tIns="0" rIns="0" bIns="0" rtlCol="0" anchor="ctr"/>
           <a:lstStyle/>
           <a:p>
-            <a:pPr indent="0" marL="0">
+            <a:pPr marL="0" indent="0">
               <a:buNone/>
             </a:pPr>
             <a:r>
@@ -14923,7 +14664,7 @@
           <a:bodyPr wrap="square" lIns="0" tIns="0" rIns="0" bIns="0" rtlCol="0" anchor="ctr"/>
           <a:lstStyle/>
           <a:p>
-            <a:pPr algn="ctr" indent="0" marL="0">
+            <a:pPr marL="0" indent="0" algn="ctr">
               <a:buNone/>
             </a:pPr>
             <a:r>
@@ -14962,7 +14703,7 @@
           <a:bodyPr wrap="square" lIns="0" tIns="0" rIns="0" bIns="0" rtlCol="0" anchor="ctr"/>
           <a:lstStyle/>
           <a:p>
-            <a:pPr indent="0" marL="0">
+            <a:pPr marL="0" indent="0">
               <a:buNone/>
             </a:pPr>
             <a:r>
@@ -15026,7 +14767,7 @@
           <a:bodyPr wrap="square" lIns="0" tIns="0" rIns="0" bIns="0" rtlCol="0" anchor="ctr"/>
           <a:lstStyle/>
           <a:p>
-            <a:pPr algn="ctr" indent="0" marL="0">
+            <a:pPr marL="0" indent="0" algn="ctr">
               <a:buNone/>
             </a:pPr>
             <a:r>
@@ -15065,7 +14806,7 @@
           <a:bodyPr wrap="square" lIns="0" tIns="0" rIns="0" bIns="0" rtlCol="0" anchor="ctr"/>
           <a:lstStyle/>
           <a:p>
-            <a:pPr indent="0" marL="0">
+            <a:pPr marL="0" indent="0">
               <a:buNone/>
             </a:pPr>
             <a:r>
@@ -15082,7 +14823,7 @@
             <a:endParaRPr lang="en-US" sz="1100" dirty="0"/>
           </a:p>
           <a:p>
-            <a:pPr indent="0" marL="0">
+            <a:pPr marL="0" indent="0">
               <a:buNone/>
             </a:pPr>
             <a:r>
@@ -15116,6 +14857,7 @@
         <a:solidFill>
           <a:srgbClr val="0A1628"/>
         </a:solidFill>
+        <a:effectLst/>
       </p:bgPr>
     </p:bg>
     <p:spTree>
@@ -15203,7 +14945,7 @@
           <a:bodyPr wrap="square" lIns="0" tIns="0" rIns="0" bIns="0" rtlCol="0" anchor="ctr"/>
           <a:lstStyle/>
           <a:p>
-            <a:pPr indent="0" marL="0">
+            <a:pPr marL="0" indent="0">
               <a:buNone/>
             </a:pPr>
             <a:r>
@@ -15267,7 +15009,7 @@
           <a:bodyPr wrap="square" lIns="0" tIns="0" rIns="0" bIns="0" rtlCol="0" anchor="ctr"/>
           <a:lstStyle/>
           <a:p>
-            <a:pPr indent="0" marL="0">
+            <a:pPr marL="0" indent="0">
               <a:buNone/>
             </a:pPr>
             <a:r>
@@ -15306,7 +15048,7 @@
           <a:bodyPr wrap="square" lIns="0" tIns="0" rIns="0" bIns="0" rtlCol="0" anchor="ctr"/>
           <a:lstStyle/>
           <a:p>
-            <a:pPr indent="0" marL="0">
+            <a:pPr marL="0" indent="0">
               <a:buNone/>
             </a:pPr>
             <a:r>
@@ -15395,7 +15137,7 @@
           <a:bodyPr wrap="square" lIns="0" tIns="0" rIns="0" bIns="0" rtlCol="0" anchor="ctr"/>
           <a:lstStyle/>
           <a:p>
-            <a:pPr indent="0" marL="0">
+            <a:pPr marL="0" indent="0">
               <a:buNone/>
             </a:pPr>
             <a:r>
@@ -15434,7 +15176,7 @@
           <a:bodyPr wrap="square" lIns="0" tIns="0" rIns="0" bIns="0" rtlCol="0" anchor="ctr"/>
           <a:lstStyle/>
           <a:p>
-            <a:pPr indent="0" marL="0">
+            <a:pPr marL="0" indent="0">
               <a:buNone/>
             </a:pPr>
             <a:r>
@@ -15523,7 +15265,7 @@
           <a:bodyPr wrap="square" lIns="0" tIns="0" rIns="0" bIns="0" rtlCol="0" anchor="ctr"/>
           <a:lstStyle/>
           <a:p>
-            <a:pPr indent="0" marL="0">
+            <a:pPr marL="0" indent="0">
               <a:buNone/>
             </a:pPr>
             <a:r>
@@ -15562,7 +15304,7 @@
           <a:bodyPr wrap="square" lIns="0" tIns="0" rIns="0" bIns="0" rtlCol="0" anchor="ctr"/>
           <a:lstStyle/>
           <a:p>
-            <a:pPr indent="0" marL="0">
+            <a:pPr marL="0" indent="0">
               <a:buNone/>
             </a:pPr>
             <a:r>
@@ -15651,7 +15393,7 @@
           <a:bodyPr wrap="square" lIns="0" tIns="0" rIns="0" bIns="0" rtlCol="0" anchor="ctr"/>
           <a:lstStyle/>
           <a:p>
-            <a:pPr indent="0" marL="0">
+            <a:pPr marL="0" indent="0">
               <a:buNone/>
             </a:pPr>
             <a:r>
@@ -15690,7 +15432,7 @@
           <a:bodyPr wrap="square" lIns="0" tIns="0" rIns="0" bIns="0" rtlCol="0" anchor="ctr"/>
           <a:lstStyle/>
           <a:p>
-            <a:pPr indent="0" marL="0">
+            <a:pPr marL="0" indent="0">
               <a:buNone/>
             </a:pPr>
             <a:r>
@@ -15779,7 +15521,7 @@
           <a:bodyPr wrap="square" lIns="0" tIns="0" rIns="0" bIns="0" rtlCol="0" anchor="ctr"/>
           <a:lstStyle/>
           <a:p>
-            <a:pPr indent="0" marL="0">
+            <a:pPr marL="0" indent="0">
               <a:buNone/>
             </a:pPr>
             <a:r>
@@ -15818,7 +15560,7 @@
           <a:bodyPr wrap="square" lIns="0" tIns="0" rIns="0" bIns="0" rtlCol="0" anchor="ctr"/>
           <a:lstStyle/>
           <a:p>
-            <a:pPr indent="0" marL="0">
+            <a:pPr marL="0" indent="0">
               <a:buNone/>
             </a:pPr>
             <a:r>
@@ -15857,7 +15599,7 @@
           <a:bodyPr wrap="square" lIns="0" tIns="0" rIns="0" bIns="0" rtlCol="0" anchor="ctr"/>
           <a:lstStyle/>
           <a:p>
-            <a:pPr indent="0" marL="0">
+            <a:pPr marL="0" indent="0">
               <a:buNone/>
             </a:pPr>
             <a:r>
@@ -15896,7 +15638,7 @@
           <a:bodyPr wrap="square" lIns="0" tIns="0" rIns="0" bIns="0" rtlCol="0" anchor="ctr"/>
           <a:lstStyle/>
           <a:p>
-            <a:pPr indent="0" marL="0">
+            <a:pPr marL="0" indent="0">
               <a:buNone/>
             </a:pPr>
             <a:r>
@@ -15938,7 +15680,7 @@
             <a:prstDash val="solid"/>
           </a:ln>
           <a:effectLst>
-            <a:outerShdw sx="100000" sy="100000" kx="0" ky="0" algn="bl" rotWithShape="0" blurRad="63500" dist="25400" dir="8100000">
+            <a:outerShdw blurRad="63500" dist="25400" dir="8100000" algn="bl" rotWithShape="0">
               <a:srgbClr val="000000">
                 <a:alpha val="12000"/>
               </a:srgbClr>
@@ -15992,7 +15734,7 @@
           <a:bodyPr wrap="square" lIns="0" tIns="0" rIns="0" bIns="0" rtlCol="0" anchor="ctr"/>
           <a:lstStyle/>
           <a:p>
-            <a:pPr indent="0" marL="0">
+            <a:pPr marL="0" indent="0">
               <a:buNone/>
             </a:pPr>
             <a:r>
@@ -16056,7 +15798,7 @@
           <a:bodyPr wrap="square" lIns="0" tIns="0" rIns="0" bIns="0" rtlCol="0" anchor="ctr"/>
           <a:lstStyle/>
           <a:p>
-            <a:pPr indent="0" marL="0">
+            <a:pPr marL="0" indent="0">
               <a:buNone/>
             </a:pPr>
             <a:r>
@@ -16095,7 +15837,7 @@
           <a:bodyPr wrap="square" lIns="0" tIns="0" rIns="0" bIns="0" rtlCol="0" anchor="ctr"/>
           <a:lstStyle/>
           <a:p>
-            <a:pPr indent="0" marL="0">
+            <a:pPr marL="0" indent="0">
               <a:buNone/>
             </a:pPr>
             <a:r>
@@ -16159,7 +15901,7 @@
           <a:bodyPr wrap="square" lIns="0" tIns="0" rIns="0" bIns="0" rtlCol="0" anchor="ctr"/>
           <a:lstStyle/>
           <a:p>
-            <a:pPr indent="0" marL="0">
+            <a:pPr marL="0" indent="0">
               <a:buNone/>
             </a:pPr>
             <a:r>
@@ -16198,7 +15940,7 @@
           <a:bodyPr wrap="square" lIns="0" tIns="0" rIns="0" bIns="0" rtlCol="0" anchor="ctr"/>
           <a:lstStyle/>
           <a:p>
-            <a:pPr indent="0" marL="0">
+            <a:pPr marL="0" indent="0">
               <a:buNone/>
             </a:pPr>
             <a:r>
@@ -16262,7 +16004,7 @@
           <a:bodyPr wrap="square" lIns="0" tIns="0" rIns="0" bIns="0" rtlCol="0" anchor="ctr"/>
           <a:lstStyle/>
           <a:p>
-            <a:pPr indent="0" marL="0">
+            <a:pPr marL="0" indent="0">
               <a:buNone/>
             </a:pPr>
             <a:r>
@@ -16301,7 +16043,7 @@
           <a:bodyPr wrap="square" lIns="0" tIns="0" rIns="0" bIns="0" rtlCol="0" anchor="ctr"/>
           <a:lstStyle/>
           <a:p>
-            <a:pPr indent="0" marL="0">
+            <a:pPr marL="0" indent="0">
               <a:buNone/>
             </a:pPr>
             <a:r>
@@ -16365,7 +16107,7 @@
           <a:bodyPr wrap="square" lIns="0" tIns="0" rIns="0" bIns="0" rtlCol="0" anchor="ctr"/>
           <a:lstStyle/>
           <a:p>
-            <a:pPr indent="0" marL="0">
+            <a:pPr marL="0" indent="0">
               <a:buNone/>
             </a:pPr>
             <a:r>
@@ -16404,7 +16146,7 @@
           <a:bodyPr wrap="square" lIns="0" tIns="0" rIns="0" bIns="0" rtlCol="0" anchor="ctr"/>
           <a:lstStyle/>
           <a:p>
-            <a:pPr indent="0" marL="0">
+            <a:pPr marL="0" indent="0">
               <a:buNone/>
             </a:pPr>
             <a:r>
@@ -16468,7 +16210,7 @@
           <a:bodyPr wrap="square" lIns="0" tIns="0" rIns="0" bIns="0" rtlCol="0" anchor="ctr"/>
           <a:lstStyle/>
           <a:p>
-            <a:pPr indent="0" marL="0">
+            <a:pPr marL="0" indent="0">
               <a:buNone/>
             </a:pPr>
             <a:r>
@@ -16507,7 +16249,7 @@
           <a:bodyPr wrap="square" lIns="0" tIns="0" rIns="0" bIns="0" rtlCol="0" anchor="ctr"/>
           <a:lstStyle/>
           <a:p>
-            <a:pPr indent="0" marL="0">
+            <a:pPr marL="0" indent="0">
               <a:buNone/>
             </a:pPr>
             <a:r>
@@ -16571,7 +16313,7 @@
           <a:bodyPr wrap="square" lIns="0" tIns="0" rIns="0" bIns="0" rtlCol="0" anchor="ctr"/>
           <a:lstStyle/>
           <a:p>
-            <a:pPr indent="0" marL="0">
+            <a:pPr marL="0" indent="0">
               <a:buNone/>
             </a:pPr>
             <a:r>
@@ -16610,7 +16352,7 @@
           <a:bodyPr wrap="square" lIns="0" tIns="0" rIns="0" bIns="0" rtlCol="0" anchor="ctr"/>
           <a:lstStyle/>
           <a:p>
-            <a:pPr indent="0" marL="0">
+            <a:pPr marL="0" indent="0">
               <a:buNone/>
             </a:pPr>
             <a:r>
@@ -16674,7 +16416,7 @@
           <a:bodyPr wrap="square" lIns="0" tIns="0" rIns="0" bIns="0" rtlCol="0" anchor="ctr"/>
           <a:lstStyle/>
           <a:p>
-            <a:pPr indent="0" marL="0">
+            <a:pPr marL="0" indent="0">
               <a:buNone/>
             </a:pPr>
             <a:r>
@@ -16713,7 +16455,7 @@
           <a:bodyPr wrap="square" lIns="0" tIns="0" rIns="0" bIns="0" rtlCol="0" anchor="ctr"/>
           <a:lstStyle/>
           <a:p>
-            <a:pPr indent="0" marL="0">
+            <a:pPr marL="0" indent="0">
               <a:buNone/>
             </a:pPr>
             <a:r>
@@ -16777,7 +16519,7 @@
           <a:bodyPr wrap="square" lIns="0" tIns="0" rIns="0" bIns="0" rtlCol="0" anchor="ctr"/>
           <a:lstStyle/>
           <a:p>
-            <a:pPr indent="0" marL="0">
+            <a:pPr marL="0" indent="0">
               <a:buNone/>
             </a:pPr>
             <a:r>
@@ -16816,7 +16558,7 @@
           <a:bodyPr wrap="square" lIns="0" tIns="0" rIns="0" bIns="0" rtlCol="0" anchor="ctr"/>
           <a:lstStyle/>
           <a:p>
-            <a:pPr indent="0" marL="0">
+            <a:pPr marL="0" indent="0">
               <a:buNone/>
             </a:pPr>
             <a:r>
@@ -16850,6 +16592,7 @@
         <a:solidFill>
           <a:srgbClr val="F0F6FA"/>
         </a:solidFill>
+        <a:effectLst/>
       </p:bgPr>
     </p:bg>
     <p:spTree>
@@ -16937,7 +16680,7 @@
           <a:bodyPr wrap="square" lIns="0" tIns="0" rIns="0" bIns="0" rtlCol="0" anchor="ctr"/>
           <a:lstStyle/>
           <a:p>
-            <a:pPr indent="0" marL="0">
+            <a:pPr marL="0" indent="0">
               <a:buNone/>
             </a:pPr>
             <a:r>
@@ -16976,7 +16719,7 @@
           <a:bodyPr wrap="square" lIns="0" tIns="0" rIns="0" bIns="0" rtlCol="0" anchor="ctr"/>
           <a:lstStyle/>
           <a:p>
-            <a:pPr indent="0" marL="0">
+            <a:pPr marL="0" indent="0">
               <a:buNone/>
             </a:pPr>
             <a:r>
@@ -17018,7 +16761,7 @@
             <a:prstDash val="solid"/>
           </a:ln>
           <a:effectLst>
-            <a:outerShdw sx="100000" sy="100000" kx="0" ky="0" algn="bl" rotWithShape="0" blurRad="63500" dist="25400" dir="8100000">
+            <a:outerShdw blurRad="63500" dist="25400" dir="8100000" algn="bl" rotWithShape="0">
               <a:srgbClr val="000000">
                 <a:alpha val="12000"/>
               </a:srgbClr>
@@ -17072,7 +16815,7 @@
           <a:bodyPr wrap="square" lIns="0" tIns="0" rIns="0" bIns="0" rtlCol="0" anchor="ctr"/>
           <a:lstStyle/>
           <a:p>
-            <a:pPr indent="0" marL="0">
+            <a:pPr marL="0" indent="0">
               <a:buNone/>
             </a:pPr>
             <a:r>
@@ -17111,7 +16854,7 @@
           <a:bodyPr wrap="square" lIns="0" tIns="0" rIns="0" bIns="0" rtlCol="0" anchor="ctr"/>
           <a:lstStyle/>
           <a:p>
-            <a:pPr indent="0" marL="0">
+            <a:pPr marL="0" indent="0">
               <a:buNone/>
             </a:pPr>
             <a:r>
@@ -17150,7 +16893,7 @@
           <a:bodyPr wrap="square" lIns="0" tIns="0" rIns="0" bIns="0" rtlCol="0" anchor="ctr"/>
           <a:lstStyle/>
           <a:p>
-            <a:pPr indent="0" marL="0">
+            <a:pPr marL="0" indent="0">
               <a:buNone/>
             </a:pPr>
             <a:r>
@@ -17167,7 +16910,7 @@
             <a:endParaRPr lang="en-US" sz="1000" dirty="0"/>
           </a:p>
           <a:p>
-            <a:pPr indent="0" marL="0">
+            <a:pPr marL="0" indent="0">
               <a:buNone/>
             </a:pPr>
             <a:r>
@@ -17231,7 +16974,7 @@
           <a:bodyPr wrap="square" lIns="0" tIns="0" rIns="0" bIns="0" rtlCol="0" anchor="ctr"/>
           <a:lstStyle/>
           <a:p>
-            <a:pPr indent="0" marL="0">
+            <a:pPr marL="0" indent="0">
               <a:buNone/>
             </a:pPr>
             <a:r>
@@ -17273,7 +17016,7 @@
             <a:prstDash val="solid"/>
           </a:ln>
           <a:effectLst>
-            <a:outerShdw sx="100000" sy="100000" kx="0" ky="0" algn="bl" rotWithShape="0" blurRad="63500" dist="25400" dir="8100000">
+            <a:outerShdw blurRad="63500" dist="25400" dir="8100000" algn="bl" rotWithShape="0">
               <a:srgbClr val="000000">
                 <a:alpha val="12000"/>
               </a:srgbClr>
@@ -17327,7 +17070,7 @@
           <a:bodyPr wrap="square" lIns="0" tIns="0" rIns="0" bIns="0" rtlCol="0" anchor="ctr"/>
           <a:lstStyle/>
           <a:p>
-            <a:pPr indent="0" marL="0">
+            <a:pPr marL="0" indent="0">
               <a:buNone/>
             </a:pPr>
             <a:r>
@@ -17366,7 +17109,7 @@
           <a:bodyPr wrap="square" lIns="0" tIns="0" rIns="0" bIns="0" rtlCol="0" anchor="ctr"/>
           <a:lstStyle/>
           <a:p>
-            <a:pPr indent="0" marL="0">
+            <a:pPr marL="0" indent="0">
               <a:buNone/>
             </a:pPr>
             <a:r>
@@ -17405,7 +17148,7 @@
           <a:bodyPr wrap="square" lIns="0" tIns="0" rIns="0" bIns="0" rtlCol="0" anchor="ctr"/>
           <a:lstStyle/>
           <a:p>
-            <a:pPr indent="0" marL="0">
+            <a:pPr marL="0" indent="0">
               <a:buNone/>
             </a:pPr>
             <a:r>
@@ -17422,7 +17165,7 @@
             <a:endParaRPr lang="en-US" sz="1000" dirty="0"/>
           </a:p>
           <a:p>
-            <a:pPr indent="0" marL="0">
+            <a:pPr marL="0" indent="0">
               <a:buNone/>
             </a:pPr>
             <a:r>
@@ -17486,7 +17229,7 @@
           <a:bodyPr wrap="square" lIns="0" tIns="0" rIns="0" bIns="0" rtlCol="0" anchor="ctr"/>
           <a:lstStyle/>
           <a:p>
-            <a:pPr indent="0" marL="0">
+            <a:pPr marL="0" indent="0">
               <a:buNone/>
             </a:pPr>
             <a:r>
@@ -17528,7 +17271,7 @@
             <a:prstDash val="solid"/>
           </a:ln>
           <a:effectLst>
-            <a:outerShdw sx="100000" sy="100000" kx="0" ky="0" algn="bl" rotWithShape="0" blurRad="63500" dist="25400" dir="8100000">
+            <a:outerShdw blurRad="63500" dist="25400" dir="8100000" algn="bl" rotWithShape="0">
               <a:srgbClr val="000000">
                 <a:alpha val="12000"/>
               </a:srgbClr>
@@ -17582,7 +17325,7 @@
           <a:bodyPr wrap="square" lIns="0" tIns="0" rIns="0" bIns="0" rtlCol="0" anchor="ctr"/>
           <a:lstStyle/>
           <a:p>
-            <a:pPr indent="0" marL="0">
+            <a:pPr marL="0" indent="0">
               <a:buNone/>
             </a:pPr>
             <a:r>
@@ -17621,7 +17364,7 @@
           <a:bodyPr wrap="square" lIns="0" tIns="0" rIns="0" bIns="0" rtlCol="0" anchor="ctr"/>
           <a:lstStyle/>
           <a:p>
-            <a:pPr indent="0" marL="0">
+            <a:pPr marL="0" indent="0">
               <a:buNone/>
             </a:pPr>
             <a:r>
@@ -17660,7 +17403,7 @@
           <a:bodyPr wrap="square" lIns="0" tIns="0" rIns="0" bIns="0" rtlCol="0" anchor="ctr"/>
           <a:lstStyle/>
           <a:p>
-            <a:pPr indent="0" marL="0">
+            <a:pPr marL="0" indent="0">
               <a:buNone/>
             </a:pPr>
             <a:r>
@@ -17677,7 +17420,7 @@
             <a:endParaRPr lang="en-US" sz="1000" dirty="0"/>
           </a:p>
           <a:p>
-            <a:pPr indent="0" marL="0">
+            <a:pPr marL="0" indent="0">
               <a:buNone/>
             </a:pPr>
             <a:r>
@@ -17741,7 +17484,7 @@
           <a:bodyPr wrap="square" lIns="0" tIns="0" rIns="0" bIns="0" rtlCol="0" anchor="ctr"/>
           <a:lstStyle/>
           <a:p>
-            <a:pPr indent="0" marL="0">
+            <a:pPr marL="0" indent="0">
               <a:buNone/>
             </a:pPr>
             <a:r>
@@ -17783,7 +17526,7 @@
             <a:prstDash val="solid"/>
           </a:ln>
           <a:effectLst>
-            <a:outerShdw sx="100000" sy="100000" kx="0" ky="0" algn="bl" rotWithShape="0" blurRad="63500" dist="25400" dir="8100000">
+            <a:outerShdw blurRad="63500" dist="25400" dir="8100000" algn="bl" rotWithShape="0">
               <a:srgbClr val="000000">
                 <a:alpha val="12000"/>
               </a:srgbClr>
@@ -17837,7 +17580,7 @@
           <a:bodyPr wrap="square" lIns="0" tIns="0" rIns="0" bIns="0" rtlCol="0" anchor="ctr"/>
           <a:lstStyle/>
           <a:p>
-            <a:pPr indent="0" marL="0">
+            <a:pPr marL="0" indent="0">
               <a:buNone/>
             </a:pPr>
             <a:r>
@@ -17876,7 +17619,7 @@
           <a:bodyPr wrap="square" lIns="0" tIns="0" rIns="0" bIns="0" rtlCol="0" anchor="ctr"/>
           <a:lstStyle/>
           <a:p>
-            <a:pPr indent="0" marL="0">
+            <a:pPr marL="0" indent="0">
               <a:buNone/>
             </a:pPr>
             <a:r>
@@ -17915,7 +17658,7 @@
           <a:bodyPr wrap="square" lIns="0" tIns="0" rIns="0" bIns="0" rtlCol="0" anchor="ctr"/>
           <a:lstStyle/>
           <a:p>
-            <a:pPr indent="0" marL="0">
+            <a:pPr marL="0" indent="0">
               <a:buNone/>
             </a:pPr>
             <a:r>
@@ -17932,7 +17675,7 @@
             <a:endParaRPr lang="en-US" sz="1000" dirty="0"/>
           </a:p>
           <a:p>
-            <a:pPr indent="0" marL="0">
+            <a:pPr marL="0" indent="0">
               <a:buNone/>
             </a:pPr>
             <a:r>
@@ -17996,7 +17739,7 @@
           <a:bodyPr wrap="square" lIns="0" tIns="0" rIns="0" bIns="0" rtlCol="0" anchor="ctr"/>
           <a:lstStyle/>
           <a:p>
-            <a:pPr indent="0" marL="0">
+            <a:pPr marL="0" indent="0">
               <a:buNone/>
             </a:pPr>
             <a:r>
@@ -18038,7 +17781,7 @@
             <a:prstDash val="solid"/>
           </a:ln>
           <a:effectLst>
-            <a:outerShdw sx="100000" sy="100000" kx="0" ky="0" algn="bl" rotWithShape="0" blurRad="63500" dist="25400" dir="8100000">
+            <a:outerShdw blurRad="63500" dist="25400" dir="8100000" algn="bl" rotWithShape="0">
               <a:srgbClr val="000000">
                 <a:alpha val="12000"/>
               </a:srgbClr>
@@ -18092,7 +17835,7 @@
           <a:bodyPr wrap="square" lIns="0" tIns="0" rIns="0" bIns="0" rtlCol="0" anchor="ctr"/>
           <a:lstStyle/>
           <a:p>
-            <a:pPr indent="0" marL="0">
+            <a:pPr marL="0" indent="0">
               <a:buNone/>
             </a:pPr>
             <a:r>
@@ -18131,7 +17874,7 @@
           <a:bodyPr wrap="square" lIns="0" tIns="0" rIns="0" bIns="0" rtlCol="0" anchor="ctr"/>
           <a:lstStyle/>
           <a:p>
-            <a:pPr indent="0" marL="0">
+            <a:pPr marL="0" indent="0">
               <a:buNone/>
             </a:pPr>
             <a:r>
@@ -18170,7 +17913,7 @@
           <a:bodyPr wrap="square" lIns="0" tIns="0" rIns="0" bIns="0" rtlCol="0" anchor="ctr"/>
           <a:lstStyle/>
           <a:p>
-            <a:pPr indent="0" marL="0">
+            <a:pPr marL="0" indent="0">
               <a:buNone/>
             </a:pPr>
             <a:r>
@@ -18187,7 +17930,7 @@
             <a:endParaRPr lang="en-US" sz="1000" dirty="0"/>
           </a:p>
           <a:p>
-            <a:pPr indent="0" marL="0">
+            <a:pPr marL="0" indent="0">
               <a:buNone/>
             </a:pPr>
             <a:r>
@@ -18251,7 +17994,7 @@
           <a:bodyPr wrap="square" lIns="0" tIns="0" rIns="0" bIns="0" rtlCol="0" anchor="ctr"/>
           <a:lstStyle/>
           <a:p>
-            <a:pPr indent="0" marL="0">
+            <a:pPr marL="0" indent="0">
               <a:buNone/>
             </a:pPr>
             <a:r>
@@ -18293,7 +18036,7 @@
             <a:prstDash val="solid"/>
           </a:ln>
           <a:effectLst>
-            <a:outerShdw sx="100000" sy="100000" kx="0" ky="0" algn="bl" rotWithShape="0" blurRad="63500" dist="25400" dir="8100000">
+            <a:outerShdw blurRad="63500" dist="25400" dir="8100000" algn="bl" rotWithShape="0">
               <a:srgbClr val="000000">
                 <a:alpha val="12000"/>
               </a:srgbClr>
@@ -18347,7 +18090,7 @@
           <a:bodyPr wrap="square" lIns="0" tIns="0" rIns="0" bIns="0" rtlCol="0" anchor="ctr"/>
           <a:lstStyle/>
           <a:p>
-            <a:pPr indent="0" marL="0">
+            <a:pPr marL="0" indent="0">
               <a:buNone/>
             </a:pPr>
             <a:r>
@@ -18386,7 +18129,7 @@
           <a:bodyPr wrap="square" lIns="0" tIns="0" rIns="0" bIns="0" rtlCol="0" anchor="ctr"/>
           <a:lstStyle/>
           <a:p>
-            <a:pPr indent="0" marL="0">
+            <a:pPr marL="0" indent="0">
               <a:buNone/>
             </a:pPr>
             <a:r>
@@ -18425,7 +18168,7 @@
           <a:bodyPr wrap="square" lIns="0" tIns="0" rIns="0" bIns="0" rtlCol="0" anchor="ctr"/>
           <a:lstStyle/>
           <a:p>
-            <a:pPr indent="0" marL="0">
+            <a:pPr marL="0" indent="0">
               <a:buNone/>
             </a:pPr>
             <a:r>
@@ -18442,7 +18185,7 @@
             <a:endParaRPr lang="en-US" sz="1000" dirty="0"/>
           </a:p>
           <a:p>
-            <a:pPr indent="0" marL="0">
+            <a:pPr marL="0" indent="0">
               <a:buNone/>
             </a:pPr>
             <a:r>
@@ -18506,7 +18249,7 @@
           <a:bodyPr wrap="square" lIns="0" tIns="0" rIns="0" bIns="0" rtlCol="0" anchor="ctr"/>
           <a:lstStyle/>
           <a:p>
-            <a:pPr indent="0" marL="0">
+            <a:pPr marL="0" indent="0">
               <a:buNone/>
             </a:pPr>
             <a:r>
@@ -18570,7 +18313,7 @@
           <a:bodyPr wrap="square" lIns="0" tIns="0" rIns="0" bIns="0" rtlCol="0" anchor="ctr"/>
           <a:lstStyle/>
           <a:p>
-            <a:pPr indent="0" marL="0">
+            <a:pPr marL="0" indent="0">
               <a:buNone/>
             </a:pPr>
             <a:r>
@@ -18604,6 +18347,7 @@
         <a:solidFill>
           <a:srgbClr val="F0F6FA"/>
         </a:solidFill>
+        <a:effectLst/>
       </p:bgPr>
     </p:bg>
     <p:spTree>
@@ -18691,7 +18435,7 @@
           <a:bodyPr wrap="square" lIns="0" tIns="0" rIns="0" bIns="0" rtlCol="0" anchor="ctr"/>
           <a:lstStyle/>
           <a:p>
-            <a:pPr indent="0" marL="0">
+            <a:pPr marL="0" indent="0">
               <a:buNone/>
             </a:pPr>
             <a:r>
@@ -18733,7 +18477,7 @@
             <a:prstDash val="solid"/>
           </a:ln>
           <a:effectLst>
-            <a:outerShdw sx="100000" sy="100000" kx="0" ky="0" algn="bl" rotWithShape="0" blurRad="63500" dist="25400" dir="8100000">
+            <a:outerShdw blurRad="63500" dist="25400" dir="8100000" algn="bl" rotWithShape="0">
               <a:srgbClr val="000000">
                 <a:alpha val="12000"/>
               </a:srgbClr>
@@ -18812,7 +18556,7 @@
           <a:bodyPr wrap="square" lIns="0" tIns="0" rIns="0" bIns="0" rtlCol="0" anchor="ctr"/>
           <a:lstStyle/>
           <a:p>
-            <a:pPr indent="0" marL="0">
+            <a:pPr marL="0" indent="0">
               <a:buNone/>
             </a:pPr>
             <a:r>
@@ -18851,7 +18595,7 @@
           <a:bodyPr wrap="square" lIns="0" tIns="0" rIns="0" bIns="0" rtlCol="0" anchor="ctr"/>
           <a:lstStyle/>
           <a:p>
-            <a:pPr indent="0" marL="0">
+            <a:pPr marL="0" indent="0">
               <a:buNone/>
             </a:pPr>
             <a:r>
@@ -18868,7 +18612,7 @@
             <a:endParaRPr lang="en-US" sz="1150" dirty="0"/>
           </a:p>
           <a:p>
-            <a:pPr indent="0" marL="0">
+            <a:pPr marL="0" indent="0">
               <a:buNone/>
             </a:pPr>
             <a:r>
@@ -18932,7 +18676,7 @@
           <a:bodyPr wrap="square" lIns="0" tIns="0" rIns="0" bIns="0" rtlCol="0" anchor="ctr"/>
           <a:lstStyle/>
           <a:p>
-            <a:pPr indent="0" marL="0">
+            <a:pPr marL="0" indent="0">
               <a:buNone/>
             </a:pPr>
             <a:r>
@@ -18971,7 +18715,7 @@
           <a:bodyPr wrap="square" lIns="0" tIns="0" rIns="0" bIns="0" rtlCol="0" anchor="ctr"/>
           <a:lstStyle/>
           <a:p>
-            <a:pPr indent="0" marL="0">
+            <a:pPr marL="0" indent="0">
               <a:buNone/>
             </a:pPr>
             <a:r>
@@ -19010,7 +18754,7 @@
           <a:bodyPr wrap="square" lIns="0" tIns="0" rIns="0" bIns="0" rtlCol="0" anchor="ctr"/>
           <a:lstStyle/>
           <a:p>
-            <a:pPr indent="0" marL="0">
+            <a:pPr marL="0" indent="0">
               <a:buNone/>
             </a:pPr>
             <a:r>
@@ -19049,7 +18793,7 @@
           <a:bodyPr wrap="square" lIns="0" tIns="0" rIns="0" bIns="0" rtlCol="0" anchor="ctr"/>
           <a:lstStyle/>
           <a:p>
-            <a:pPr indent="0" marL="0">
+            <a:pPr marL="0" indent="0">
               <a:buNone/>
             </a:pPr>
             <a:r>
@@ -19088,7 +18832,7 @@
           <a:bodyPr wrap="square" lIns="0" tIns="0" rIns="0" bIns="0" rtlCol="0" anchor="ctr"/>
           <a:lstStyle/>
           <a:p>
-            <a:pPr indent="0" marL="0">
+            <a:pPr marL="0" indent="0">
               <a:buNone/>
             </a:pPr>
             <a:r>
@@ -19152,7 +18896,7 @@
           <a:bodyPr wrap="square" lIns="0" tIns="0" rIns="0" bIns="0" rtlCol="0" anchor="ctr"/>
           <a:lstStyle/>
           <a:p>
-            <a:pPr algn="ctr" indent="0" marL="0">
+            <a:pPr marL="0" indent="0" algn="ctr">
               <a:buNone/>
             </a:pPr>
             <a:r>
@@ -19194,7 +18938,7 @@
             <a:prstDash val="solid"/>
           </a:ln>
           <a:effectLst>
-            <a:outerShdw sx="100000" sy="100000" kx="0" ky="0" algn="bl" rotWithShape="0" blurRad="63500" dist="25400" dir="8100000">
+            <a:outerShdw blurRad="63500" dist="25400" dir="8100000" algn="bl" rotWithShape="0">
               <a:srgbClr val="000000">
                 <a:alpha val="12000"/>
               </a:srgbClr>
@@ -19273,7 +19017,7 @@
           <a:bodyPr wrap="square" lIns="0" tIns="0" rIns="0" bIns="0" rtlCol="0" anchor="ctr"/>
           <a:lstStyle/>
           <a:p>
-            <a:pPr indent="0" marL="0">
+            <a:pPr marL="0" indent="0">
               <a:buNone/>
             </a:pPr>
             <a:r>
@@ -19312,7 +19056,7 @@
           <a:bodyPr wrap="square" lIns="0" tIns="0" rIns="0" bIns="0" rtlCol="0" anchor="ctr"/>
           <a:lstStyle/>
           <a:p>
-            <a:pPr indent="0" marL="0">
+            <a:pPr marL="0" indent="0">
               <a:buNone/>
             </a:pPr>
             <a:r>
@@ -19329,7 +19073,7 @@
             <a:endParaRPr lang="en-US" sz="1150" dirty="0"/>
           </a:p>
           <a:p>
-            <a:pPr indent="0" marL="0">
+            <a:pPr marL="0" indent="0">
               <a:buNone/>
             </a:pPr>
             <a:r>
@@ -19393,7 +19137,7 @@
           <a:bodyPr wrap="square" lIns="0" tIns="0" rIns="0" bIns="0" rtlCol="0" anchor="ctr"/>
           <a:lstStyle/>
           <a:p>
-            <a:pPr indent="0" marL="0">
+            <a:pPr marL="0" indent="0">
               <a:buNone/>
             </a:pPr>
             <a:r>
@@ -19432,7 +19176,7 @@
           <a:bodyPr wrap="square" lIns="0" tIns="0" rIns="0" bIns="0" rtlCol="0" anchor="ctr"/>
           <a:lstStyle/>
           <a:p>
-            <a:pPr indent="0" marL="0">
+            <a:pPr marL="0" indent="0">
               <a:buNone/>
             </a:pPr>
             <a:r>
@@ -19471,7 +19215,7 @@
           <a:bodyPr wrap="square" lIns="0" tIns="0" rIns="0" bIns="0" rtlCol="0" anchor="ctr"/>
           <a:lstStyle/>
           <a:p>
-            <a:pPr indent="0" marL="0">
+            <a:pPr marL="0" indent="0">
               <a:buNone/>
             </a:pPr>
             <a:r>
@@ -19510,7 +19254,7 @@
           <a:bodyPr wrap="square" lIns="0" tIns="0" rIns="0" bIns="0" rtlCol="0" anchor="ctr"/>
           <a:lstStyle/>
           <a:p>
-            <a:pPr indent="0" marL="0">
+            <a:pPr marL="0" indent="0">
               <a:buNone/>
             </a:pPr>
             <a:r>
@@ -19549,7 +19293,7 @@
           <a:bodyPr wrap="square" lIns="0" tIns="0" rIns="0" bIns="0" rtlCol="0" anchor="ctr"/>
           <a:lstStyle/>
           <a:p>
-            <a:pPr indent="0" marL="0">
+            <a:pPr marL="0" indent="0">
               <a:buNone/>
             </a:pPr>
             <a:r>
@@ -19613,7 +19357,7 @@
           <a:bodyPr wrap="square" lIns="0" tIns="0" rIns="0" bIns="0" rtlCol="0" anchor="ctr"/>
           <a:lstStyle/>
           <a:p>
-            <a:pPr algn="ctr" indent="0" marL="0">
+            <a:pPr marL="0" indent="0" algn="ctr">
               <a:buNone/>
             </a:pPr>
             <a:r>
@@ -19677,7 +19421,7 @@
           <a:bodyPr wrap="square" lIns="0" tIns="0" rIns="0" bIns="0" rtlCol="0" anchor="ctr"/>
           <a:lstStyle/>
           <a:p>
-            <a:pPr indent="0" marL="0">
+            <a:pPr marL="0" indent="0">
               <a:buNone/>
             </a:pPr>
             <a:r>
@@ -19741,7 +19485,7 @@
           <a:bodyPr wrap="square" lIns="0" tIns="0" rIns="0" bIns="0" rtlCol="0" anchor="ctr"/>
           <a:lstStyle/>
           <a:p>
-            <a:pPr indent="0" marL="0">
+            <a:pPr marL="0" indent="0">
               <a:buNone/>
             </a:pPr>
             <a:r>
@@ -19805,7 +19549,7 @@
           <a:bodyPr wrap="square" lIns="0" tIns="0" rIns="0" bIns="0" rtlCol="0" anchor="ctr"/>
           <a:lstStyle/>
           <a:p>
-            <a:pPr indent="0" marL="0">
+            <a:pPr marL="0" indent="0">
               <a:buNone/>
             </a:pPr>
             <a:r>
@@ -19869,7 +19613,7 @@
           <a:bodyPr wrap="square" lIns="0" tIns="0" rIns="0" bIns="0" rtlCol="0" anchor="ctr"/>
           <a:lstStyle/>
           <a:p>
-            <a:pPr indent="0" marL="0">
+            <a:pPr marL="0" indent="0">
               <a:buNone/>
             </a:pPr>
             <a:r>
@@ -19933,7 +19677,7 @@
           <a:bodyPr wrap="square" lIns="0" tIns="0" rIns="0" bIns="0" rtlCol="0" anchor="ctr"/>
           <a:lstStyle/>
           <a:p>
-            <a:pPr indent="0" marL="0">
+            <a:pPr marL="0" indent="0">
               <a:buNone/>
             </a:pPr>
             <a:r>
@@ -19997,7 +19741,7 @@
           <a:bodyPr wrap="square" lIns="0" tIns="0" rIns="0" bIns="0" rtlCol="0" anchor="ctr"/>
           <a:lstStyle/>
           <a:p>
-            <a:pPr indent="0" marL="0">
+            <a:pPr marL="0" indent="0">
               <a:buNone/>
             </a:pPr>
             <a:r>
@@ -20061,7 +19805,7 @@
           <a:bodyPr wrap="square" lIns="0" tIns="0" rIns="0" bIns="0" rtlCol="0" anchor="ctr"/>
           <a:lstStyle/>
           <a:p>
-            <a:pPr indent="0" marL="0">
+            <a:pPr marL="0" indent="0">
               <a:buNone/>
             </a:pPr>
             <a:r>
@@ -20125,7 +19869,7 @@
           <a:bodyPr wrap="square" lIns="0" tIns="0" rIns="0" bIns="0" rtlCol="0" anchor="ctr"/>
           <a:lstStyle/>
           <a:p>
-            <a:pPr indent="0" marL="0">
+            <a:pPr marL="0" indent="0">
               <a:buNone/>
             </a:pPr>
             <a:r>
@@ -20189,7 +19933,7 @@
           <a:bodyPr wrap="square" lIns="0" tIns="0" rIns="0" bIns="0" rtlCol="0" anchor="ctr"/>
           <a:lstStyle/>
           <a:p>
-            <a:pPr indent="0" marL="0">
+            <a:pPr marL="0" indent="0">
               <a:buNone/>
             </a:pPr>
             <a:r>
@@ -20253,7 +19997,7 @@
           <a:bodyPr wrap="square" lIns="0" tIns="0" rIns="0" bIns="0" rtlCol="0" anchor="ctr"/>
           <a:lstStyle/>
           <a:p>
-            <a:pPr indent="0" marL="0">
+            <a:pPr marL="0" indent="0">
               <a:buNone/>
             </a:pPr>
             <a:r>
@@ -20317,7 +20061,7 @@
           <a:bodyPr wrap="square" lIns="0" tIns="0" rIns="0" bIns="0" rtlCol="0" anchor="ctr"/>
           <a:lstStyle/>
           <a:p>
-            <a:pPr indent="0" marL="0">
+            <a:pPr marL="0" indent="0">
               <a:buNone/>
             </a:pPr>
             <a:r>
@@ -20381,7 +20125,7 @@
           <a:bodyPr wrap="square" lIns="0" tIns="0" rIns="0" bIns="0" rtlCol="0" anchor="ctr"/>
           <a:lstStyle/>
           <a:p>
-            <a:pPr indent="0" marL="0">
+            <a:pPr marL="0" indent="0">
               <a:buNone/>
             </a:pPr>
             <a:r>
@@ -20445,7 +20189,7 @@
           <a:bodyPr wrap="square" lIns="0" tIns="0" rIns="0" bIns="0" rtlCol="0" anchor="ctr"/>
           <a:lstStyle/>
           <a:p>
-            <a:pPr indent="0" marL="0">
+            <a:pPr marL="0" indent="0">
               <a:buNone/>
             </a:pPr>
             <a:r>
@@ -20509,7 +20253,7 @@
           <a:bodyPr wrap="square" lIns="0" tIns="0" rIns="0" bIns="0" rtlCol="0" anchor="ctr"/>
           <a:lstStyle/>
           <a:p>
-            <a:pPr indent="0" marL="0">
+            <a:pPr marL="0" indent="0">
               <a:buNone/>
             </a:pPr>
             <a:r>
@@ -20573,7 +20317,7 @@
           <a:bodyPr wrap="square" lIns="0" tIns="0" rIns="0" bIns="0" rtlCol="0" anchor="ctr"/>
           <a:lstStyle/>
           <a:p>
-            <a:pPr indent="0" marL="0">
+            <a:pPr marL="0" indent="0">
               <a:buNone/>
             </a:pPr>
             <a:r>
@@ -20637,7 +20381,7 @@
           <a:bodyPr wrap="square" lIns="0" tIns="0" rIns="0" bIns="0" rtlCol="0" anchor="ctr"/>
           <a:lstStyle/>
           <a:p>
-            <a:pPr indent="0" marL="0">
+            <a:pPr marL="0" indent="0">
               <a:buNone/>
             </a:pPr>
             <a:r>
@@ -20701,7 +20445,7 @@
           <a:bodyPr wrap="square" lIns="0" tIns="0" rIns="0" bIns="0" rtlCol="0" anchor="ctr"/>
           <a:lstStyle/>
           <a:p>
-            <a:pPr indent="0" marL="0">
+            <a:pPr marL="0" indent="0">
               <a:buNone/>
             </a:pPr>
             <a:r>
@@ -20765,7 +20509,7 @@
           <a:bodyPr wrap="square" lIns="0" tIns="0" rIns="0" bIns="0" rtlCol="0" anchor="ctr"/>
           <a:lstStyle/>
           <a:p>
-            <a:pPr indent="0" marL="0">
+            <a:pPr marL="0" indent="0">
               <a:buNone/>
             </a:pPr>
             <a:r>
@@ -20829,7 +20573,7 @@
           <a:bodyPr wrap="square" lIns="0" tIns="0" rIns="0" bIns="0" rtlCol="0" anchor="ctr"/>
           <a:lstStyle/>
           <a:p>
-            <a:pPr indent="0" marL="0">
+            <a:pPr marL="0" indent="0">
               <a:buNone/>
             </a:pPr>
             <a:r>
@@ -20893,7 +20637,7 @@
           <a:bodyPr wrap="square" lIns="0" tIns="0" rIns="0" bIns="0" rtlCol="0" anchor="ctr"/>
           <a:lstStyle/>
           <a:p>
-            <a:pPr indent="0" marL="0">
+            <a:pPr marL="0" indent="0">
               <a:buNone/>
             </a:pPr>
             <a:r>
@@ -20957,7 +20701,7 @@
           <a:bodyPr wrap="square" lIns="0" tIns="0" rIns="0" bIns="0" rtlCol="0" anchor="ctr"/>
           <a:lstStyle/>
           <a:p>
-            <a:pPr indent="0" marL="0">
+            <a:pPr marL="0" indent="0">
               <a:buNone/>
             </a:pPr>
             <a:r>
@@ -21021,7 +20765,7 @@
           <a:bodyPr wrap="square" lIns="0" tIns="0" rIns="0" bIns="0" rtlCol="0" anchor="ctr"/>
           <a:lstStyle/>
           <a:p>
-            <a:pPr indent="0" marL="0">
+            <a:pPr marL="0" indent="0">
               <a:buNone/>
             </a:pPr>
             <a:r>
@@ -21085,7 +20829,7 @@
           <a:bodyPr wrap="square" lIns="0" tIns="0" rIns="0" bIns="0" rtlCol="0" anchor="ctr"/>
           <a:lstStyle/>
           <a:p>
-            <a:pPr indent="0" marL="0">
+            <a:pPr marL="0" indent="0">
               <a:buNone/>
             </a:pPr>
             <a:r>
@@ -21149,7 +20893,7 @@
           <a:bodyPr wrap="square" lIns="0" tIns="0" rIns="0" bIns="0" rtlCol="0" anchor="ctr"/>
           <a:lstStyle/>
           <a:p>
-            <a:pPr indent="0" marL="0">
+            <a:pPr marL="0" indent="0">
               <a:buNone/>
             </a:pPr>
             <a:r>
@@ -21213,7 +20957,7 @@
           <a:bodyPr wrap="square" lIns="0" tIns="0" rIns="0" bIns="0" rtlCol="0" anchor="ctr"/>
           <a:lstStyle/>
           <a:p>
-            <a:pPr indent="0" marL="0">
+            <a:pPr marL="0" indent="0">
               <a:buNone/>
             </a:pPr>
             <a:r>
@@ -21277,7 +21021,7 @@
           <a:bodyPr wrap="square" lIns="0" tIns="0" rIns="0" bIns="0" rtlCol="0" anchor="ctr"/>
           <a:lstStyle/>
           <a:p>
-            <a:pPr algn="ctr" indent="0" marL="0">
+            <a:pPr marL="0" indent="0" algn="ctr">
               <a:buNone/>
             </a:pPr>
             <a:r>
@@ -21311,6 +21055,7 @@
         <a:solidFill>
           <a:srgbClr val="0A1628"/>
         </a:solidFill>
+        <a:effectLst/>
       </p:bgPr>
     </p:bg>
     <p:spTree>
@@ -21398,7 +21143,7 @@
           <a:bodyPr wrap="square" lIns="0" tIns="0" rIns="0" bIns="0" rtlCol="0" anchor="ctr"/>
           <a:lstStyle/>
           <a:p>
-            <a:pPr indent="0" marL="0">
+            <a:pPr marL="0" indent="0">
               <a:buNone/>
             </a:pPr>
             <a:r>
@@ -21462,7 +21207,7 @@
           <a:bodyPr wrap="square" lIns="0" tIns="0" rIns="0" bIns="0" rtlCol="0" anchor="ctr"/>
           <a:lstStyle/>
           <a:p>
-            <a:pPr indent="0" marL="0">
+            <a:pPr marL="0" indent="0">
               <a:buNone/>
             </a:pPr>
             <a:r>
@@ -21501,7 +21246,7 @@
           <a:bodyPr wrap="square" lIns="0" tIns="0" rIns="0" bIns="0" rtlCol="0" anchor="ctr"/>
           <a:lstStyle/>
           <a:p>
-            <a:pPr indent="0" marL="0">
+            <a:pPr marL="0" indent="0">
               <a:buNone/>
             </a:pPr>
             <a:r>
@@ -21518,7 +21263,7 @@
             <a:endParaRPr lang="en-US" sz="1000" dirty="0"/>
           </a:p>
           <a:p>
-            <a:pPr indent="0" marL="0">
+            <a:pPr marL="0" indent="0">
               <a:buNone/>
             </a:pPr>
             <a:r>
@@ -21607,7 +21352,7 @@
           <a:bodyPr wrap="square" lIns="0" tIns="0" rIns="0" bIns="0" rtlCol="0" anchor="ctr"/>
           <a:lstStyle/>
           <a:p>
-            <a:pPr indent="0" marL="0">
+            <a:pPr marL="0" indent="0">
               <a:buNone/>
             </a:pPr>
             <a:r>
@@ -21646,7 +21391,7 @@
           <a:bodyPr wrap="square" lIns="0" tIns="0" rIns="0" bIns="0" rtlCol="0" anchor="ctr"/>
           <a:lstStyle/>
           <a:p>
-            <a:pPr indent="0" marL="0">
+            <a:pPr marL="0" indent="0">
               <a:buNone/>
             </a:pPr>
             <a:r>
@@ -21663,7 +21408,7 @@
             <a:endParaRPr lang="en-US" sz="1000" dirty="0"/>
           </a:p>
           <a:p>
-            <a:pPr indent="0" marL="0">
+            <a:pPr marL="0" indent="0">
               <a:buNone/>
             </a:pPr>
             <a:r>
@@ -21752,7 +21497,7 @@
           <a:bodyPr wrap="square" lIns="0" tIns="0" rIns="0" bIns="0" rtlCol="0" anchor="ctr"/>
           <a:lstStyle/>
           <a:p>
-            <a:pPr indent="0" marL="0">
+            <a:pPr marL="0" indent="0">
               <a:buNone/>
             </a:pPr>
             <a:r>
@@ -21791,7 +21536,7 @@
           <a:bodyPr wrap="square" lIns="0" tIns="0" rIns="0" bIns="0" rtlCol="0" anchor="ctr"/>
           <a:lstStyle/>
           <a:p>
-            <a:pPr indent="0" marL="0">
+            <a:pPr marL="0" indent="0">
               <a:buNone/>
             </a:pPr>
             <a:r>
@@ -21808,7 +21553,7 @@
             <a:endParaRPr lang="en-US" sz="1000" dirty="0"/>
           </a:p>
           <a:p>
-            <a:pPr indent="0" marL="0">
+            <a:pPr marL="0" indent="0">
               <a:buNone/>
             </a:pPr>
             <a:r>
@@ -21897,7 +21642,7 @@
           <a:bodyPr wrap="square" lIns="0" tIns="0" rIns="0" bIns="0" rtlCol="0" anchor="ctr"/>
           <a:lstStyle/>
           <a:p>
-            <a:pPr indent="0" marL="0">
+            <a:pPr marL="0" indent="0">
               <a:buNone/>
             </a:pPr>
             <a:r>
@@ -21936,7 +21681,7 @@
           <a:bodyPr wrap="square" lIns="0" tIns="0" rIns="0" bIns="0" rtlCol="0" anchor="ctr"/>
           <a:lstStyle/>
           <a:p>
-            <a:pPr indent="0" marL="0">
+            <a:pPr marL="0" indent="0">
               <a:buNone/>
             </a:pPr>
             <a:r>
@@ -21953,7 +21698,7 @@
             <a:endParaRPr lang="en-US" sz="1000" dirty="0"/>
           </a:p>
           <a:p>
-            <a:pPr indent="0" marL="0">
+            <a:pPr marL="0" indent="0">
               <a:buNone/>
             </a:pPr>
             <a:r>
@@ -21992,7 +21737,7 @@
           <a:bodyPr wrap="square" lIns="0" tIns="0" rIns="0" bIns="0" rtlCol="0" anchor="ctr"/>
           <a:lstStyle/>
           <a:p>
-            <a:pPr algn="ctr" indent="0" marL="0">
+            <a:pPr marL="0" indent="0" algn="ctr">
               <a:buNone/>
             </a:pPr>
             <a:r>
@@ -22009,7 +21754,7 @@
             <a:endParaRPr lang="en-US" sz="850" dirty="0"/>
           </a:p>
           <a:p>
-            <a:pPr algn="ctr" indent="0" marL="0">
+            <a:pPr marL="0" indent="0" algn="ctr">
               <a:buNone/>
             </a:pPr>
             <a:r>
@@ -22048,7 +21793,7 @@
           <a:bodyPr wrap="square" lIns="0" tIns="0" rIns="0" bIns="0" rtlCol="0" anchor="ctr"/>
           <a:lstStyle/>
           <a:p>
-            <a:pPr algn="ctr" indent="0" marL="0">
+            <a:pPr marL="0" indent="0" algn="ctr">
               <a:buNone/>
             </a:pPr>
             <a:r>
@@ -22065,7 +21810,7 @@
             <a:endParaRPr lang="en-US" sz="850" dirty="0"/>
           </a:p>
           <a:p>
-            <a:pPr algn="ctr" indent="0" marL="0">
+            <a:pPr marL="0" indent="0" algn="ctr">
               <a:buNone/>
             </a:pPr>
             <a:r>
@@ -22104,7 +21849,7 @@
           <a:bodyPr wrap="square" lIns="0" tIns="0" rIns="0" bIns="0" rtlCol="0" anchor="ctr"/>
           <a:lstStyle/>
           <a:p>
-            <a:pPr algn="ctr" indent="0" marL="0">
+            <a:pPr marL="0" indent="0" algn="ctr">
               <a:buNone/>
             </a:pPr>
             <a:r>
@@ -22121,7 +21866,7 @@
             <a:endParaRPr lang="en-US" sz="850" dirty="0"/>
           </a:p>
           <a:p>
-            <a:pPr algn="ctr" indent="0" marL="0">
+            <a:pPr marL="0" indent="0" algn="ctr">
               <a:buNone/>
             </a:pPr>
             <a:r>
@@ -22160,7 +21905,7 @@
           <a:bodyPr wrap="square" lIns="0" tIns="0" rIns="0" bIns="0" rtlCol="0" anchor="ctr"/>
           <a:lstStyle/>
           <a:p>
-            <a:pPr indent="0" marL="0">
+            <a:pPr marL="0" indent="0">
               <a:buNone/>
             </a:pPr>
             <a:r>
@@ -22224,7 +21969,7 @@
           <a:bodyPr wrap="square" lIns="0" tIns="0" rIns="0" bIns="0" rtlCol="0" anchor="ctr"/>
           <a:lstStyle/>
           <a:p>
-            <a:pPr indent="0" marL="0">
+            <a:pPr marL="0" indent="0">
               <a:buNone/>
             </a:pPr>
             <a:r>
@@ -22263,7 +22008,7 @@
           <a:bodyPr wrap="square" lIns="0" tIns="0" rIns="0" bIns="0" rtlCol="0" anchor="ctr"/>
           <a:lstStyle/>
           <a:p>
-            <a:pPr indent="0" marL="0">
+            <a:pPr marL="0" indent="0">
               <a:buNone/>
             </a:pPr>
             <a:r>
@@ -22280,7 +22025,7 @@
             <a:endParaRPr lang="en-US" sz="1200" dirty="0"/>
           </a:p>
           <a:p>
-            <a:pPr indent="0" marL="0">
+            <a:pPr marL="0" indent="0">
               <a:buNone/>
             </a:pPr>
             <a:r>
@@ -22297,7 +22042,7 @@
             <a:endParaRPr lang="en-US" sz="1200" dirty="0"/>
           </a:p>
           <a:p>
-            <a:pPr indent="0" marL="0">
+            <a:pPr marL="0" indent="0">
               <a:buNone/>
             </a:pPr>
             <a:r>
@@ -22361,7 +22106,7 @@
           <a:bodyPr wrap="square" lIns="0" tIns="0" rIns="0" bIns="0" rtlCol="0" anchor="ctr"/>
           <a:lstStyle/>
           <a:p>
-            <a:pPr algn="ctr" indent="0" marL="0">
+            <a:pPr marL="0" indent="0" algn="ctr">
               <a:buNone/>
             </a:pPr>
             <a:r>
@@ -22425,7 +22170,7 @@
           <a:bodyPr wrap="square" lIns="0" tIns="0" rIns="0" bIns="0" rtlCol="0" anchor="ctr"/>
           <a:lstStyle/>
           <a:p>
-            <a:pPr indent="0" marL="0">
+            <a:pPr marL="0" indent="0">
               <a:buNone/>
             </a:pPr>
             <a:r>
@@ -22464,7 +22209,7 @@
           <a:bodyPr wrap="square" lIns="0" tIns="0" rIns="0" bIns="0" rtlCol="0" anchor="ctr"/>
           <a:lstStyle/>
           <a:p>
-            <a:pPr indent="0" marL="0">
+            <a:pPr marL="0" indent="0">
               <a:buNone/>
             </a:pPr>
             <a:r>
@@ -22481,7 +22226,7 @@
             <a:endParaRPr lang="en-US" sz="1200" dirty="0"/>
           </a:p>
           <a:p>
-            <a:pPr indent="0" marL="0">
+            <a:pPr marL="0" indent="0">
               <a:buNone/>
             </a:pPr>
             <a:r>
@@ -22498,7 +22243,7 @@
             <a:endParaRPr lang="en-US" sz="1200" dirty="0"/>
           </a:p>
           <a:p>
-            <a:pPr indent="0" marL="0">
+            <a:pPr marL="0" indent="0">
               <a:buNone/>
             </a:pPr>
             <a:r>
@@ -22562,7 +22307,7 @@
           <a:bodyPr wrap="square" lIns="0" tIns="0" rIns="0" bIns="0" rtlCol="0" anchor="ctr"/>
           <a:lstStyle/>
           <a:p>
-            <a:pPr algn="ctr" indent="0" marL="0">
+            <a:pPr marL="0" indent="0" algn="ctr">
               <a:buNone/>
             </a:pPr>
             <a:r>
@@ -22626,7 +22371,7 @@
           <a:bodyPr wrap="square" lIns="0" tIns="0" rIns="0" bIns="0" rtlCol="0" anchor="ctr"/>
           <a:lstStyle/>
           <a:p>
-            <a:pPr algn="ctr" indent="0" marL="0">
+            <a:pPr marL="0" indent="0" algn="ctr">
               <a:buNone/>
             </a:pPr>
             <a:r>
@@ -22660,6 +22405,7 @@
         <a:solidFill>
           <a:srgbClr val="F0F6FA"/>
         </a:solidFill>
+        <a:effectLst/>
       </p:bgPr>
     </p:bg>
     <p:spTree>
@@ -22747,7 +22493,7 @@
           <a:bodyPr wrap="square" lIns="0" tIns="0" rIns="0" bIns="0" rtlCol="0" anchor="ctr"/>
           <a:lstStyle/>
           <a:p>
-            <a:pPr indent="0" marL="0">
+            <a:pPr marL="0" indent="0">
               <a:buNone/>
             </a:pPr>
             <a:r>
@@ -22786,7 +22532,7 @@
           <a:bodyPr wrap="square" lIns="0" tIns="0" rIns="0" bIns="0" rtlCol="0" anchor="ctr"/>
           <a:lstStyle/>
           <a:p>
-            <a:pPr indent="0" marL="0">
+            <a:pPr marL="0" indent="0">
               <a:buNone/>
             </a:pPr>
             <a:r>
@@ -22828,7 +22574,7 @@
             <a:prstDash val="solid"/>
           </a:ln>
           <a:effectLst>
-            <a:outerShdw sx="100000" sy="100000" kx="0" ky="0" algn="bl" rotWithShape="0" blurRad="63500" dist="25400" dir="8100000">
+            <a:outerShdw blurRad="63500" dist="25400" dir="8100000" algn="bl" rotWithShape="0">
               <a:srgbClr val="000000">
                 <a:alpha val="12000"/>
               </a:srgbClr>
@@ -22882,7 +22628,7 @@
           <a:bodyPr wrap="square" lIns="0" tIns="0" rIns="0" bIns="0" rtlCol="0" anchor="ctr"/>
           <a:lstStyle/>
           <a:p>
-            <a:pPr indent="0" marL="0">
+            <a:pPr marL="0" indent="0">
               <a:buNone/>
             </a:pPr>
             <a:r>
@@ -22921,7 +22667,7 @@
           <a:bodyPr wrap="square" lIns="0" tIns="0" rIns="0" bIns="0" rtlCol="0" anchor="ctr"/>
           <a:lstStyle/>
           <a:p>
-            <a:pPr indent="0" marL="0">
+            <a:pPr marL="0" indent="0">
               <a:buNone/>
             </a:pPr>
             <a:r>
@@ -22985,7 +22731,7 @@
           <a:bodyPr wrap="square" lIns="0" tIns="0" rIns="0" bIns="0" rtlCol="0" anchor="ctr"/>
           <a:lstStyle/>
           <a:p>
-            <a:pPr algn="ctr" indent="0" marL="0">
+            <a:pPr marL="0" indent="0" algn="ctr">
               <a:buNone/>
             </a:pPr>
             <a:r>
@@ -23049,7 +22795,7 @@
           <a:bodyPr wrap="square" lIns="0" tIns="0" rIns="0" bIns="0" rtlCol="0" anchor="ctr"/>
           <a:lstStyle/>
           <a:p>
-            <a:pPr algn="ctr" indent="0" marL="0">
+            <a:pPr marL="0" indent="0" algn="ctr">
               <a:buNone/>
             </a:pPr>
             <a:r>
@@ -23088,7 +22834,7 @@
           <a:bodyPr wrap="square" lIns="0" tIns="0" rIns="0" bIns="0" rtlCol="0" anchor="ctr"/>
           <a:lstStyle/>
           <a:p>
-            <a:pPr indent="0" marL="0">
+            <a:pPr marL="0" indent="0">
               <a:buNone/>
             </a:pPr>
             <a:r>
@@ -23152,7 +22898,7 @@
           <a:bodyPr wrap="square" lIns="0" tIns="0" rIns="0" bIns="0" rtlCol="0" anchor="ctr"/>
           <a:lstStyle/>
           <a:p>
-            <a:pPr indent="0" marL="0">
+            <a:pPr marL="0" indent="0">
               <a:buNone/>
             </a:pPr>
             <a:r>
@@ -23216,7 +22962,7 @@
           <a:bodyPr wrap="square" lIns="0" tIns="0" rIns="0" bIns="0" rtlCol="0" anchor="ctr"/>
           <a:lstStyle/>
           <a:p>
-            <a:pPr indent="0" marL="0">
+            <a:pPr marL="0" indent="0">
               <a:buNone/>
             </a:pPr>
             <a:r>
@@ -23280,7 +23026,7 @@
           <a:bodyPr wrap="square" lIns="0" tIns="0" rIns="0" bIns="0" rtlCol="0" anchor="ctr"/>
           <a:lstStyle/>
           <a:p>
-            <a:pPr indent="0" marL="0">
+            <a:pPr marL="0" indent="0">
               <a:buNone/>
             </a:pPr>
             <a:r>
@@ -23344,7 +23090,7 @@
           <a:bodyPr wrap="square" lIns="0" tIns="0" rIns="0" bIns="0" rtlCol="0" anchor="ctr"/>
           <a:lstStyle/>
           <a:p>
-            <a:pPr indent="0" marL="0">
+            <a:pPr marL="0" indent="0">
               <a:buNone/>
             </a:pPr>
             <a:r>
@@ -23408,7 +23154,7 @@
           <a:bodyPr wrap="square" lIns="0" tIns="0" rIns="0" bIns="0" rtlCol="0" anchor="ctr"/>
           <a:lstStyle/>
           <a:p>
-            <a:pPr indent="0" marL="0">
+            <a:pPr marL="0" indent="0">
               <a:buNone/>
             </a:pPr>
             <a:r>
@@ -23472,7 +23218,7 @@
           <a:bodyPr wrap="square" lIns="0" tIns="0" rIns="0" bIns="0" rtlCol="0" anchor="ctr"/>
           <a:lstStyle/>
           <a:p>
-            <a:pPr indent="0" marL="0">
+            <a:pPr marL="0" indent="0">
               <a:buNone/>
             </a:pPr>
             <a:r>
@@ -23536,7 +23282,7 @@
           <a:bodyPr wrap="square" lIns="0" tIns="0" rIns="0" bIns="0" rtlCol="0" anchor="ctr"/>
           <a:lstStyle/>
           <a:p>
-            <a:pPr indent="0" marL="0">
+            <a:pPr marL="0" indent="0">
               <a:buNone/>
             </a:pPr>
             <a:r>
@@ -23600,7 +23346,7 @@
           <a:bodyPr wrap="square" lIns="0" tIns="0" rIns="0" bIns="0" rtlCol="0" anchor="ctr"/>
           <a:lstStyle/>
           <a:p>
-            <a:pPr indent="0" marL="0">
+            <a:pPr marL="0" indent="0">
               <a:buNone/>
             </a:pPr>
             <a:r>
@@ -23664,7 +23410,7 @@
           <a:bodyPr wrap="square" lIns="0" tIns="0" rIns="0" bIns="0" rtlCol="0" anchor="ctr"/>
           <a:lstStyle/>
           <a:p>
-            <a:pPr indent="0" marL="0">
+            <a:pPr marL="0" indent="0">
               <a:buNone/>
             </a:pPr>
             <a:r>
@@ -23728,7 +23474,7 @@
           <a:bodyPr wrap="square" lIns="0" tIns="0" rIns="0" bIns="0" rtlCol="0" anchor="ctr"/>
           <a:lstStyle/>
           <a:p>
-            <a:pPr indent="0" marL="0">
+            <a:pPr marL="0" indent="0">
               <a:buNone/>
             </a:pPr>
             <a:r>
@@ -23792,7 +23538,7 @@
           <a:bodyPr wrap="square" lIns="0" tIns="0" rIns="0" bIns="0" rtlCol="0" anchor="ctr"/>
           <a:lstStyle/>
           <a:p>
-            <a:pPr indent="0" marL="0">
+            <a:pPr marL="0" indent="0">
               <a:buNone/>
             </a:pPr>
             <a:r>
@@ -23856,7 +23602,7 @@
           <a:bodyPr wrap="square" lIns="0" tIns="0" rIns="0" bIns="0" rtlCol="0" anchor="ctr"/>
           <a:lstStyle/>
           <a:p>
-            <a:pPr indent="0" marL="0">
+            <a:pPr marL="0" indent="0">
               <a:buNone/>
             </a:pPr>
             <a:r>
@@ -23920,7 +23666,7 @@
           <a:bodyPr wrap="square" lIns="0" tIns="0" rIns="0" bIns="0" rtlCol="0" anchor="ctr"/>
           <a:lstStyle/>
           <a:p>
-            <a:pPr indent="0" marL="0">
+            <a:pPr marL="0" indent="0">
               <a:buNone/>
             </a:pPr>
             <a:r>
@@ -23984,7 +23730,7 @@
           <a:bodyPr wrap="square" lIns="0" tIns="0" rIns="0" bIns="0" rtlCol="0" anchor="ctr"/>
           <a:lstStyle/>
           <a:p>
-            <a:pPr indent="0" marL="0">
+            <a:pPr marL="0" indent="0">
               <a:buNone/>
             </a:pPr>
             <a:r>
@@ -24048,7 +23794,7 @@
           <a:bodyPr wrap="square" lIns="0" tIns="0" rIns="0" bIns="0" rtlCol="0" anchor="ctr"/>
           <a:lstStyle/>
           <a:p>
-            <a:pPr indent="0" marL="0">
+            <a:pPr marL="0" indent="0">
               <a:buNone/>
             </a:pPr>
             <a:r>
@@ -24112,7 +23858,7 @@
           <a:bodyPr wrap="square" lIns="0" tIns="0" rIns="0" bIns="0" rtlCol="0" anchor="ctr"/>
           <a:lstStyle/>
           <a:p>
-            <a:pPr indent="0" marL="0">
+            <a:pPr marL="0" indent="0">
               <a:buNone/>
             </a:pPr>
             <a:r>
@@ -24176,7 +23922,7 @@
           <a:bodyPr wrap="square" lIns="0" tIns="0" rIns="0" bIns="0" rtlCol="0" anchor="ctr"/>
           <a:lstStyle/>
           <a:p>
-            <a:pPr indent="0" marL="0">
+            <a:pPr marL="0" indent="0">
               <a:buNone/>
             </a:pPr>
             <a:r>
@@ -24240,7 +23986,7 @@
           <a:bodyPr wrap="square" lIns="0" tIns="0" rIns="0" bIns="0" rtlCol="0" anchor="ctr"/>
           <a:lstStyle/>
           <a:p>
-            <a:pPr indent="0" marL="0">
+            <a:pPr marL="0" indent="0">
               <a:buNone/>
             </a:pPr>
             <a:r>
@@ -24304,7 +24050,7 @@
           <a:bodyPr wrap="square" lIns="0" tIns="0" rIns="0" bIns="0" rtlCol="0" anchor="ctr"/>
           <a:lstStyle/>
           <a:p>
-            <a:pPr indent="0" marL="0">
+            <a:pPr marL="0" indent="0">
               <a:buNone/>
             </a:pPr>
             <a:r>
@@ -24368,7 +24114,7 @@
           <a:bodyPr wrap="square" lIns="0" tIns="0" rIns="0" bIns="0" rtlCol="0" anchor="ctr"/>
           <a:lstStyle/>
           <a:p>
-            <a:pPr indent="0" marL="0">
+            <a:pPr marL="0" indent="0">
               <a:buNone/>
             </a:pPr>
             <a:r>
@@ -24432,7 +24178,7 @@
           <a:bodyPr wrap="square" lIns="0" tIns="0" rIns="0" bIns="0" rtlCol="0" anchor="ctr"/>
           <a:lstStyle/>
           <a:p>
-            <a:pPr indent="0" marL="0">
+            <a:pPr marL="0" indent="0">
               <a:buNone/>
             </a:pPr>
             <a:r>
@@ -24496,7 +24242,7 @@
           <a:bodyPr wrap="square" lIns="0" tIns="0" rIns="0" bIns="0" rtlCol="0" anchor="ctr"/>
           <a:lstStyle/>
           <a:p>
-            <a:pPr indent="0" marL="0">
+            <a:pPr marL="0" indent="0">
               <a:buNone/>
             </a:pPr>
             <a:r>
@@ -24560,7 +24306,7 @@
           <a:bodyPr wrap="square" lIns="0" tIns="0" rIns="0" bIns="0" rtlCol="0" anchor="ctr"/>
           <a:lstStyle/>
           <a:p>
-            <a:pPr indent="0" marL="0">
+            <a:pPr marL="0" indent="0">
               <a:buNone/>
             </a:pPr>
             <a:r>
@@ -24624,7 +24370,7 @@
           <a:bodyPr wrap="square" lIns="0" tIns="0" rIns="0" bIns="0" rtlCol="0" anchor="ctr"/>
           <a:lstStyle/>
           <a:p>
-            <a:pPr indent="0" marL="0">
+            <a:pPr marL="0" indent="0">
               <a:buNone/>
             </a:pPr>
             <a:r>
@@ -24688,7 +24434,7 @@
           <a:bodyPr wrap="square" lIns="0" tIns="0" rIns="0" bIns="0" rtlCol="0" anchor="ctr"/>
           <a:lstStyle/>
           <a:p>
-            <a:pPr indent="0" marL="0">
+            <a:pPr marL="0" indent="0">
               <a:buNone/>
             </a:pPr>
             <a:r>
@@ -24752,7 +24498,7 @@
           <a:bodyPr wrap="square" lIns="0" tIns="0" rIns="0" bIns="0" rtlCol="0" anchor="ctr"/>
           <a:lstStyle/>
           <a:p>
-            <a:pPr indent="0" marL="0">
+            <a:pPr marL="0" indent="0">
               <a:buNone/>
             </a:pPr>
             <a:r>
@@ -24816,7 +24562,7 @@
           <a:bodyPr wrap="square" lIns="0" tIns="0" rIns="0" bIns="0" rtlCol="0" anchor="ctr"/>
           <a:lstStyle/>
           <a:p>
-            <a:pPr indent="0" marL="0">
+            <a:pPr marL="0" indent="0">
               <a:buNone/>
             </a:pPr>
             <a:r>
@@ -24880,7 +24626,7 @@
           <a:bodyPr wrap="square" lIns="0" tIns="0" rIns="0" bIns="0" rtlCol="0" anchor="ctr"/>
           <a:lstStyle/>
           <a:p>
-            <a:pPr indent="0" marL="0">
+            <a:pPr marL="0" indent="0">
               <a:buNone/>
             </a:pPr>
             <a:r>
@@ -24944,7 +24690,7 @@
           <a:bodyPr wrap="square" lIns="0" tIns="0" rIns="0" bIns="0" rtlCol="0" anchor="ctr"/>
           <a:lstStyle/>
           <a:p>
-            <a:pPr indent="0" marL="0">
+            <a:pPr marL="0" indent="0">
               <a:buNone/>
             </a:pPr>
             <a:r>
@@ -25008,7 +24754,7 @@
           <a:bodyPr wrap="square" lIns="0" tIns="0" rIns="0" bIns="0" rtlCol="0" anchor="ctr"/>
           <a:lstStyle/>
           <a:p>
-            <a:pPr indent="0" marL="0">
+            <a:pPr marL="0" indent="0">
               <a:buNone/>
             </a:pPr>
             <a:r>
@@ -25072,7 +24818,7 @@
           <a:bodyPr wrap="square" lIns="0" tIns="0" rIns="0" bIns="0" rtlCol="0" anchor="ctr"/>
           <a:lstStyle/>
           <a:p>
-            <a:pPr indent="0" marL="0">
+            <a:pPr marL="0" indent="0">
               <a:buNone/>
             </a:pPr>
             <a:r>
@@ -25136,7 +24882,7 @@
           <a:bodyPr wrap="square" lIns="0" tIns="0" rIns="0" bIns="0" rtlCol="0" anchor="ctr"/>
           <a:lstStyle/>
           <a:p>
-            <a:pPr indent="0" marL="0">
+            <a:pPr marL="0" indent="0">
               <a:buNone/>
             </a:pPr>
             <a:r>
@@ -25200,7 +24946,7 @@
           <a:bodyPr wrap="square" lIns="0" tIns="0" rIns="0" bIns="0" rtlCol="0" anchor="ctr"/>
           <a:lstStyle/>
           <a:p>
-            <a:pPr indent="0" marL="0">
+            <a:pPr marL="0" indent="0">
               <a:buNone/>
             </a:pPr>
             <a:r>
@@ -25264,7 +25010,7 @@
           <a:bodyPr wrap="square" lIns="0" tIns="0" rIns="0" bIns="0" rtlCol="0" anchor="ctr"/>
           <a:lstStyle/>
           <a:p>
-            <a:pPr indent="0" marL="0">
+            <a:pPr marL="0" indent="0">
               <a:buNone/>
             </a:pPr>
             <a:r>
@@ -25328,7 +25074,7 @@
           <a:bodyPr wrap="square" lIns="0" tIns="0" rIns="0" bIns="0" rtlCol="0" anchor="ctr"/>
           <a:lstStyle/>
           <a:p>
-            <a:pPr indent="0" marL="0">
+            <a:pPr marL="0" indent="0">
               <a:buNone/>
             </a:pPr>
             <a:r>
@@ -25392,7 +25138,7 @@
           <a:bodyPr wrap="square" lIns="0" tIns="0" rIns="0" bIns="0" rtlCol="0" anchor="ctr"/>
           <a:lstStyle/>
           <a:p>
-            <a:pPr indent="0" marL="0">
+            <a:pPr marL="0" indent="0">
               <a:buNone/>
             </a:pPr>
             <a:r>
@@ -25431,7 +25177,7 @@
           <a:bodyPr wrap="square" lIns="0" tIns="0" rIns="0" bIns="0" rtlCol="0" anchor="ctr"/>
           <a:lstStyle/>
           <a:p>
-            <a:pPr indent="0" marL="0">
+            <a:pPr marL="0" indent="0">
               <a:buNone/>
             </a:pPr>
             <a:r>
@@ -25465,6 +25211,7 @@
         <a:solidFill>
           <a:srgbClr val="F0F6FA"/>
         </a:solidFill>
+        <a:effectLst/>
       </p:bgPr>
     </p:bg>
     <p:spTree>
@@ -25552,7 +25299,7 @@
           <a:bodyPr wrap="square" lIns="0" tIns="0" rIns="0" bIns="0" rtlCol="0" anchor="ctr"/>
           <a:lstStyle/>
           <a:p>
-            <a:pPr indent="0" marL="0">
+            <a:pPr marL="0" indent="0">
               <a:buNone/>
             </a:pPr>
             <a:r>
@@ -25591,7 +25338,7 @@
           <a:bodyPr wrap="square" lIns="0" tIns="0" rIns="0" bIns="0" rtlCol="0" anchor="ctr"/>
           <a:lstStyle/>
           <a:p>
-            <a:pPr indent="0" marL="0">
+            <a:pPr marL="0" indent="0">
               <a:buNone/>
             </a:pPr>
             <a:r>
@@ -25655,7 +25402,7 @@
           <a:bodyPr wrap="square" lIns="0" tIns="0" rIns="0" bIns="0" rtlCol="0" anchor="ctr"/>
           <a:lstStyle/>
           <a:p>
-            <a:pPr indent="0" marL="0">
+            <a:pPr marL="0" indent="0">
               <a:buNone/>
             </a:pPr>
             <a:r>
@@ -25719,7 +25466,7 @@
           <a:bodyPr wrap="square" lIns="0" tIns="0" rIns="0" bIns="0" rtlCol="0" anchor="ctr"/>
           <a:lstStyle/>
           <a:p>
-            <a:pPr indent="0" marL="0">
+            <a:pPr marL="0" indent="0">
               <a:buNone/>
             </a:pPr>
             <a:r>
@@ -25783,7 +25530,7 @@
           <a:bodyPr wrap="square" lIns="0" tIns="0" rIns="0" bIns="0" rtlCol="0" anchor="ctr"/>
           <a:lstStyle/>
           <a:p>
-            <a:pPr indent="0" marL="0">
+            <a:pPr marL="0" indent="0">
               <a:buNone/>
             </a:pPr>
             <a:r>
@@ -25847,7 +25594,7 @@
           <a:bodyPr wrap="square" lIns="0" tIns="0" rIns="0" bIns="0" rtlCol="0" anchor="ctr"/>
           <a:lstStyle/>
           <a:p>
-            <a:pPr indent="0" marL="0">
+            <a:pPr marL="0" indent="0">
               <a:buNone/>
             </a:pPr>
             <a:r>
@@ -25911,7 +25658,7 @@
           <a:bodyPr wrap="square" lIns="0" tIns="0" rIns="0" bIns="0" rtlCol="0" anchor="ctr"/>
           <a:lstStyle/>
           <a:p>
-            <a:pPr indent="0" marL="0">
+            <a:pPr marL="0" indent="0">
               <a:buNone/>
             </a:pPr>
             <a:r>
@@ -25975,7 +25722,7 @@
           <a:bodyPr wrap="square" lIns="0" tIns="0" rIns="0" bIns="0" rtlCol="0" anchor="ctr"/>
           <a:lstStyle/>
           <a:p>
-            <a:pPr indent="0" marL="0">
+            <a:pPr marL="0" indent="0">
               <a:buNone/>
             </a:pPr>
             <a:r>
@@ -26039,7 +25786,7 @@
           <a:bodyPr wrap="square" lIns="0" tIns="0" rIns="0" bIns="0" rtlCol="0" anchor="ctr"/>
           <a:lstStyle/>
           <a:p>
-            <a:pPr indent="0" marL="0">
+            <a:pPr marL="0" indent="0">
               <a:buNone/>
             </a:pPr>
             <a:r>
@@ -26103,7 +25850,7 @@
           <a:bodyPr wrap="square" lIns="0" tIns="0" rIns="0" bIns="0" rtlCol="0" anchor="ctr"/>
           <a:lstStyle/>
           <a:p>
-            <a:pPr indent="0" marL="0">
+            <a:pPr marL="0" indent="0">
               <a:buNone/>
             </a:pPr>
             <a:r>
@@ -26167,7 +25914,7 @@
           <a:bodyPr wrap="square" lIns="0" tIns="0" rIns="0" bIns="0" rtlCol="0" anchor="ctr"/>
           <a:lstStyle/>
           <a:p>
-            <a:pPr indent="0" marL="0">
+            <a:pPr marL="0" indent="0">
               <a:buNone/>
             </a:pPr>
             <a:r>
@@ -26231,7 +25978,7 @@
           <a:bodyPr wrap="square" lIns="0" tIns="0" rIns="0" bIns="0" rtlCol="0" anchor="ctr"/>
           <a:lstStyle/>
           <a:p>
-            <a:pPr indent="0" marL="0">
+            <a:pPr marL="0" indent="0">
               <a:buNone/>
             </a:pPr>
             <a:r>
@@ -26295,7 +26042,7 @@
           <a:bodyPr wrap="square" lIns="0" tIns="0" rIns="0" bIns="0" rtlCol="0" anchor="ctr"/>
           <a:lstStyle/>
           <a:p>
-            <a:pPr indent="0" marL="0">
+            <a:pPr marL="0" indent="0">
               <a:buNone/>
             </a:pPr>
             <a:r>
@@ -26359,7 +26106,7 @@
           <a:bodyPr wrap="square" lIns="0" tIns="0" rIns="0" bIns="0" rtlCol="0" anchor="ctr"/>
           <a:lstStyle/>
           <a:p>
-            <a:pPr indent="0" marL="0">
+            <a:pPr marL="0" indent="0">
               <a:buNone/>
             </a:pPr>
             <a:r>
@@ -26423,7 +26170,7 @@
           <a:bodyPr wrap="square" lIns="0" tIns="0" rIns="0" bIns="0" rtlCol="0" anchor="ctr"/>
           <a:lstStyle/>
           <a:p>
-            <a:pPr indent="0" marL="0">
+            <a:pPr marL="0" indent="0">
               <a:buNone/>
             </a:pPr>
             <a:r>
@@ -26487,7 +26234,7 @@
           <a:bodyPr wrap="square" lIns="0" tIns="0" rIns="0" bIns="0" rtlCol="0" anchor="ctr"/>
           <a:lstStyle/>
           <a:p>
-            <a:pPr indent="0" marL="0">
+            <a:pPr marL="0" indent="0">
               <a:buNone/>
             </a:pPr>
             <a:r>
@@ -26551,7 +26298,7 @@
           <a:bodyPr wrap="square" lIns="0" tIns="0" rIns="0" bIns="0" rtlCol="0" anchor="ctr"/>
           <a:lstStyle/>
           <a:p>
-            <a:pPr indent="0" marL="0">
+            <a:pPr marL="0" indent="0">
               <a:buNone/>
             </a:pPr>
             <a:r>
@@ -26615,7 +26362,7 @@
           <a:bodyPr wrap="square" lIns="0" tIns="0" rIns="0" bIns="0" rtlCol="0" anchor="ctr"/>
           <a:lstStyle/>
           <a:p>
-            <a:pPr indent="0" marL="0">
+            <a:pPr marL="0" indent="0">
               <a:buNone/>
             </a:pPr>
             <a:r>
@@ -26679,7 +26426,7 @@
           <a:bodyPr wrap="square" lIns="0" tIns="0" rIns="0" bIns="0" rtlCol="0" anchor="ctr"/>
           <a:lstStyle/>
           <a:p>
-            <a:pPr indent="0" marL="0">
+            <a:pPr marL="0" indent="0">
               <a:buNone/>
             </a:pPr>
             <a:r>
@@ -26743,7 +26490,7 @@
           <a:bodyPr wrap="square" lIns="0" tIns="0" rIns="0" bIns="0" rtlCol="0" anchor="ctr"/>
           <a:lstStyle/>
           <a:p>
-            <a:pPr indent="0" marL="0">
+            <a:pPr marL="0" indent="0">
               <a:buNone/>
             </a:pPr>
             <a:r>
@@ -26807,7 +26554,7 @@
           <a:bodyPr wrap="square" lIns="0" tIns="0" rIns="0" bIns="0" rtlCol="0" anchor="ctr"/>
           <a:lstStyle/>
           <a:p>
-            <a:pPr indent="0" marL="0">
+            <a:pPr marL="0" indent="0">
               <a:buNone/>
             </a:pPr>
             <a:r>
@@ -26871,7 +26618,7 @@
           <a:bodyPr wrap="square" lIns="0" tIns="0" rIns="0" bIns="0" rtlCol="0" anchor="ctr"/>
           <a:lstStyle/>
           <a:p>
-            <a:pPr indent="0" marL="0">
+            <a:pPr marL="0" indent="0">
               <a:buNone/>
             </a:pPr>
             <a:r>
@@ -26935,7 +26682,7 @@
           <a:bodyPr wrap="square" lIns="0" tIns="0" rIns="0" bIns="0" rtlCol="0" anchor="ctr"/>
           <a:lstStyle/>
           <a:p>
-            <a:pPr indent="0" marL="0">
+            <a:pPr marL="0" indent="0">
               <a:buNone/>
             </a:pPr>
             <a:r>
@@ -26999,7 +26746,7 @@
           <a:bodyPr wrap="square" lIns="0" tIns="0" rIns="0" bIns="0" rtlCol="0" anchor="ctr"/>
           <a:lstStyle/>
           <a:p>
-            <a:pPr indent="0" marL="0">
+            <a:pPr marL="0" indent="0">
               <a:buNone/>
             </a:pPr>
             <a:r>
@@ -27063,7 +26810,7 @@
           <a:bodyPr wrap="square" lIns="0" tIns="0" rIns="0" bIns="0" rtlCol="0" anchor="ctr"/>
           <a:lstStyle/>
           <a:p>
-            <a:pPr indent="0" marL="0">
+            <a:pPr marL="0" indent="0">
               <a:buNone/>
             </a:pPr>
             <a:r>
@@ -27127,7 +26874,7 @@
           <a:bodyPr wrap="square" lIns="0" tIns="0" rIns="0" bIns="0" rtlCol="0" anchor="ctr"/>
           <a:lstStyle/>
           <a:p>
-            <a:pPr indent="0" marL="0">
+            <a:pPr marL="0" indent="0">
               <a:buNone/>
             </a:pPr>
             <a:r>
@@ -27191,7 +26938,7 @@
           <a:bodyPr wrap="square" lIns="0" tIns="0" rIns="0" bIns="0" rtlCol="0" anchor="ctr"/>
           <a:lstStyle/>
           <a:p>
-            <a:pPr indent="0" marL="0">
+            <a:pPr marL="0" indent="0">
               <a:buNone/>
             </a:pPr>
             <a:r>
@@ -27255,7 +27002,7 @@
           <a:bodyPr wrap="square" lIns="0" tIns="0" rIns="0" bIns="0" rtlCol="0" anchor="ctr"/>
           <a:lstStyle/>
           <a:p>
-            <a:pPr indent="0" marL="0">
+            <a:pPr marL="0" indent="0">
               <a:buNone/>
             </a:pPr>
             <a:r>
@@ -27319,7 +27066,7 @@
           <a:bodyPr wrap="square" lIns="0" tIns="0" rIns="0" bIns="0" rtlCol="0" anchor="ctr"/>
           <a:lstStyle/>
           <a:p>
-            <a:pPr indent="0" marL="0">
+            <a:pPr marL="0" indent="0">
               <a:buNone/>
             </a:pPr>
             <a:r>
@@ -27383,7 +27130,7 @@
           <a:bodyPr wrap="square" lIns="0" tIns="0" rIns="0" bIns="0" rtlCol="0" anchor="ctr"/>
           <a:lstStyle/>
           <a:p>
-            <a:pPr indent="0" marL="0">
+            <a:pPr marL="0" indent="0">
               <a:buNone/>
             </a:pPr>
             <a:r>
@@ -27447,7 +27194,7 @@
           <a:bodyPr wrap="square" lIns="0" tIns="0" rIns="0" bIns="0" rtlCol="0" anchor="ctr"/>
           <a:lstStyle/>
           <a:p>
-            <a:pPr indent="0" marL="0">
+            <a:pPr marL="0" indent="0">
               <a:buNone/>
             </a:pPr>
             <a:r>
@@ -27511,7 +27258,7 @@
           <a:bodyPr wrap="square" lIns="0" tIns="0" rIns="0" bIns="0" rtlCol="0" anchor="ctr"/>
           <a:lstStyle/>
           <a:p>
-            <a:pPr indent="0" marL="0">
+            <a:pPr marL="0" indent="0">
               <a:buNone/>
             </a:pPr>
             <a:r>
@@ -27575,7 +27322,7 @@
           <a:bodyPr wrap="square" lIns="0" tIns="0" rIns="0" bIns="0" rtlCol="0" anchor="ctr"/>
           <a:lstStyle/>
           <a:p>
-            <a:pPr indent="0" marL="0">
+            <a:pPr marL="0" indent="0">
               <a:buNone/>
             </a:pPr>
             <a:r>
@@ -27639,7 +27386,7 @@
           <a:bodyPr wrap="square" lIns="0" tIns="0" rIns="0" bIns="0" rtlCol="0" anchor="ctr"/>
           <a:lstStyle/>
           <a:p>
-            <a:pPr indent="0" marL="0">
+            <a:pPr marL="0" indent="0">
               <a:buNone/>
             </a:pPr>
             <a:r>
@@ -27703,7 +27450,7 @@
           <a:bodyPr wrap="square" lIns="0" tIns="0" rIns="0" bIns="0" rtlCol="0" anchor="ctr"/>
           <a:lstStyle/>
           <a:p>
-            <a:pPr indent="0" marL="0">
+            <a:pPr marL="0" indent="0">
               <a:buNone/>
             </a:pPr>
             <a:r>
@@ -27767,7 +27514,7 @@
           <a:bodyPr wrap="square" lIns="0" tIns="0" rIns="0" bIns="0" rtlCol="0" anchor="ctr"/>
           <a:lstStyle/>
           <a:p>
-            <a:pPr indent="0" marL="0">
+            <a:pPr marL="0" indent="0">
               <a:buNone/>
             </a:pPr>
             <a:r>
@@ -27831,7 +27578,7 @@
           <a:bodyPr wrap="square" lIns="0" tIns="0" rIns="0" bIns="0" rtlCol="0" anchor="ctr"/>
           <a:lstStyle/>
           <a:p>
-            <a:pPr indent="0" marL="0">
+            <a:pPr marL="0" indent="0">
               <a:buNone/>
             </a:pPr>
             <a:r>
@@ -27895,7 +27642,7 @@
           <a:bodyPr wrap="square" lIns="0" tIns="0" rIns="0" bIns="0" rtlCol="0" anchor="ctr"/>
           <a:lstStyle/>
           <a:p>
-            <a:pPr indent="0" marL="0">
+            <a:pPr marL="0" indent="0">
               <a:buNone/>
             </a:pPr>
             <a:r>
@@ -27959,7 +27706,7 @@
           <a:bodyPr wrap="square" lIns="0" tIns="0" rIns="0" bIns="0" rtlCol="0" anchor="ctr"/>
           <a:lstStyle/>
           <a:p>
-            <a:pPr indent="0" marL="0">
+            <a:pPr marL="0" indent="0">
               <a:buNone/>
             </a:pPr>
             <a:r>
@@ -28023,7 +27770,7 @@
           <a:bodyPr wrap="square" lIns="0" tIns="0" rIns="0" bIns="0" rtlCol="0" anchor="ctr"/>
           <a:lstStyle/>
           <a:p>
-            <a:pPr indent="0" marL="0">
+            <a:pPr marL="0" indent="0">
               <a:buNone/>
             </a:pPr>
             <a:r>
@@ -28087,7 +27834,7 @@
           <a:bodyPr wrap="square" lIns="0" tIns="0" rIns="0" bIns="0" rtlCol="0" anchor="ctr"/>
           <a:lstStyle/>
           <a:p>
-            <a:pPr indent="0" marL="0">
+            <a:pPr marL="0" indent="0">
               <a:buNone/>
             </a:pPr>
             <a:r>
@@ -28151,7 +27898,7 @@
           <a:bodyPr wrap="square" lIns="0" tIns="0" rIns="0" bIns="0" rtlCol="0" anchor="ctr"/>
           <a:lstStyle/>
           <a:p>
-            <a:pPr indent="0" marL="0">
+            <a:pPr marL="0" indent="0">
               <a:buNone/>
             </a:pPr>
             <a:r>
@@ -28215,7 +27962,7 @@
           <a:bodyPr wrap="square" lIns="0" tIns="0" rIns="0" bIns="0" rtlCol="0" anchor="ctr"/>
           <a:lstStyle/>
           <a:p>
-            <a:pPr indent="0" marL="0">
+            <a:pPr marL="0" indent="0">
               <a:buNone/>
             </a:pPr>
             <a:r>
@@ -28279,7 +28026,7 @@
           <a:bodyPr wrap="square" lIns="0" tIns="0" rIns="0" bIns="0" rtlCol="0" anchor="ctr"/>
           <a:lstStyle/>
           <a:p>
-            <a:pPr indent="0" marL="0">
+            <a:pPr marL="0" indent="0">
               <a:buNone/>
             </a:pPr>
             <a:r>
@@ -28343,7 +28090,7 @@
           <a:bodyPr wrap="square" lIns="0" tIns="0" rIns="0" bIns="0" rtlCol="0" anchor="ctr"/>
           <a:lstStyle/>
           <a:p>
-            <a:pPr indent="0" marL="0">
+            <a:pPr marL="0" indent="0">
               <a:buNone/>
             </a:pPr>
             <a:r>
@@ -28407,7 +28154,7 @@
           <a:bodyPr wrap="square" lIns="0" tIns="0" rIns="0" bIns="0" rtlCol="0" anchor="ctr"/>
           <a:lstStyle/>
           <a:p>
-            <a:pPr indent="0" marL="0">
+            <a:pPr marL="0" indent="0">
               <a:buNone/>
             </a:pPr>
             <a:r>
@@ -28471,7 +28218,7 @@
           <a:bodyPr wrap="square" lIns="0" tIns="0" rIns="0" bIns="0" rtlCol="0" anchor="ctr"/>
           <a:lstStyle/>
           <a:p>
-            <a:pPr indent="0" marL="0">
+            <a:pPr marL="0" indent="0">
               <a:buNone/>
             </a:pPr>
             <a:r>
@@ -28535,7 +28282,7 @@
           <a:bodyPr wrap="square" lIns="0" tIns="0" rIns="0" bIns="0" rtlCol="0" anchor="ctr"/>
           <a:lstStyle/>
           <a:p>
-            <a:pPr indent="0" marL="0">
+            <a:pPr marL="0" indent="0">
               <a:buNone/>
             </a:pPr>
             <a:r>
@@ -28599,7 +28346,7 @@
           <a:bodyPr wrap="square" lIns="0" tIns="0" rIns="0" bIns="0" rtlCol="0" anchor="ctr"/>
           <a:lstStyle/>
           <a:p>
-            <a:pPr indent="0" marL="0">
+            <a:pPr marL="0" indent="0">
               <a:buNone/>
             </a:pPr>
             <a:r>
@@ -28663,7 +28410,7 @@
           <a:bodyPr wrap="square" lIns="0" tIns="0" rIns="0" bIns="0" rtlCol="0" anchor="ctr"/>
           <a:lstStyle/>
           <a:p>
-            <a:pPr indent="0" marL="0">
+            <a:pPr marL="0" indent="0">
               <a:buNone/>
             </a:pPr>
             <a:r>
@@ -28727,7 +28474,7 @@
           <a:bodyPr wrap="square" lIns="0" tIns="0" rIns="0" bIns="0" rtlCol="0" anchor="ctr"/>
           <a:lstStyle/>
           <a:p>
-            <a:pPr indent="0" marL="0">
+            <a:pPr marL="0" indent="0">
               <a:buNone/>
             </a:pPr>
             <a:r>
@@ -28791,7 +28538,7 @@
           <a:bodyPr wrap="square" lIns="0" tIns="0" rIns="0" bIns="0" rtlCol="0" anchor="ctr"/>
           <a:lstStyle/>
           <a:p>
-            <a:pPr indent="0" marL="0">
+            <a:pPr marL="0" indent="0">
               <a:buNone/>
             </a:pPr>
             <a:r>
@@ -28855,7 +28602,7 @@
           <a:bodyPr wrap="square" lIns="0" tIns="0" rIns="0" bIns="0" rtlCol="0" anchor="ctr"/>
           <a:lstStyle/>
           <a:p>
-            <a:pPr indent="0" marL="0">
+            <a:pPr marL="0" indent="0">
               <a:buNone/>
             </a:pPr>
             <a:r>
@@ -28919,7 +28666,7 @@
           <a:bodyPr wrap="square" lIns="0" tIns="0" rIns="0" bIns="0" rtlCol="0" anchor="ctr"/>
           <a:lstStyle/>
           <a:p>
-            <a:pPr indent="0" marL="0">
+            <a:pPr marL="0" indent="0">
               <a:buNone/>
             </a:pPr>
             <a:r>
@@ -28983,7 +28730,7 @@
           <a:bodyPr wrap="square" lIns="0" tIns="0" rIns="0" bIns="0" rtlCol="0" anchor="ctr"/>
           <a:lstStyle/>
           <a:p>
-            <a:pPr indent="0" marL="0">
+            <a:pPr marL="0" indent="0">
               <a:buNone/>
             </a:pPr>
             <a:r>
@@ -29047,7 +28794,7 @@
           <a:bodyPr wrap="square" lIns="0" tIns="0" rIns="0" bIns="0" rtlCol="0" anchor="ctr"/>
           <a:lstStyle/>
           <a:p>
-            <a:pPr indent="0" marL="0">
+            <a:pPr marL="0" indent="0">
               <a:buNone/>
             </a:pPr>
             <a:r>
@@ -29111,7 +28858,7 @@
           <a:bodyPr wrap="square" lIns="0" tIns="0" rIns="0" bIns="0" rtlCol="0" anchor="ctr"/>
           <a:lstStyle/>
           <a:p>
-            <a:pPr indent="0" marL="0">
+            <a:pPr marL="0" indent="0">
               <a:buNone/>
             </a:pPr>
             <a:r>
@@ -29175,7 +28922,7 @@
           <a:bodyPr wrap="square" lIns="0" tIns="0" rIns="0" bIns="0" rtlCol="0" anchor="ctr"/>
           <a:lstStyle/>
           <a:p>
-            <a:pPr indent="0" marL="0">
+            <a:pPr marL="0" indent="0">
               <a:buNone/>
             </a:pPr>
             <a:r>
@@ -29239,7 +28986,7 @@
           <a:bodyPr wrap="square" lIns="0" tIns="0" rIns="0" bIns="0" rtlCol="0" anchor="ctr"/>
           <a:lstStyle/>
           <a:p>
-            <a:pPr indent="0" marL="0">
+            <a:pPr marL="0" indent="0">
               <a:buNone/>
             </a:pPr>
             <a:r>
@@ -29303,7 +29050,7 @@
           <a:bodyPr wrap="square" lIns="0" tIns="0" rIns="0" bIns="0" rtlCol="0" anchor="ctr"/>
           <a:lstStyle/>
           <a:p>
-            <a:pPr indent="0" marL="0">
+            <a:pPr marL="0" indent="0">
               <a:buNone/>
             </a:pPr>
             <a:r>
@@ -29367,7 +29114,7 @@
           <a:bodyPr wrap="square" lIns="0" tIns="0" rIns="0" bIns="0" rtlCol="0" anchor="ctr"/>
           <a:lstStyle/>
           <a:p>
-            <a:pPr indent="0" marL="0">
+            <a:pPr marL="0" indent="0">
               <a:buNone/>
             </a:pPr>
             <a:r>
@@ -29431,7 +29178,7 @@
           <a:bodyPr wrap="square" lIns="0" tIns="0" rIns="0" bIns="0" rtlCol="0" anchor="ctr"/>
           <a:lstStyle/>
           <a:p>
-            <a:pPr indent="0" marL="0">
+            <a:pPr marL="0" indent="0">
               <a:buNone/>
             </a:pPr>
             <a:r>
@@ -29495,7 +29242,7 @@
           <a:bodyPr wrap="square" lIns="0" tIns="0" rIns="0" bIns="0" rtlCol="0" anchor="ctr"/>
           <a:lstStyle/>
           <a:p>
-            <a:pPr indent="0" marL="0">
+            <a:pPr marL="0" indent="0">
               <a:buNone/>
             </a:pPr>
             <a:r>
@@ -29559,7 +29306,7 @@
           <a:bodyPr wrap="square" lIns="0" tIns="0" rIns="0" bIns="0" rtlCol="0" anchor="ctr"/>
           <a:lstStyle/>
           <a:p>
-            <a:pPr indent="0" marL="0">
+            <a:pPr marL="0" indent="0">
               <a:buNone/>
             </a:pPr>
             <a:r>
@@ -29623,7 +29370,7 @@
           <a:bodyPr wrap="square" lIns="0" tIns="0" rIns="0" bIns="0" rtlCol="0" anchor="ctr"/>
           <a:lstStyle/>
           <a:p>
-            <a:pPr indent="0" marL="0">
+            <a:pPr marL="0" indent="0">
               <a:buNone/>
             </a:pPr>
             <a:r>
@@ -29687,7 +29434,7 @@
           <a:bodyPr wrap="square" lIns="0" tIns="0" rIns="0" bIns="0" rtlCol="0" anchor="ctr"/>
           <a:lstStyle/>
           <a:p>
-            <a:pPr indent="0" marL="0">
+            <a:pPr marL="0" indent="0">
               <a:buNone/>
             </a:pPr>
             <a:r>
@@ -29751,7 +29498,7 @@
           <a:bodyPr wrap="square" lIns="0" tIns="0" rIns="0" bIns="0" rtlCol="0" anchor="ctr"/>
           <a:lstStyle/>
           <a:p>
-            <a:pPr indent="0" marL="0">
+            <a:pPr marL="0" indent="0">
               <a:buNone/>
             </a:pPr>
             <a:r>
@@ -29815,7 +29562,7 @@
           <a:bodyPr wrap="square" lIns="0" tIns="0" rIns="0" bIns="0" rtlCol="0" anchor="ctr"/>
           <a:lstStyle/>
           <a:p>
-            <a:pPr indent="0" marL="0">
+            <a:pPr marL="0" indent="0">
               <a:buNone/>
             </a:pPr>
             <a:r>
@@ -29879,7 +29626,7 @@
           <a:bodyPr wrap="square" lIns="0" tIns="0" rIns="0" bIns="0" rtlCol="0" anchor="ctr"/>
           <a:lstStyle/>
           <a:p>
-            <a:pPr indent="0" marL="0">
+            <a:pPr marL="0" indent="0">
               <a:buNone/>
             </a:pPr>
             <a:r>
@@ -29943,7 +29690,7 @@
           <a:bodyPr wrap="square" lIns="0" tIns="0" rIns="0" bIns="0" rtlCol="0" anchor="ctr"/>
           <a:lstStyle/>
           <a:p>
-            <a:pPr indent="0" marL="0">
+            <a:pPr marL="0" indent="0">
               <a:buNone/>
             </a:pPr>
             <a:r>
@@ -30007,7 +29754,7 @@
           <a:bodyPr wrap="square" lIns="0" tIns="0" rIns="0" bIns="0" rtlCol="0" anchor="ctr"/>
           <a:lstStyle/>
           <a:p>
-            <a:pPr indent="0" marL="0">
+            <a:pPr marL="0" indent="0">
               <a:buNone/>
             </a:pPr>
             <a:r>
@@ -30071,7 +29818,7 @@
           <a:bodyPr wrap="square" lIns="0" tIns="0" rIns="0" bIns="0" rtlCol="0" anchor="ctr"/>
           <a:lstStyle/>
           <a:p>
-            <a:pPr indent="0" marL="0">
+            <a:pPr marL="0" indent="0">
               <a:buNone/>
             </a:pPr>
             <a:r>
@@ -30135,7 +29882,7 @@
           <a:bodyPr wrap="square" lIns="0" tIns="0" rIns="0" bIns="0" rtlCol="0" anchor="ctr"/>
           <a:lstStyle/>
           <a:p>
-            <a:pPr indent="0" marL="0">
+            <a:pPr marL="0" indent="0">
               <a:buNone/>
             </a:pPr>
             <a:r>
@@ -30199,7 +29946,7 @@
           <a:bodyPr wrap="square" lIns="0" tIns="0" rIns="0" bIns="0" rtlCol="0" anchor="ctr"/>
           <a:lstStyle/>
           <a:p>
-            <a:pPr indent="0" marL="0">
+            <a:pPr marL="0" indent="0">
               <a:buNone/>
             </a:pPr>
             <a:r>
@@ -30263,7 +30010,7 @@
           <a:bodyPr wrap="square" lIns="0" tIns="0" rIns="0" bIns="0" rtlCol="0" anchor="ctr"/>
           <a:lstStyle/>
           <a:p>
-            <a:pPr indent="0" marL="0">
+            <a:pPr marL="0" indent="0">
               <a:buNone/>
             </a:pPr>
             <a:r>
@@ -30327,7 +30074,7 @@
           <a:bodyPr wrap="square" lIns="0" tIns="0" rIns="0" bIns="0" rtlCol="0" anchor="ctr"/>
           <a:lstStyle/>
           <a:p>
-            <a:pPr indent="0" marL="0">
+            <a:pPr marL="0" indent="0">
               <a:buNone/>
             </a:pPr>
             <a:r>
@@ -30391,7 +30138,7 @@
           <a:bodyPr wrap="square" lIns="0" tIns="0" rIns="0" bIns="0" rtlCol="0" anchor="ctr"/>
           <a:lstStyle/>
           <a:p>
-            <a:pPr indent="0" marL="0">
+            <a:pPr marL="0" indent="0">
               <a:buNone/>
             </a:pPr>
             <a:r>
@@ -30455,7 +30202,7 @@
           <a:bodyPr wrap="square" lIns="0" tIns="0" rIns="0" bIns="0" rtlCol="0" anchor="ctr"/>
           <a:lstStyle/>
           <a:p>
-            <a:pPr indent="0" marL="0">
+            <a:pPr marL="0" indent="0">
               <a:buNone/>
             </a:pPr>
             <a:r>
@@ -30519,7 +30266,7 @@
           <a:bodyPr wrap="square" lIns="0" tIns="0" rIns="0" bIns="0" rtlCol="0" anchor="ctr"/>
           <a:lstStyle/>
           <a:p>
-            <a:pPr indent="0" marL="0">
+            <a:pPr marL="0" indent="0">
               <a:buNone/>
             </a:pPr>
             <a:r>
@@ -30583,7 +30330,7 @@
           <a:bodyPr wrap="square" lIns="0" tIns="0" rIns="0" bIns="0" rtlCol="0" anchor="ctr"/>
           <a:lstStyle/>
           <a:p>
-            <a:pPr indent="0" marL="0">
+            <a:pPr marL="0" indent="0">
               <a:buNone/>
             </a:pPr>
             <a:r>
@@ -30647,7 +30394,7 @@
           <a:bodyPr wrap="square" lIns="0" tIns="0" rIns="0" bIns="0" rtlCol="0" anchor="ctr"/>
           <a:lstStyle/>
           <a:p>
-            <a:pPr indent="0" marL="0">
+            <a:pPr marL="0" indent="0">
               <a:buNone/>
             </a:pPr>
             <a:r>
@@ -30711,7 +30458,7 @@
           <a:bodyPr wrap="square" lIns="0" tIns="0" rIns="0" bIns="0" rtlCol="0" anchor="ctr"/>
           <a:lstStyle/>
           <a:p>
-            <a:pPr indent="0" marL="0">
+            <a:pPr marL="0" indent="0">
               <a:buNone/>
             </a:pPr>
             <a:r>
@@ -30775,7 +30522,7 @@
           <a:bodyPr wrap="square" lIns="0" tIns="0" rIns="0" bIns="0" rtlCol="0" anchor="ctr"/>
           <a:lstStyle/>
           <a:p>
-            <a:pPr indent="0" marL="0">
+            <a:pPr marL="0" indent="0">
               <a:buNone/>
             </a:pPr>
             <a:r>
@@ -30839,7 +30586,7 @@
           <a:bodyPr wrap="square" lIns="0" tIns="0" rIns="0" bIns="0" rtlCol="0" anchor="ctr"/>
           <a:lstStyle/>
           <a:p>
-            <a:pPr indent="0" marL="0">
+            <a:pPr marL="0" indent="0">
               <a:buNone/>
             </a:pPr>
             <a:r>
@@ -30903,7 +30650,7 @@
           <a:bodyPr wrap="square" lIns="0" tIns="0" rIns="0" bIns="0" rtlCol="0" anchor="ctr"/>
           <a:lstStyle/>
           <a:p>
-            <a:pPr indent="0" marL="0">
+            <a:pPr marL="0" indent="0">
               <a:buNone/>
             </a:pPr>
             <a:r>
@@ -30967,7 +30714,7 @@
           <a:bodyPr wrap="square" lIns="0" tIns="0" rIns="0" bIns="0" rtlCol="0" anchor="ctr"/>
           <a:lstStyle/>
           <a:p>
-            <a:pPr indent="0" marL="0">
+            <a:pPr marL="0" indent="0">
               <a:buNone/>
             </a:pPr>
             <a:r>
@@ -31031,7 +30778,7 @@
           <a:bodyPr wrap="square" lIns="0" tIns="0" rIns="0" bIns="0" rtlCol="0" anchor="ctr"/>
           <a:lstStyle/>
           <a:p>
-            <a:pPr algn="ctr" indent="0" marL="0">
+            <a:pPr marL="0" indent="0" algn="ctr">
               <a:buNone/>
             </a:pPr>
             <a:r>
@@ -31048,7 +30795,7 @@
             <a:endParaRPr lang="en-US" sz="1000" dirty="0"/>
           </a:p>
           <a:p>
-            <a:pPr algn="ctr" indent="0" marL="0">
+            <a:pPr marL="0" indent="0" algn="ctr">
               <a:buNone/>
             </a:pPr>
             <a:r>
@@ -31112,7 +30859,7 @@
           <a:bodyPr wrap="square" lIns="0" tIns="0" rIns="0" bIns="0" rtlCol="0" anchor="ctr"/>
           <a:lstStyle/>
           <a:p>
-            <a:pPr indent="0" marL="0">
+            <a:pPr marL="0" indent="0">
               <a:buNone/>
             </a:pPr>
             <a:r>
@@ -31176,7 +30923,7 @@
           <a:bodyPr wrap="square" lIns="0" tIns="0" rIns="0" bIns="0" rtlCol="0" anchor="ctr"/>
           <a:lstStyle/>
           <a:p>
-            <a:pPr indent="0" marL="0">
+            <a:pPr marL="0" indent="0">
               <a:buNone/>
             </a:pPr>
             <a:r>
@@ -31240,7 +30987,7 @@
           <a:bodyPr wrap="square" lIns="0" tIns="0" rIns="0" bIns="0" rtlCol="0" anchor="ctr"/>
           <a:lstStyle/>
           <a:p>
-            <a:pPr indent="0" marL="0">
+            <a:pPr marL="0" indent="0">
               <a:buNone/>
             </a:pPr>
             <a:r>
@@ -31304,7 +31051,7 @@
           <a:bodyPr wrap="square" lIns="0" tIns="0" rIns="0" bIns="0" rtlCol="0" anchor="ctr"/>
           <a:lstStyle/>
           <a:p>
-            <a:pPr indent="0" marL="0">
+            <a:pPr marL="0" indent="0">
               <a:buNone/>
             </a:pPr>
             <a:r>
@@ -31368,7 +31115,7 @@
           <a:bodyPr wrap="square" lIns="0" tIns="0" rIns="0" bIns="0" rtlCol="0" anchor="ctr"/>
           <a:lstStyle/>
           <a:p>
-            <a:pPr indent="0" marL="0">
+            <a:pPr marL="0" indent="0">
               <a:buNone/>
             </a:pPr>
             <a:r>
@@ -31432,7 +31179,7 @@
           <a:bodyPr wrap="square" lIns="0" tIns="0" rIns="0" bIns="0" rtlCol="0" anchor="ctr"/>
           <a:lstStyle/>
           <a:p>
-            <a:pPr indent="0" marL="0">
+            <a:pPr marL="0" indent="0">
               <a:buNone/>
             </a:pPr>
             <a:r>
@@ -31496,7 +31243,7 @@
           <a:bodyPr wrap="square" lIns="0" tIns="0" rIns="0" bIns="0" rtlCol="0" anchor="ctr"/>
           <a:lstStyle/>
           <a:p>
-            <a:pPr indent="0" marL="0">
+            <a:pPr marL="0" indent="0">
               <a:buNone/>
             </a:pPr>
             <a:r>
@@ -31560,7 +31307,7 @@
           <a:bodyPr wrap="square" lIns="0" tIns="0" rIns="0" bIns="0" rtlCol="0" anchor="ctr"/>
           <a:lstStyle/>
           <a:p>
-            <a:pPr indent="0" marL="0">
+            <a:pPr marL="0" indent="0">
               <a:buNone/>
             </a:pPr>
             <a:r>
@@ -31624,7 +31371,7 @@
           <a:bodyPr wrap="square" lIns="0" tIns="0" rIns="0" bIns="0" rtlCol="0" anchor="ctr"/>
           <a:lstStyle/>
           <a:p>
-            <a:pPr indent="0" marL="0">
+            <a:pPr marL="0" indent="0">
               <a:buNone/>
             </a:pPr>
             <a:r>
@@ -31688,7 +31435,7 @@
           <a:bodyPr wrap="square" lIns="0" tIns="0" rIns="0" bIns="0" rtlCol="0" anchor="ctr"/>
           <a:lstStyle/>
           <a:p>
-            <a:pPr indent="0" marL="0">
+            <a:pPr marL="0" indent="0">
               <a:buNone/>
             </a:pPr>
             <a:r>
@@ -31752,7 +31499,7 @@
           <a:bodyPr wrap="square" lIns="0" tIns="0" rIns="0" bIns="0" rtlCol="0" anchor="ctr"/>
           <a:lstStyle/>
           <a:p>
-            <a:pPr indent="0" marL="0">
+            <a:pPr marL="0" indent="0">
               <a:buNone/>
             </a:pPr>
             <a:r>
@@ -31786,6 +31533,7 @@
         <a:solidFill>
           <a:srgbClr val="F0F6FA"/>
         </a:solidFill>
+        <a:effectLst/>
       </p:bgPr>
     </p:bg>
     <p:spTree>
@@ -31873,7 +31621,7 @@
           <a:bodyPr wrap="square" lIns="0" tIns="0" rIns="0" bIns="0" rtlCol="0" anchor="ctr"/>
           <a:lstStyle/>
           <a:p>
-            <a:pPr indent="0" marL="0">
+            <a:pPr marL="0" indent="0">
               <a:buNone/>
             </a:pPr>
             <a:r>
@@ -31893,7 +31641,7 @@
       </p:sp>
       <p:graphicFrame>
         <p:nvGraphicFramePr>
-          <p:cNvPr id="5" name="Chart 0" descr=""/>
+          <p:cNvPr id="5" name="Chart 0"/>
           <p:cNvGraphicFramePr/>
           <p:nvPr/>
         </p:nvGraphicFramePr>
@@ -31901,9 +31649,9 @@
           <a:off x="228600" y="877824"/>
           <a:ext cx="5943600" cy="4023360"/>
         </p:xfrm>
-        <a:graphic xmlns:a="http://schemas.openxmlformats.org/drawingml/2006/main">
+        <a:graphic>
           <a:graphicData uri="http://schemas.openxmlformats.org/drawingml/2006/chart">
-            <c:chart xmlns:c="http://schemas.openxmlformats.org/drawingml/2006/chart" r:id="rId1"/>
+            <c:chart xmlns:c="http://schemas.openxmlformats.org/drawingml/2006/chart" xmlns:r="http://schemas.openxmlformats.org/officeDocument/2006/relationships" r:id="rId3"/>
           </a:graphicData>
         </a:graphic>
       </p:graphicFrame>
@@ -31931,7 +31679,7 @@
             <a:prstDash val="solid"/>
           </a:ln>
           <a:effectLst>
-            <a:outerShdw sx="100000" sy="100000" kx="0" ky="0" algn="bl" rotWithShape="0" blurRad="63500" dist="25400" dir="8100000">
+            <a:outerShdw blurRad="63500" dist="25400" dir="8100000" algn="bl" rotWithShape="0">
               <a:srgbClr val="000000">
                 <a:alpha val="12000"/>
               </a:srgbClr>
@@ -31985,7 +31733,7 @@
           <a:bodyPr wrap="square" lIns="0" tIns="0" rIns="0" bIns="0" rtlCol="0" anchor="ctr"/>
           <a:lstStyle/>
           <a:p>
-            <a:pPr indent="0" marL="0">
+            <a:pPr marL="0" indent="0">
               <a:buNone/>
             </a:pPr>
             <a:r>
@@ -32024,7 +31772,7 @@
           <a:bodyPr wrap="square" lIns="0" tIns="0" rIns="0" bIns="0" rtlCol="0" anchor="ctr"/>
           <a:lstStyle/>
           <a:p>
-            <a:pPr indent="0" marL="0">
+            <a:pPr marL="0" indent="0">
               <a:buNone/>
             </a:pPr>
             <a:r>
@@ -32063,7 +31811,7 @@
           <a:bodyPr wrap="square" lIns="0" tIns="0" rIns="0" bIns="0" rtlCol="0" anchor="ctr"/>
           <a:lstStyle/>
           <a:p>
-            <a:pPr indent="0" marL="0">
+            <a:pPr marL="0" indent="0">
               <a:buNone/>
             </a:pPr>
             <a:r>
@@ -32105,7 +31853,7 @@
             <a:prstDash val="solid"/>
           </a:ln>
           <a:effectLst>
-            <a:outerShdw sx="100000" sy="100000" kx="0" ky="0" algn="bl" rotWithShape="0" blurRad="63500" dist="25400" dir="8100000">
+            <a:outerShdw blurRad="63500" dist="25400" dir="8100000" algn="bl" rotWithShape="0">
               <a:srgbClr val="000000">
                 <a:alpha val="12000"/>
               </a:srgbClr>
@@ -32159,7 +31907,7 @@
           <a:bodyPr wrap="square" lIns="0" tIns="0" rIns="0" bIns="0" rtlCol="0" anchor="ctr"/>
           <a:lstStyle/>
           <a:p>
-            <a:pPr indent="0" marL="0">
+            <a:pPr marL="0" indent="0">
               <a:buNone/>
             </a:pPr>
             <a:r>
@@ -32198,7 +31946,7 @@
           <a:bodyPr wrap="square" lIns="0" tIns="0" rIns="0" bIns="0" rtlCol="0" anchor="ctr"/>
           <a:lstStyle/>
           <a:p>
-            <a:pPr indent="0" marL="0">
+            <a:pPr marL="0" indent="0">
               <a:buNone/>
             </a:pPr>
             <a:r>
@@ -32237,7 +31985,7 @@
           <a:bodyPr wrap="square" lIns="0" tIns="0" rIns="0" bIns="0" rtlCol="0" anchor="ctr"/>
           <a:lstStyle/>
           <a:p>
-            <a:pPr indent="0" marL="0">
+            <a:pPr marL="0" indent="0">
               <a:buNone/>
             </a:pPr>
             <a:r>
@@ -32279,7 +32027,7 @@
             <a:prstDash val="solid"/>
           </a:ln>
           <a:effectLst>
-            <a:outerShdw sx="100000" sy="100000" kx="0" ky="0" algn="bl" rotWithShape="0" blurRad="63500" dist="25400" dir="8100000">
+            <a:outerShdw blurRad="63500" dist="25400" dir="8100000" algn="bl" rotWithShape="0">
               <a:srgbClr val="000000">
                 <a:alpha val="12000"/>
               </a:srgbClr>
@@ -32333,7 +32081,7 @@
           <a:bodyPr wrap="square" lIns="0" tIns="0" rIns="0" bIns="0" rtlCol="0" anchor="ctr"/>
           <a:lstStyle/>
           <a:p>
-            <a:pPr indent="0" marL="0">
+            <a:pPr marL="0" indent="0">
               <a:buNone/>
             </a:pPr>
             <a:r>
@@ -32372,7 +32120,7 @@
           <a:bodyPr wrap="square" lIns="0" tIns="0" rIns="0" bIns="0" rtlCol="0" anchor="ctr"/>
           <a:lstStyle/>
           <a:p>
-            <a:pPr indent="0" marL="0">
+            <a:pPr marL="0" indent="0">
               <a:buNone/>
             </a:pPr>
             <a:r>
@@ -32436,7 +32184,7 @@
           <a:bodyPr wrap="square" lIns="0" tIns="0" rIns="0" bIns="0" rtlCol="0" anchor="ctr"/>
           <a:lstStyle/>
           <a:p>
-            <a:pPr indent="0" marL="0">
+            <a:pPr marL="0" indent="0">
               <a:buNone/>
             </a:pPr>
             <a:r>
@@ -32755,4 +32503,319 @@
     </a:ext>
   </a:extLst>
 </a:theme>
+</file>
+
+<file path=ppt/theme/theme2.xml><?xml version="1.0" encoding="utf-8"?>
+<a:theme xmlns:a="http://schemas.openxmlformats.org/drawingml/2006/main" name="Office Theme">
+  <a:themeElements>
+    <a:clrScheme name="Office">
+      <a:dk1>
+        <a:sysClr val="windowText" lastClr="000000"/>
+      </a:dk1>
+      <a:lt1>
+        <a:sysClr val="window" lastClr="FFFFFF"/>
+      </a:lt1>
+      <a:dk2>
+        <a:srgbClr val="0E2841"/>
+      </a:dk2>
+      <a:lt2>
+        <a:srgbClr val="E8E8E8"/>
+      </a:lt2>
+      <a:accent1>
+        <a:srgbClr val="156082"/>
+      </a:accent1>
+      <a:accent2>
+        <a:srgbClr val="E97132"/>
+      </a:accent2>
+      <a:accent3>
+        <a:srgbClr val="196B24"/>
+      </a:accent3>
+      <a:accent4>
+        <a:srgbClr val="0F9ED5"/>
+      </a:accent4>
+      <a:accent5>
+        <a:srgbClr val="A02B93"/>
+      </a:accent5>
+      <a:accent6>
+        <a:srgbClr val="4EA72E"/>
+      </a:accent6>
+      <a:hlink>
+        <a:srgbClr val="467886"/>
+      </a:hlink>
+      <a:folHlink>
+        <a:srgbClr val="96607D"/>
+      </a:folHlink>
+    </a:clrScheme>
+    <a:fontScheme name="Office">
+      <a:majorFont>
+        <a:latin typeface="Aptos Display" panose="02110004020202020204"/>
+        <a:ea typeface=""/>
+        <a:cs typeface=""/>
+        <a:font script="Jpan" typeface="游ゴシック Light"/>
+        <a:font script="Hang" typeface="맑은 고딕"/>
+        <a:font script="Hans" typeface="等线 Light"/>
+        <a:font script="Hant" typeface="新細明體"/>
+        <a:font script="Arab" typeface="Times New Roman"/>
+        <a:font script="Hebr" typeface="Times New Roman"/>
+        <a:font script="Thai" typeface="Angsana New"/>
+        <a:font script="Ethi" typeface="Nyala"/>
+        <a:font script="Beng" typeface="Vrinda"/>
+        <a:font script="Gujr" typeface="Shruti"/>
+        <a:font script="Khmr" typeface="MoolBoran"/>
+        <a:font script="Knda" typeface="Tunga"/>
+        <a:font script="Guru" typeface="Raavi"/>
+        <a:font script="Cans" typeface="Euphemia"/>
+        <a:font script="Cher" typeface="Plantagenet Cherokee"/>
+        <a:font script="Yiii" typeface="Microsoft Yi Baiti"/>
+        <a:font script="Tibt" typeface="Microsoft Himalaya"/>
+        <a:font script="Thaa" typeface="MV Boli"/>
+        <a:font script="Deva" typeface="Mangal"/>
+        <a:font script="Telu" typeface="Gautami"/>
+        <a:font script="Taml" typeface="Latha"/>
+        <a:font script="Syrc" typeface="Estrangelo Edessa"/>
+        <a:font script="Orya" typeface="Kalinga"/>
+        <a:font script="Mlym" typeface="Kartika"/>
+        <a:font script="Laoo" typeface="DokChampa"/>
+        <a:font script="Sinh" typeface="Iskoola Pota"/>
+        <a:font script="Mong" typeface="Mongolian Baiti"/>
+        <a:font script="Viet" typeface="Times New Roman"/>
+        <a:font script="Uigh" typeface="Microsoft Uighur"/>
+        <a:font script="Geor" typeface="Sylfaen"/>
+        <a:font script="Armn" typeface="Arial"/>
+        <a:font script="Bugi" typeface="Leelawadee UI"/>
+        <a:font script="Bopo" typeface="Microsoft JhengHei"/>
+        <a:font script="Java" typeface="Javanese Text"/>
+        <a:font script="Lisu" typeface="Segoe UI"/>
+        <a:font script="Mymr" typeface="Myanmar Text"/>
+        <a:font script="Nkoo" typeface="Ebrima"/>
+        <a:font script="Olck" typeface="Nirmala UI"/>
+        <a:font script="Osma" typeface="Ebrima"/>
+        <a:font script="Phag" typeface="Phagspa"/>
+        <a:font script="Syrn" typeface="Estrangelo Edessa"/>
+        <a:font script="Syrj" typeface="Estrangelo Edessa"/>
+        <a:font script="Syre" typeface="Estrangelo Edessa"/>
+        <a:font script="Sora" typeface="Nirmala UI"/>
+        <a:font script="Tale" typeface="Microsoft Tai Le"/>
+        <a:font script="Talu" typeface="Microsoft New Tai Lue"/>
+        <a:font script="Tfng" typeface="Ebrima"/>
+      </a:majorFont>
+      <a:minorFont>
+        <a:latin typeface="Aptos" panose="02110004020202020204"/>
+        <a:ea typeface=""/>
+        <a:cs typeface=""/>
+        <a:font script="Jpan" typeface="游ゴシック"/>
+        <a:font script="Hang" typeface="맑은 고딕"/>
+        <a:font script="Hans" typeface="等线"/>
+        <a:font script="Hant" typeface="新細明體"/>
+        <a:font script="Arab" typeface="Arial"/>
+        <a:font script="Hebr" typeface="Arial"/>
+        <a:font script="Thai" typeface="Cordia New"/>
+        <a:font script="Ethi" typeface="Nyala"/>
+        <a:font script="Beng" typeface="Vrinda"/>
+        <a:font script="Gujr" typeface="Shruti"/>
+        <a:font script="Khmr" typeface="DaunPenh"/>
+        <a:font script="Knda" typeface="Tunga"/>
+        <a:font script="Guru" typeface="Raavi"/>
+        <a:font script="Cans" typeface="Euphemia"/>
+        <a:font script="Cher" typeface="Plantagenet Cherokee"/>
+        <a:font script="Yiii" typeface="Microsoft Yi Baiti"/>
+        <a:font script="Tibt" typeface="Microsoft Himalaya"/>
+        <a:font script="Thaa" typeface="MV Boli"/>
+        <a:font script="Deva" typeface="Mangal"/>
+        <a:font script="Telu" typeface="Gautami"/>
+        <a:font script="Taml" typeface="Latha"/>
+        <a:font script="Syrc" typeface="Estrangelo Edessa"/>
+        <a:font script="Orya" typeface="Kalinga"/>
+        <a:font script="Mlym" typeface="Kartika"/>
+        <a:font script="Laoo" typeface="DokChampa"/>
+        <a:font script="Sinh" typeface="Iskoola Pota"/>
+        <a:font script="Mong" typeface="Mongolian Baiti"/>
+        <a:font script="Viet" typeface="Arial"/>
+        <a:font script="Uigh" typeface="Microsoft Uighur"/>
+        <a:font script="Geor" typeface="Sylfaen"/>
+        <a:font script="Armn" typeface="Arial"/>
+        <a:font script="Bugi" typeface="Leelawadee UI"/>
+        <a:font script="Bopo" typeface="Microsoft JhengHei"/>
+        <a:font script="Java" typeface="Javanese Text"/>
+        <a:font script="Lisu" typeface="Segoe UI"/>
+        <a:font script="Mymr" typeface="Myanmar Text"/>
+        <a:font script="Nkoo" typeface="Ebrima"/>
+        <a:font script="Olck" typeface="Nirmala UI"/>
+        <a:font script="Osma" typeface="Ebrima"/>
+        <a:font script="Phag" typeface="Phagspa"/>
+        <a:font script="Syrn" typeface="Estrangelo Edessa"/>
+        <a:font script="Syrj" typeface="Estrangelo Edessa"/>
+        <a:font script="Syre" typeface="Estrangelo Edessa"/>
+        <a:font script="Sora" typeface="Nirmala UI"/>
+        <a:font script="Tale" typeface="Microsoft Tai Le"/>
+        <a:font script="Talu" typeface="Microsoft New Tai Lue"/>
+        <a:font script="Tfng" typeface="Ebrima"/>
+      </a:minorFont>
+    </a:fontScheme>
+    <a:fmtScheme name="Office">
+      <a:fillStyleLst>
+        <a:solidFill>
+          <a:schemeClr val="phClr"/>
+        </a:solidFill>
+        <a:gradFill rotWithShape="1">
+          <a:gsLst>
+            <a:gs pos="0">
+              <a:schemeClr val="phClr">
+                <a:lumMod val="110000"/>
+                <a:satMod val="105000"/>
+                <a:tint val="67000"/>
+              </a:schemeClr>
+            </a:gs>
+            <a:gs pos="50000">
+              <a:schemeClr val="phClr">
+                <a:lumMod val="105000"/>
+                <a:satMod val="103000"/>
+                <a:tint val="73000"/>
+              </a:schemeClr>
+            </a:gs>
+            <a:gs pos="100000">
+              <a:schemeClr val="phClr">
+                <a:lumMod val="105000"/>
+                <a:satMod val="109000"/>
+                <a:tint val="81000"/>
+              </a:schemeClr>
+            </a:gs>
+          </a:gsLst>
+          <a:lin ang="5400000" scaled="0"/>
+        </a:gradFill>
+        <a:gradFill rotWithShape="1">
+          <a:gsLst>
+            <a:gs pos="0">
+              <a:schemeClr val="phClr">
+                <a:satMod val="103000"/>
+                <a:lumMod val="102000"/>
+                <a:tint val="94000"/>
+              </a:schemeClr>
+            </a:gs>
+            <a:gs pos="50000">
+              <a:schemeClr val="phClr">
+                <a:satMod val="110000"/>
+                <a:lumMod val="100000"/>
+                <a:shade val="100000"/>
+              </a:schemeClr>
+            </a:gs>
+            <a:gs pos="100000">
+              <a:schemeClr val="phClr">
+                <a:lumMod val="99000"/>
+                <a:satMod val="120000"/>
+                <a:shade val="78000"/>
+              </a:schemeClr>
+            </a:gs>
+          </a:gsLst>
+          <a:lin ang="5400000" scaled="0"/>
+        </a:gradFill>
+      </a:fillStyleLst>
+      <a:lnStyleLst>
+        <a:ln w="12700" cap="flat" cmpd="sng" algn="ctr">
+          <a:solidFill>
+            <a:schemeClr val="phClr"/>
+          </a:solidFill>
+          <a:prstDash val="solid"/>
+          <a:miter lim="800000"/>
+        </a:ln>
+        <a:ln w="19050" cap="flat" cmpd="sng" algn="ctr">
+          <a:solidFill>
+            <a:schemeClr val="phClr"/>
+          </a:solidFill>
+          <a:prstDash val="solid"/>
+          <a:miter lim="800000"/>
+        </a:ln>
+        <a:ln w="25400" cap="flat" cmpd="sng" algn="ctr">
+          <a:solidFill>
+            <a:schemeClr val="phClr"/>
+          </a:solidFill>
+          <a:prstDash val="solid"/>
+          <a:miter lim="800000"/>
+        </a:ln>
+      </a:lnStyleLst>
+      <a:effectStyleLst>
+        <a:effectStyle>
+          <a:effectLst/>
+        </a:effectStyle>
+        <a:effectStyle>
+          <a:effectLst/>
+        </a:effectStyle>
+        <a:effectStyle>
+          <a:effectLst>
+            <a:outerShdw blurRad="57150" dist="19050" dir="5400000" algn="ctr" rotWithShape="0">
+              <a:srgbClr val="000000">
+                <a:alpha val="63000"/>
+              </a:srgbClr>
+            </a:outerShdw>
+          </a:effectLst>
+        </a:effectStyle>
+      </a:effectStyleLst>
+      <a:bgFillStyleLst>
+        <a:solidFill>
+          <a:schemeClr val="phClr"/>
+        </a:solidFill>
+        <a:solidFill>
+          <a:schemeClr val="phClr">
+            <a:tint val="95000"/>
+            <a:satMod val="170000"/>
+          </a:schemeClr>
+        </a:solidFill>
+        <a:gradFill rotWithShape="1">
+          <a:gsLst>
+            <a:gs pos="0">
+              <a:schemeClr val="phClr">
+                <a:tint val="93000"/>
+                <a:satMod val="150000"/>
+                <a:shade val="98000"/>
+                <a:lumMod val="102000"/>
+              </a:schemeClr>
+            </a:gs>
+            <a:gs pos="50000">
+              <a:schemeClr val="phClr">
+                <a:tint val="98000"/>
+                <a:satMod val="130000"/>
+                <a:shade val="90000"/>
+                <a:lumMod val="103000"/>
+              </a:schemeClr>
+            </a:gs>
+            <a:gs pos="100000">
+              <a:schemeClr val="phClr">
+                <a:shade val="63000"/>
+                <a:satMod val="120000"/>
+              </a:schemeClr>
+            </a:gs>
+          </a:gsLst>
+          <a:lin ang="5400000" scaled="0"/>
+        </a:gradFill>
+      </a:bgFillStyleLst>
+    </a:fmtScheme>
+  </a:themeElements>
+  <a:objectDefaults>
+    <a:lnDef>
+      <a:spPr/>
+      <a:bodyPr/>
+      <a:lstStyle/>
+      <a:style>
+        <a:lnRef idx="2">
+          <a:schemeClr val="accent1"/>
+        </a:lnRef>
+        <a:fillRef idx="0">
+          <a:schemeClr val="accent1"/>
+        </a:fillRef>
+        <a:effectRef idx="1">
+          <a:schemeClr val="accent1"/>
+        </a:effectRef>
+        <a:fontRef idx="minor">
+          <a:schemeClr val="tx1"/>
+        </a:fontRef>
+      </a:style>
+    </a:lnDef>
+  </a:objectDefaults>
+  <a:extraClrSchemeLst/>
+  <a:extLst>
+    <a:ext uri="{05A4C25C-085E-4340-85A3-A5531E510DB2}">
+      <thm15:themeFamily xmlns:thm15="http://schemas.microsoft.com/office/thememl/2012/main" name="Office Theme" id="{2E142A2C-CD16-42D6-873A-C26D2A0506FA}" vid="{1BDDFF52-6CD6-40A5-AB3C-68EB2F1E4D0A}"/>
+    </a:ext>
+  </a:extLst>
+</a:theme>
 </file>